--- a/reports/GATE1_DECK.pptx
+++ b/reports/GATE1_DECK.pptx
@@ -23,6 +23,7 @@
     <p:sldId id="271" r:id="rId22"/>
     <p:sldId id="272" r:id="rId23"/>
     <p:sldId id="273" r:id="rId24"/>
+    <p:sldId id="274" r:id="rId25"/>
   </p:sldIdLst>
   <p:sldSz cx="12191695" cy="6858000" type="screen4x3"/>
   <p:notesSz cx="6858000" cy="9144000"/>
@@ -3329,6 +3330,768 @@
                 </a:solidFill>
                 <a:latin typeface="DejaVu Sans"/>
               </a:rPr>
+              <a:t>THE PROBLEM</a:t>
+            </a:r>
+          </a:p>
+        </p:txBody>
+      </p:sp>
+      <p:sp>
+        <p:nvSpPr>
+          <p:cNvPr id="3" name="TextBox 2"/>
+          <p:cNvSpPr txBox="1"/>
+          <p:nvPr/>
+        </p:nvSpPr>
+        <p:spPr>
+          <a:xfrm>
+            <a:off x="548640" y="658368"/>
+            <a:ext cx="10972800" cy="640080"/>
+          </a:xfrm>
+          <a:prstGeom prst="rect">
+            <a:avLst/>
+          </a:prstGeom>
+          <a:noFill/>
+        </p:spPr>
+        <p:txBody>
+          <a:bodyPr wrap="square">
+            <a:spAutoFit/>
+          </a:bodyPr>
+          <a:lstStyle/>
+          <a:p>
+            <a:pPr algn="l">
+              <a:lnSpc>
+                <a:spcPct val="115000"/>
+              </a:lnSpc>
+            </a:pPr>
+            <a:r>
+              <a:rPr sz="2600" b="1">
+                <a:solidFill>
+                  <a:srgbClr val="0B0B0B"/>
+                </a:solidFill>
+                <a:latin typeface="DejaVu Sans"/>
+              </a:rPr>
+              <a:t>One line produced both the silent failure and the fabrication</a:t>
+            </a:r>
+          </a:p>
+        </p:txBody>
+      </p:sp>
+      <p:sp>
+        <p:nvSpPr>
+          <p:cNvPr id="4" name="Rounded Rectangle 3"/>
+          <p:cNvSpPr/>
+          <p:nvPr/>
+        </p:nvSpPr>
+        <p:spPr>
+          <a:xfrm>
+            <a:off x="548640" y="1554480"/>
+            <a:ext cx="11064240" cy="1371600"/>
+          </a:xfrm>
+          <a:prstGeom prst="roundRect">
+            <a:avLst/>
+          </a:prstGeom>
+          <a:solidFill>
+            <a:srgbClr val="F4F3EE"/>
+          </a:solidFill>
+          <a:ln>
+            <a:noFill/>
+          </a:ln>
+          <a:effectLst/>
+        </p:spPr>
+        <p:style>
+          <a:lnRef idx="1">
+            <a:schemeClr val="accent1"/>
+          </a:lnRef>
+          <a:fillRef idx="3">
+            <a:schemeClr val="accent1"/>
+          </a:fillRef>
+          <a:effectRef idx="2">
+            <a:schemeClr val="accent1"/>
+          </a:effectRef>
+          <a:fontRef idx="minor">
+            <a:schemeClr val="lt1"/>
+          </a:fontRef>
+        </p:style>
+        <p:txBody>
+          <a:bodyPr rtlCol="0" anchor="ctr"/>
+          <a:lstStyle/>
+          <a:p>
+            <a:pPr algn="ctr"/>
+          </a:p>
+        </p:txBody>
+      </p:sp>
+      <p:sp>
+        <p:nvSpPr>
+          <p:cNvPr id="5" name="TextBox 4"/>
+          <p:cNvSpPr txBox="1"/>
+          <p:nvPr/>
+        </p:nvSpPr>
+        <p:spPr>
+          <a:xfrm>
+            <a:off x="822960" y="1691640"/>
+            <a:ext cx="10515600" cy="1097280"/>
+          </a:xfrm>
+          <a:prstGeom prst="rect">
+            <a:avLst/>
+          </a:prstGeom>
+          <a:noFill/>
+        </p:spPr>
+        <p:txBody>
+          <a:bodyPr wrap="square">
+            <a:spAutoFit/>
+          </a:bodyPr>
+          <a:lstStyle/>
+          <a:p>
+            <a:pPr algn="l">
+              <a:lnSpc>
+                <a:spcPct val="115000"/>
+              </a:lnSpc>
+            </a:pPr>
+            <a:r>
+              <a:rPr sz="1500" b="1">
+                <a:solidFill>
+                  <a:srgbClr val="0B0B0B"/>
+                </a:solidFill>
+                <a:latin typeface="DejaVu Sans"/>
+              </a:rPr>
+              <a:t>return output_capture.getvalue()[:MAX_LEN]      # MAX_LEN = 1000</a:t>
+            </a:r>
+          </a:p>
+          <a:p>
+            <a:pPr algn="l">
+              <a:lnSpc>
+                <a:spcPct val="115000"/>
+              </a:lnSpc>
+            </a:pPr>
+            <a:r>
+              <a:rPr sz="1200" b="0">
+                <a:solidFill>
+                  <a:srgbClr val="52514E"/>
+                </a:solidFill>
+                <a:latin typeface="DejaVu Sans"/>
+              </a:rPr>
+              <a:t>the crash marker is appended AFTER the program's own output — so it falls off the end of the same slice</a:t>
+            </a:r>
+          </a:p>
+        </p:txBody>
+      </p:sp>
+      <p:sp>
+        <p:nvSpPr>
+          <p:cNvPr id="6" name="TextBox 5"/>
+          <p:cNvSpPr txBox="1"/>
+          <p:nvPr/>
+        </p:nvSpPr>
+        <p:spPr>
+          <a:xfrm>
+            <a:off x="548640" y="3200400"/>
+            <a:ext cx="10972800" cy="3657600"/>
+          </a:xfrm>
+          <a:prstGeom prst="rect">
+            <a:avLst/>
+          </a:prstGeom>
+          <a:noFill/>
+        </p:spPr>
+        <p:txBody>
+          <a:bodyPr wrap="square">
+            <a:spAutoFit/>
+          </a:bodyPr>
+          <a:lstStyle/>
+          <a:p>
+            <a:pPr algn="l">
+              <a:lnSpc>
+                <a:spcPct val="150000"/>
+              </a:lnSpc>
+            </a:pPr>
+            <a:r>
+              <a:rPr sz="1400" b="0">
+                <a:solidFill>
+                  <a:srgbClr val="52514E"/>
+                </a:solidFill>
+                <a:latin typeface="DejaVu Sans"/>
+              </a:rPr>
+              <a:t>·  The writing agent received 1,000 characters as the entire experimental record</a:t>
+            </a:r>
+          </a:p>
+          <a:p>
+            <a:pPr algn="l">
+              <a:lnSpc>
+                <a:spcPct val="150000"/>
+              </a:lnSpc>
+            </a:pPr>
+            <a:r>
+              <a:rPr sz="1400" b="0">
+                <a:solidFill>
+                  <a:srgbClr val="52514E"/>
+                </a:solidFill>
+                <a:latin typeface="DejaVu Sans"/>
+              </a:rPr>
+              <a:t>·  The only crash test was a substring search for a marker that was no longer there</a:t>
+            </a:r>
+          </a:p>
+          <a:p>
+            <a:pPr algn="l">
+              <a:lnSpc>
+                <a:spcPct val="150000"/>
+              </a:lnSpc>
+            </a:pPr>
+            <a:r>
+              <a:rPr sz="1400" b="0">
+                <a:solidFill>
+                  <a:srgbClr val="52514E"/>
+                </a:solidFill>
+                <a:latin typeface="DejaVu Sans"/>
+              </a:rPr>
+              <a:t>·  Execution ran in a never-cleared namespace, in a thread the timeout could not kill</a:t>
+            </a:r>
+          </a:p>
+        </p:txBody>
+      </p:sp>
+      <p:sp>
+        <p:nvSpPr>
+          <p:cNvPr id="7" name="Rounded Rectangle 6"/>
+          <p:cNvSpPr/>
+          <p:nvPr/>
+        </p:nvSpPr>
+        <p:spPr>
+          <a:xfrm>
+            <a:off x="548640" y="5029200"/>
+            <a:ext cx="2743200" cy="1234440"/>
+          </a:xfrm>
+          <a:prstGeom prst="roundRect">
+            <a:avLst/>
+          </a:prstGeom>
+          <a:solidFill>
+            <a:srgbClr val="F4F3EE"/>
+          </a:solidFill>
+          <a:ln>
+            <a:noFill/>
+          </a:ln>
+          <a:effectLst/>
+        </p:spPr>
+        <p:style>
+          <a:lnRef idx="1">
+            <a:schemeClr val="accent1"/>
+          </a:lnRef>
+          <a:fillRef idx="3">
+            <a:schemeClr val="accent1"/>
+          </a:fillRef>
+          <a:effectRef idx="2">
+            <a:schemeClr val="accent1"/>
+          </a:effectRef>
+          <a:fontRef idx="minor">
+            <a:schemeClr val="lt1"/>
+          </a:fontRef>
+        </p:style>
+        <p:txBody>
+          <a:bodyPr rtlCol="0" anchor="ctr"/>
+          <a:lstStyle/>
+          <a:p>
+            <a:pPr algn="ctr"/>
+          </a:p>
+        </p:txBody>
+      </p:sp>
+      <p:sp>
+        <p:nvSpPr>
+          <p:cNvPr id="8" name="TextBox 7"/>
+          <p:cNvSpPr txBox="1"/>
+          <p:nvPr/>
+        </p:nvSpPr>
+        <p:spPr>
+          <a:xfrm>
+            <a:off x="731520" y="5138928"/>
+            <a:ext cx="2377440" cy="548640"/>
+          </a:xfrm>
+          <a:prstGeom prst="rect">
+            <a:avLst/>
+          </a:prstGeom>
+          <a:noFill/>
+        </p:spPr>
+        <p:txBody>
+          <a:bodyPr wrap="square">
+            <a:spAutoFit/>
+          </a:bodyPr>
+          <a:lstStyle/>
+          <a:p>
+            <a:pPr algn="l">
+              <a:lnSpc>
+                <a:spcPct val="115000"/>
+              </a:lnSpc>
+            </a:pPr>
+            <a:r>
+              <a:rPr sz="3000" b="1">
+                <a:solidFill>
+                  <a:srgbClr val="EB6834"/>
+                </a:solidFill>
+                <a:latin typeface="DejaVu Sans"/>
+              </a:rPr>
+              <a:t>1.0</a:t>
+            </a:r>
+          </a:p>
+        </p:txBody>
+      </p:sp>
+      <p:sp>
+        <p:nvSpPr>
+          <p:cNvPr id="9" name="TextBox 8"/>
+          <p:cNvSpPr txBox="1"/>
+          <p:nvPr/>
+        </p:nvSpPr>
+        <p:spPr>
+          <a:xfrm>
+            <a:off x="731520" y="5779008"/>
+            <a:ext cx="2377440" cy="411480"/>
+          </a:xfrm>
+          <a:prstGeom prst="rect">
+            <a:avLst/>
+          </a:prstGeom>
+          <a:noFill/>
+        </p:spPr>
+        <p:txBody>
+          <a:bodyPr wrap="square">
+            <a:spAutoFit/>
+          </a:bodyPr>
+          <a:lstStyle/>
+          <a:p>
+            <a:pPr algn="l">
+              <a:lnSpc>
+                <a:spcPct val="115000"/>
+              </a:lnSpc>
+            </a:pPr>
+            <a:r>
+              <a:rPr sz="1000" b="0">
+                <a:solidFill>
+                  <a:srgbClr val="52514E"/>
+                </a:solidFill>
+                <a:latin typeface="DejaVu Sans"/>
+              </a:rPr>
+              <a:t>reward score on a run raising NameError every attempt</a:t>
+            </a:r>
+          </a:p>
+        </p:txBody>
+      </p:sp>
+      <p:sp>
+        <p:nvSpPr>
+          <p:cNvPr id="10" name="Rounded Rectangle 9"/>
+          <p:cNvSpPr/>
+          <p:nvPr/>
+        </p:nvSpPr>
+        <p:spPr>
+          <a:xfrm>
+            <a:off x="3566160" y="5029200"/>
+            <a:ext cx="2743200" cy="1234440"/>
+          </a:xfrm>
+          <a:prstGeom prst="roundRect">
+            <a:avLst/>
+          </a:prstGeom>
+          <a:solidFill>
+            <a:srgbClr val="F4F3EE"/>
+          </a:solidFill>
+          <a:ln>
+            <a:noFill/>
+          </a:ln>
+          <a:effectLst/>
+        </p:spPr>
+        <p:style>
+          <a:lnRef idx="1">
+            <a:schemeClr val="accent1"/>
+          </a:lnRef>
+          <a:fillRef idx="3">
+            <a:schemeClr val="accent1"/>
+          </a:fillRef>
+          <a:effectRef idx="2">
+            <a:schemeClr val="accent1"/>
+          </a:effectRef>
+          <a:fontRef idx="minor">
+            <a:schemeClr val="lt1"/>
+          </a:fontRef>
+        </p:style>
+        <p:txBody>
+          <a:bodyPr rtlCol="0" anchor="ctr"/>
+          <a:lstStyle/>
+          <a:p>
+            <a:pPr algn="ctr"/>
+          </a:p>
+        </p:txBody>
+      </p:sp>
+      <p:sp>
+        <p:nvSpPr>
+          <p:cNvPr id="11" name="TextBox 10"/>
+          <p:cNvSpPr txBox="1"/>
+          <p:nvPr/>
+        </p:nvSpPr>
+        <p:spPr>
+          <a:xfrm>
+            <a:off x="3749040" y="5138928"/>
+            <a:ext cx="2377440" cy="548640"/>
+          </a:xfrm>
+          <a:prstGeom prst="rect">
+            <a:avLst/>
+          </a:prstGeom>
+          <a:noFill/>
+        </p:spPr>
+        <p:txBody>
+          <a:bodyPr wrap="square">
+            <a:spAutoFit/>
+          </a:bodyPr>
+          <a:lstStyle/>
+          <a:p>
+            <a:pPr algn="l">
+              <a:lnSpc>
+                <a:spcPct val="115000"/>
+              </a:lnSpc>
+            </a:pPr>
+            <a:r>
+              <a:rPr sz="3000" b="1">
+                <a:solidFill>
+                  <a:srgbClr val="EB6834"/>
+                </a:solidFill>
+                <a:latin typeface="DejaVu Sans"/>
+              </a:rPr>
+              <a:t>81.60%</a:t>
+            </a:r>
+          </a:p>
+        </p:txBody>
+      </p:sp>
+      <p:sp>
+        <p:nvSpPr>
+          <p:cNvPr id="12" name="TextBox 11"/>
+          <p:cNvSpPr txBox="1"/>
+          <p:nvPr/>
+        </p:nvSpPr>
+        <p:spPr>
+          <a:xfrm>
+            <a:off x="3749040" y="5779008"/>
+            <a:ext cx="2377440" cy="411480"/>
+          </a:xfrm>
+          <a:prstGeom prst="rect">
+            <a:avLst/>
+          </a:prstGeom>
+          <a:noFill/>
+        </p:spPr>
+        <p:txBody>
+          <a:bodyPr wrap="square">
+            <a:spAutoFit/>
+          </a:bodyPr>
+          <a:lstStyle/>
+          <a:p>
+            <a:pPr algn="l">
+              <a:lnSpc>
+                <a:spcPct val="115000"/>
+              </a:lnSpc>
+            </a:pPr>
+            <a:r>
+              <a:rPr sz="1000" b="0">
+                <a:solidFill>
+                  <a:srgbClr val="52514E"/>
+                </a:solidFill>
+                <a:latin typeface="DejaVu Sans"/>
+              </a:rPr>
+              <a:t>test accuracy reported — never measured</a:t>
+            </a:r>
+          </a:p>
+        </p:txBody>
+      </p:sp>
+      <p:sp>
+        <p:nvSpPr>
+          <p:cNvPr id="13" name="Rounded Rectangle 12"/>
+          <p:cNvSpPr/>
+          <p:nvPr/>
+        </p:nvSpPr>
+        <p:spPr>
+          <a:xfrm>
+            <a:off x="6583680" y="5029200"/>
+            <a:ext cx="2743200" cy="1234440"/>
+          </a:xfrm>
+          <a:prstGeom prst="roundRect">
+            <a:avLst/>
+          </a:prstGeom>
+          <a:solidFill>
+            <a:srgbClr val="F4F3EE"/>
+          </a:solidFill>
+          <a:ln>
+            <a:noFill/>
+          </a:ln>
+          <a:effectLst/>
+        </p:spPr>
+        <p:style>
+          <a:lnRef idx="1">
+            <a:schemeClr val="accent1"/>
+          </a:lnRef>
+          <a:fillRef idx="3">
+            <a:schemeClr val="accent1"/>
+          </a:fillRef>
+          <a:effectRef idx="2">
+            <a:schemeClr val="accent1"/>
+          </a:effectRef>
+          <a:fontRef idx="minor">
+            <a:schemeClr val="lt1"/>
+          </a:fontRef>
+        </p:style>
+        <p:txBody>
+          <a:bodyPr rtlCol="0" anchor="ctr"/>
+          <a:lstStyle/>
+          <a:p>
+            <a:pPr algn="ctr"/>
+          </a:p>
+        </p:txBody>
+      </p:sp>
+      <p:sp>
+        <p:nvSpPr>
+          <p:cNvPr id="14" name="TextBox 13"/>
+          <p:cNvSpPr txBox="1"/>
+          <p:nvPr/>
+        </p:nvSpPr>
+        <p:spPr>
+          <a:xfrm>
+            <a:off x="6766560" y="5138928"/>
+            <a:ext cx="2377440" cy="548640"/>
+          </a:xfrm>
+          <a:prstGeom prst="rect">
+            <a:avLst/>
+          </a:prstGeom>
+          <a:noFill/>
+        </p:spPr>
+        <p:txBody>
+          <a:bodyPr wrap="square">
+            <a:spAutoFit/>
+          </a:bodyPr>
+          <a:lstStyle/>
+          <a:p>
+            <a:pPr algn="l">
+              <a:lnSpc>
+                <a:spcPct val="115000"/>
+              </a:lnSpc>
+            </a:pPr>
+            <a:r>
+              <a:rPr sz="3000" b="1">
+                <a:solidFill>
+                  <a:srgbClr val="EB6834"/>
+                </a:solidFill>
+                <a:latin typeface="DejaVu Sans"/>
+              </a:rPr>
+              <a:t>13.61×</a:t>
+            </a:r>
+          </a:p>
+        </p:txBody>
+      </p:sp>
+      <p:sp>
+        <p:nvSpPr>
+          <p:cNvPr id="15" name="TextBox 14"/>
+          <p:cNvSpPr txBox="1"/>
+          <p:nvPr/>
+        </p:nvSpPr>
+        <p:spPr>
+          <a:xfrm>
+            <a:off x="6766560" y="5779008"/>
+            <a:ext cx="2377440" cy="411480"/>
+          </a:xfrm>
+          <a:prstGeom prst="rect">
+            <a:avLst/>
+          </a:prstGeom>
+          <a:noFill/>
+        </p:spPr>
+        <p:txBody>
+          <a:bodyPr wrap="square">
+            <a:spAutoFit/>
+          </a:bodyPr>
+          <a:lstStyle/>
+          <a:p>
+            <a:pPr algn="l">
+              <a:lnSpc>
+                <a:spcPct val="115000"/>
+              </a:lnSpc>
+            </a:pPr>
+            <a:r>
+              <a:rPr sz="1000" b="0">
+                <a:solidFill>
+                  <a:srgbClr val="52514E"/>
+                </a:solidFill>
+                <a:latin typeface="DejaVu Sans"/>
+              </a:rPr>
+              <a:t>speedup reported — never measured</a:t>
+            </a:r>
+          </a:p>
+        </p:txBody>
+      </p:sp>
+      <p:sp>
+        <p:nvSpPr>
+          <p:cNvPr id="16" name="Rounded Rectangle 15"/>
+          <p:cNvSpPr/>
+          <p:nvPr/>
+        </p:nvSpPr>
+        <p:spPr>
+          <a:xfrm>
+            <a:off x="9601200" y="5029200"/>
+            <a:ext cx="2011680" cy="1234440"/>
+          </a:xfrm>
+          <a:prstGeom prst="roundRect">
+            <a:avLst/>
+          </a:prstGeom>
+          <a:solidFill>
+            <a:srgbClr val="F4F3EE"/>
+          </a:solidFill>
+          <a:ln>
+            <a:noFill/>
+          </a:ln>
+          <a:effectLst/>
+        </p:spPr>
+        <p:style>
+          <a:lnRef idx="1">
+            <a:schemeClr val="accent1"/>
+          </a:lnRef>
+          <a:fillRef idx="3">
+            <a:schemeClr val="accent1"/>
+          </a:fillRef>
+          <a:effectRef idx="2">
+            <a:schemeClr val="accent1"/>
+          </a:effectRef>
+          <a:fontRef idx="minor">
+            <a:schemeClr val="lt1"/>
+          </a:fontRef>
+        </p:style>
+        <p:txBody>
+          <a:bodyPr rtlCol="0" anchor="ctr"/>
+          <a:lstStyle/>
+          <a:p>
+            <a:pPr algn="ctr"/>
+          </a:p>
+        </p:txBody>
+      </p:sp>
+      <p:sp>
+        <p:nvSpPr>
+          <p:cNvPr id="17" name="TextBox 16"/>
+          <p:cNvSpPr txBox="1"/>
+          <p:nvPr/>
+        </p:nvSpPr>
+        <p:spPr>
+          <a:xfrm>
+            <a:off x="9784080" y="5138928"/>
+            <a:ext cx="1645920" cy="548640"/>
+          </a:xfrm>
+          <a:prstGeom prst="rect">
+            <a:avLst/>
+          </a:prstGeom>
+          <a:noFill/>
+        </p:spPr>
+        <p:txBody>
+          <a:bodyPr wrap="square">
+            <a:spAutoFit/>
+          </a:bodyPr>
+          <a:lstStyle/>
+          <a:p>
+            <a:pPr algn="l">
+              <a:lnSpc>
+                <a:spcPct val="115000"/>
+              </a:lnSpc>
+            </a:pPr>
+            <a:r>
+              <a:rPr sz="3000" b="1">
+                <a:solidFill>
+                  <a:srgbClr val="8A8880"/>
+                </a:solidFill>
+                <a:latin typeface="DejaVu Sans"/>
+              </a:rPr>
+              <a:t>n=1</a:t>
+            </a:r>
+          </a:p>
+        </p:txBody>
+      </p:sp>
+      <p:sp>
+        <p:nvSpPr>
+          <p:cNvPr id="18" name="TextBox 17"/>
+          <p:cNvSpPr txBox="1"/>
+          <p:nvPr/>
+        </p:nvSpPr>
+        <p:spPr>
+          <a:xfrm>
+            <a:off x="9784080" y="5779008"/>
+            <a:ext cx="1645920" cy="411480"/>
+          </a:xfrm>
+          <a:prstGeom prst="rect">
+            <a:avLst/>
+          </a:prstGeom>
+          <a:noFill/>
+        </p:spPr>
+        <p:txBody>
+          <a:bodyPr wrap="square">
+            <a:spAutoFit/>
+          </a:bodyPr>
+          <a:lstStyle/>
+          <a:p>
+            <a:pPr algn="l">
+              <a:lnSpc>
+                <a:spcPct val="115000"/>
+              </a:lnSpc>
+            </a:pPr>
+            <a:r>
+              <a:rPr sz="1000" b="0">
+                <a:solidFill>
+                  <a:srgbClr val="52514E"/>
+                </a:solidFill>
+                <a:latin typeface="DejaVu Sans"/>
+              </a:rPr>
+              <a:t>archived runs usable of 7</a:t>
+            </a:r>
+          </a:p>
+        </p:txBody>
+      </p:sp>
+    </p:spTree>
+  </p:cSld>
+  <p:clrMapOvr>
+    <a:masterClrMapping/>
+  </p:clrMapOvr>
+</p:sld>
+</file>
+
+<file path=ppt/slides/slide11.xml><?xml version="1.0" encoding="utf-8"?>
+<p:sld xmlns:a="http://schemas.openxmlformats.org/drawingml/2006/main" xmlns:p="http://schemas.openxmlformats.org/presentationml/2006/main" xmlns:r="http://schemas.openxmlformats.org/officeDocument/2006/relationships">
+  <p:cSld>
+    <p:bg>
+      <p:bgPr>
+        <a:solidFill>
+          <a:srgbClr val="FCFCFB"/>
+        </a:solidFill>
+        <a:effectLst/>
+      </p:bgPr>
+    </p:bg>
+    <p:spTree>
+      <p:nvGrpSpPr>
+        <p:cNvPr id="1" name=""/>
+        <p:cNvGrpSpPr/>
+        <p:nvPr/>
+      </p:nvGrpSpPr>
+      <p:grpSpPr/>
+      <p:sp>
+        <p:nvSpPr>
+          <p:cNvPr id="2" name="TextBox 1"/>
+          <p:cNvSpPr txBox="1"/>
+          <p:nvPr/>
+        </p:nvSpPr>
+        <p:spPr>
+          <a:xfrm>
+            <a:off x="548640" y="320040"/>
+            <a:ext cx="10972800" cy="365760"/>
+          </a:xfrm>
+          <a:prstGeom prst="rect">
+            <a:avLst/>
+          </a:prstGeom>
+          <a:noFill/>
+        </p:spPr>
+        <p:txBody>
+          <a:bodyPr wrap="square">
+            <a:spAutoFit/>
+          </a:bodyPr>
+          <a:lstStyle/>
+          <a:p>
+            <a:pPr algn="l">
+              <a:lnSpc>
+                <a:spcPct val="115000"/>
+              </a:lnSpc>
+            </a:pPr>
+            <a:r>
+              <a:rPr sz="1100" b="1">
+                <a:solidFill>
+                  <a:srgbClr val="2A78D6"/>
+                </a:solidFill>
+                <a:latin typeface="DejaVu Sans"/>
+              </a:rPr>
               <a:t>WHAT GATE 1 CHECKS</a:t>
             </a:r>
           </a:p>
@@ -3607,7 +4370,7 @@
 </p:sld>
 </file>
 
-<file path=ppt/slides/slide11.xml><?xml version="1.0" encoding="utf-8"?>
+<file path=ppt/slides/slide12.xml><?xml version="1.0" encoding="utf-8"?>
 <p:sld xmlns:a="http://schemas.openxmlformats.org/drawingml/2006/main" xmlns:p="http://schemas.openxmlformats.org/presentationml/2006/main" xmlns:r="http://schemas.openxmlformats.org/officeDocument/2006/relationships">
   <p:cSld>
     <p:bg>
@@ -3938,7 +4701,7 @@
 </p:sld>
 </file>
 
-<file path=ppt/slides/slide12.xml><?xml version="1.0" encoding="utf-8"?>
+<file path=ppt/slides/slide13.xml><?xml version="1.0" encoding="utf-8"?>
 <p:sld xmlns:a="http://schemas.openxmlformats.org/drawingml/2006/main" xmlns:p="http://schemas.openxmlformats.org/presentationml/2006/main" xmlns:r="http://schemas.openxmlformats.org/officeDocument/2006/relationships">
   <p:cSld>
     <p:bg>
@@ -4886,7 +5649,7 @@
 </p:sld>
 </file>
 
-<file path=ppt/slides/slide13.xml><?xml version="1.0" encoding="utf-8"?>
+<file path=ppt/slides/slide14.xml><?xml version="1.0" encoding="utf-8"?>
 <p:sld xmlns:a="http://schemas.openxmlformats.org/drawingml/2006/main" xmlns:p="http://schemas.openxmlformats.org/presentationml/2006/main" xmlns:r="http://schemas.openxmlformats.org/officeDocument/2006/relationships">
   <p:cSld>
     <p:bg>
@@ -5355,7 +6118,7 @@
 </p:sld>
 </file>
 
-<file path=ppt/slides/slide14.xml><?xml version="1.0" encoding="utf-8"?>
+<file path=ppt/slides/slide15.xml><?xml version="1.0" encoding="utf-8"?>
 <p:sld xmlns:a="http://schemas.openxmlformats.org/drawingml/2006/main" xmlns:p="http://schemas.openxmlformats.org/presentationml/2006/main" xmlns:r="http://schemas.openxmlformats.org/officeDocument/2006/relationships">
   <p:cSld>
     <p:bg>
@@ -5678,7 +6441,7 @@
 </p:sld>
 </file>
 
-<file path=ppt/slides/slide15.xml><?xml version="1.0" encoding="utf-8"?>
+<file path=ppt/slides/slide16.xml><?xml version="1.0" encoding="utf-8"?>
 <p:sld xmlns:a="http://schemas.openxmlformats.org/drawingml/2006/main" xmlns:p="http://schemas.openxmlformats.org/presentationml/2006/main" xmlns:r="http://schemas.openxmlformats.org/officeDocument/2006/relationships">
   <p:cSld>
     <p:bg>
@@ -5969,7 +6732,7 @@
 </p:sld>
 </file>
 
-<file path=ppt/slides/slide16.xml><?xml version="1.0" encoding="utf-8"?>
+<file path=ppt/slides/slide17.xml><?xml version="1.0" encoding="utf-8"?>
 <p:sld xmlns:a="http://schemas.openxmlformats.org/drawingml/2006/main" xmlns:p="http://schemas.openxmlformats.org/presentationml/2006/main" xmlns:r="http://schemas.openxmlformats.org/officeDocument/2006/relationships">
   <p:cSld>
     <p:bg>
@@ -6260,7 +7023,7 @@
 </p:sld>
 </file>
 
-<file path=ppt/slides/slide17.xml><?xml version="1.0" encoding="utf-8"?>
+<file path=ppt/slides/slide18.xml><?xml version="1.0" encoding="utf-8"?>
 <p:sld xmlns:a="http://schemas.openxmlformats.org/drawingml/2006/main" xmlns:p="http://schemas.openxmlformats.org/presentationml/2006/main" xmlns:r="http://schemas.openxmlformats.org/officeDocument/2006/relationships">
   <p:cSld>
     <p:bg>
@@ -6566,7 +7329,7 @@
 </p:sld>
 </file>
 
-<file path=ppt/slides/slide18.xml><?xml version="1.0" encoding="utf-8"?>
+<file path=ppt/slides/slide19.xml><?xml version="1.0" encoding="utf-8"?>
 <p:sld xmlns:a="http://schemas.openxmlformats.org/drawingml/2006/main" xmlns:p="http://schemas.openxmlformats.org/presentationml/2006/main" xmlns:r="http://schemas.openxmlformats.org/officeDocument/2006/relationships">
   <p:cSld>
     <p:bg>
@@ -9612,6 +10375,649 @@
                 </a:solidFill>
                 <a:latin typeface="DejaVu Sans"/>
               </a:rPr>
+              <a:t>REPORT ACCURACY</a:t>
+            </a:r>
+          </a:p>
+        </p:txBody>
+      </p:sp>
+      <p:sp>
+        <p:nvSpPr>
+          <p:cNvPr id="3" name="TextBox 2"/>
+          <p:cNvSpPr txBox="1"/>
+          <p:nvPr/>
+        </p:nvSpPr>
+        <p:spPr>
+          <a:xfrm>
+            <a:off x="548640" y="658368"/>
+            <a:ext cx="10972800" cy="640080"/>
+          </a:xfrm>
+          <a:prstGeom prst="rect">
+            <a:avLst/>
+          </a:prstGeom>
+          <a:noFill/>
+        </p:spPr>
+        <p:txBody>
+          <a:bodyPr wrap="square">
+            <a:spAutoFit/>
+          </a:bodyPr>
+          <a:lstStyle/>
+          <a:p>
+            <a:pPr algn="l">
+              <a:lnSpc>
+                <a:spcPct val="115000"/>
+              </a:lnSpc>
+            </a:pPr>
+            <a:r>
+              <a:rPr sz="2600" b="1">
+                <a:solidFill>
+                  <a:srgbClr val="0B0B0B"/>
+                </a:solidFill>
+                <a:latin typeface="DejaVu Sans"/>
+              </a:rPr>
+              <a:t>Both arms' reports, measured the same way</a:t>
+            </a:r>
+          </a:p>
+        </p:txBody>
+      </p:sp>
+      <p:graphicFrame>
+        <p:nvGraphicFramePr>
+          <p:cNvPr id="4" name="Table 3"/>
+          <p:cNvGraphicFramePr>
+            <a:graphicFrameLocks noGrp="1"/>
+          </p:cNvGraphicFramePr>
+          <p:nvPr/>
+        </p:nvGraphicFramePr>
+        <p:xfrm>
+          <a:off x="548640" y="1600200"/>
+          <a:ext cx="11064240" cy="2523744"/>
+        </p:xfrm>
+        <a:graphic>
+          <a:graphicData uri="http://schemas.openxmlformats.org/drawingml/2006/table">
+            <a:tbl>
+              <a:tblPr firstRow="1" bandRow="1">
+                <a:tableStyleId>{5C22544A-7EE6-4342-B048-85BDC9FD1C3A}</a:tableStyleId>
+              </a:tblPr>
+              <a:tblGrid>
+                <a:gridCol w="5029200"/>
+                <a:gridCol w="3017520"/>
+                <a:gridCol w="3017520"/>
+              </a:tblGrid>
+              <a:tr h="420624">
+                <a:tc>
+                  <a:txBody>
+                    <a:bodyPr/>
+                    <a:lstStyle/>
+                    <a:p>
+                      <a:pPr>
+                        <a:defRPr sz="1300" b="1">
+                          <a:solidFill>
+                            <a:srgbClr val="0B0B0B"/>
+                          </a:solidFill>
+                          <a:latin typeface="DejaVu Sans"/>
+                        </a:defRPr>
+                      </a:pPr>
+                    </a:p>
+                  </a:txBody>
+                  <a:tcPr>
+                    <a:solidFill>
+                      <a:srgbClr val="F4F3EE"/>
+                    </a:solidFill>
+                  </a:tcPr>
+                </a:tc>
+                <a:tc>
+                  <a:txBody>
+                    <a:bodyPr/>
+                    <a:lstStyle/>
+                    <a:p>
+                      <a:pPr>
+                        <a:defRPr sz="1300" b="1">
+                          <a:solidFill>
+                            <a:srgbClr val="0B0B0B"/>
+                          </a:solidFill>
+                          <a:latin typeface="DejaVu Sans"/>
+                        </a:defRPr>
+                      </a:pPr>
+                      <a:r>
+                        <a:t>with Gate 1</a:t>
+                      </a:r>
+                    </a:p>
+                  </a:txBody>
+                  <a:tcPr>
+                    <a:solidFill>
+                      <a:srgbClr val="F4F3EE"/>
+                    </a:solidFill>
+                  </a:tcPr>
+                </a:tc>
+                <a:tc>
+                  <a:txBody>
+                    <a:bodyPr/>
+                    <a:lstStyle/>
+                    <a:p>
+                      <a:pPr>
+                        <a:defRPr sz="1300" b="1">
+                          <a:solidFill>
+                            <a:srgbClr val="0B0B0B"/>
+                          </a:solidFill>
+                          <a:latin typeface="DejaVu Sans"/>
+                        </a:defRPr>
+                      </a:pPr>
+                      <a:r>
+                        <a:t>without Gate 1</a:t>
+                      </a:r>
+                    </a:p>
+                  </a:txBody>
+                  <a:tcPr>
+                    <a:solidFill>
+                      <a:srgbClr val="F4F3EE"/>
+                    </a:solidFill>
+                  </a:tcPr>
+                </a:tc>
+              </a:tr>
+              <a:tr h="420624">
+                <a:tc>
+                  <a:txBody>
+                    <a:bodyPr/>
+                    <a:lstStyle/>
+                    <a:p>
+                      <a:pPr>
+                        <a:defRPr sz="1300" b="0">
+                          <a:solidFill>
+                            <a:srgbClr val="52514E"/>
+                          </a:solidFill>
+                          <a:latin typeface="DejaVu Sans"/>
+                        </a:defRPr>
+                      </a:pPr>
+                      <a:r>
+                        <a:t>results the run produced</a:t>
+                      </a:r>
+                    </a:p>
+                  </a:txBody>
+                  <a:tcPr>
+                    <a:solidFill>
+                      <a:srgbClr val="FCFCFB"/>
+                    </a:solidFill>
+                  </a:tcPr>
+                </a:tc>
+                <a:tc>
+                  <a:txBody>
+                    <a:bodyPr/>
+                    <a:lstStyle/>
+                    <a:p>
+                      <a:pPr>
+                        <a:defRPr sz="1300" b="0">
+                          <a:solidFill>
+                            <a:srgbClr val="52514E"/>
+                          </a:solidFill>
+                          <a:latin typeface="DejaVu Sans"/>
+                        </a:defRPr>
+                      </a:pPr>
+                      <a:r>
+                        <a:t>24</a:t>
+                      </a:r>
+                    </a:p>
+                  </a:txBody>
+                  <a:tcPr>
+                    <a:solidFill>
+                      <a:srgbClr val="FCFCFB"/>
+                    </a:solidFill>
+                  </a:tcPr>
+                </a:tc>
+                <a:tc>
+                  <a:txBody>
+                    <a:bodyPr/>
+                    <a:lstStyle/>
+                    <a:p>
+                      <a:pPr>
+                        <a:defRPr sz="1300" b="0">
+                          <a:solidFill>
+                            <a:srgbClr val="52514E"/>
+                          </a:solidFill>
+                          <a:latin typeface="DejaVu Sans"/>
+                        </a:defRPr>
+                      </a:pPr>
+                      <a:r>
+                        <a:t>15</a:t>
+                      </a:r>
+                    </a:p>
+                  </a:txBody>
+                  <a:tcPr>
+                    <a:solidFill>
+                      <a:srgbClr val="FCFCFB"/>
+                    </a:solidFill>
+                  </a:tcPr>
+                </a:tc>
+              </a:tr>
+              <a:tr h="420624">
+                <a:tc>
+                  <a:txBody>
+                    <a:bodyPr/>
+                    <a:lstStyle/>
+                    <a:p>
+                      <a:pPr>
+                        <a:defRPr sz="1300" b="0">
+                          <a:solidFill>
+                            <a:srgbClr val="52514E"/>
+                          </a:solidFill>
+                          <a:latin typeface="DejaVu Sans"/>
+                        </a:defRPr>
+                      </a:pPr>
+                      <a:r>
+                        <a:t>reached the writing agent</a:t>
+                      </a:r>
+                    </a:p>
+                  </a:txBody>
+                  <a:tcPr>
+                    <a:solidFill>
+                      <a:srgbClr val="FCFCFB"/>
+                    </a:solidFill>
+                  </a:tcPr>
+                </a:tc>
+                <a:tc>
+                  <a:txBody>
+                    <a:bodyPr/>
+                    <a:lstStyle/>
+                    <a:p>
+                      <a:pPr>
+                        <a:defRPr sz="1300" b="0">
+                          <a:solidFill>
+                            <a:srgbClr val="52514E"/>
+                          </a:solidFill>
+                          <a:latin typeface="DejaVu Sans"/>
+                        </a:defRPr>
+                      </a:pPr>
+                      <a:r>
+                        <a:t>24</a:t>
+                      </a:r>
+                    </a:p>
+                  </a:txBody>
+                  <a:tcPr>
+                    <a:solidFill>
+                      <a:srgbClr val="FCFCFB"/>
+                    </a:solidFill>
+                  </a:tcPr>
+                </a:tc>
+                <a:tc>
+                  <a:txBody>
+                    <a:bodyPr/>
+                    <a:lstStyle/>
+                    <a:p>
+                      <a:pPr>
+                        <a:defRPr sz="1300" b="0">
+                          <a:solidFill>
+                            <a:srgbClr val="52514E"/>
+                          </a:solidFill>
+                          <a:latin typeface="DejaVu Sans"/>
+                        </a:defRPr>
+                      </a:pPr>
+                      <a:r>
+                        <a:t>10</a:t>
+                      </a:r>
+                    </a:p>
+                  </a:txBody>
+                  <a:tcPr>
+                    <a:solidFill>
+                      <a:srgbClr val="FCFCFB"/>
+                    </a:solidFill>
+                  </a:tcPr>
+                </a:tc>
+              </a:tr>
+              <a:tr h="420624">
+                <a:tc>
+                  <a:txBody>
+                    <a:bodyPr/>
+                    <a:lstStyle/>
+                    <a:p>
+                      <a:pPr>
+                        <a:defRPr sz="1300" b="0">
+                          <a:solidFill>
+                            <a:srgbClr val="52514E"/>
+                          </a:solidFill>
+                          <a:latin typeface="DejaVu Sans"/>
+                        </a:defRPr>
+                      </a:pPr>
+                      <a:r>
+                        <a:t>lost to the 1,000-char channel</a:t>
+                      </a:r>
+                    </a:p>
+                  </a:txBody>
+                  <a:tcPr>
+                    <a:solidFill>
+                      <a:srgbClr val="FCFCFB"/>
+                    </a:solidFill>
+                  </a:tcPr>
+                </a:tc>
+                <a:tc>
+                  <a:txBody>
+                    <a:bodyPr/>
+                    <a:lstStyle/>
+                    <a:p>
+                      <a:pPr>
+                        <a:defRPr sz="1300" b="0">
+                          <a:solidFill>
+                            <a:srgbClr val="52514E"/>
+                          </a:solidFill>
+                          <a:latin typeface="DejaVu Sans"/>
+                        </a:defRPr>
+                      </a:pPr>
+                      <a:r>
+                        <a:t>0</a:t>
+                      </a:r>
+                    </a:p>
+                  </a:txBody>
+                  <a:tcPr>
+                    <a:solidFill>
+                      <a:srgbClr val="FCFCFB"/>
+                    </a:solidFill>
+                  </a:tcPr>
+                </a:tc>
+                <a:tc>
+                  <a:txBody>
+                    <a:bodyPr/>
+                    <a:lstStyle/>
+                    <a:p>
+                      <a:pPr>
+                        <a:defRPr sz="1300" b="0">
+                          <a:solidFill>
+                            <a:srgbClr val="52514E"/>
+                          </a:solidFill>
+                          <a:latin typeface="DejaVu Sans"/>
+                        </a:defRPr>
+                      </a:pPr>
+                      <a:r>
+                        <a:t>5</a:t>
+                      </a:r>
+                    </a:p>
+                  </a:txBody>
+                  <a:tcPr>
+                    <a:solidFill>
+                      <a:srgbClr val="FCFCFB"/>
+                    </a:solidFill>
+                  </a:tcPr>
+                </a:tc>
+              </a:tr>
+              <a:tr h="420624">
+                <a:tc>
+                  <a:txBody>
+                    <a:bodyPr/>
+                    <a:lstStyle/>
+                    <a:p>
+                      <a:pPr>
+                        <a:defRPr sz="1300" b="0">
+                          <a:solidFill>
+                            <a:srgbClr val="52514E"/>
+                          </a:solidFill>
+                          <a:latin typeface="DejaVu Sans"/>
+                        </a:defRPr>
+                      </a:pPr>
+                      <a:r>
+                        <a:t>traceable to an execution</a:t>
+                      </a:r>
+                    </a:p>
+                  </a:txBody>
+                  <a:tcPr>
+                    <a:solidFill>
+                      <a:srgbClr val="FCFCFB"/>
+                    </a:solidFill>
+                  </a:tcPr>
+                </a:tc>
+                <a:tc>
+                  <a:txBody>
+                    <a:bodyPr/>
+                    <a:lstStyle/>
+                    <a:p>
+                      <a:pPr>
+                        <a:defRPr sz="1300" b="0">
+                          <a:solidFill>
+                            <a:srgbClr val="52514E"/>
+                          </a:solidFill>
+                          <a:latin typeface="DejaVu Sans"/>
+                        </a:defRPr>
+                      </a:pPr>
+                      <a:r>
+                        <a:t>24</a:t>
+                      </a:r>
+                    </a:p>
+                  </a:txBody>
+                  <a:tcPr>
+                    <a:solidFill>
+                      <a:srgbClr val="FCFCFB"/>
+                    </a:solidFill>
+                  </a:tcPr>
+                </a:tc>
+                <a:tc>
+                  <a:txBody>
+                    <a:bodyPr/>
+                    <a:lstStyle/>
+                    <a:p>
+                      <a:pPr>
+                        <a:defRPr sz="1300" b="0">
+                          <a:solidFill>
+                            <a:srgbClr val="52514E"/>
+                          </a:solidFill>
+                          <a:latin typeface="DejaVu Sans"/>
+                        </a:defRPr>
+                      </a:pPr>
+                      <a:r>
+                        <a:t>0</a:t>
+                      </a:r>
+                    </a:p>
+                  </a:txBody>
+                  <a:tcPr>
+                    <a:solidFill>
+                      <a:srgbClr val="FCFCFB"/>
+                    </a:solidFill>
+                  </a:tcPr>
+                </a:tc>
+              </a:tr>
+              <a:tr h="420624">
+                <a:tc>
+                  <a:txBody>
+                    <a:bodyPr/>
+                    <a:lstStyle/>
+                    <a:p>
+                      <a:pPr>
+                        <a:defRPr sz="1300" b="0">
+                          <a:solidFill>
+                            <a:srgbClr val="52514E"/>
+                          </a:solidFill>
+                          <a:latin typeface="DejaVu Sans"/>
+                        </a:defRPr>
+                      </a:pPr>
+                      <a:r>
+                        <a:t>reproduced when re-run</a:t>
+                      </a:r>
+                    </a:p>
+                  </a:txBody>
+                  <a:tcPr>
+                    <a:solidFill>
+                      <a:srgbClr val="FCFCFB"/>
+                    </a:solidFill>
+                  </a:tcPr>
+                </a:tc>
+                <a:tc>
+                  <a:txBody>
+                    <a:bodyPr/>
+                    <a:lstStyle/>
+                    <a:p>
+                      <a:pPr>
+                        <a:defRPr sz="1300" b="0">
+                          <a:solidFill>
+                            <a:srgbClr val="52514E"/>
+                          </a:solidFill>
+                          <a:latin typeface="DejaVu Sans"/>
+                        </a:defRPr>
+                      </a:pPr>
+                      <a:r>
+                        <a:t>24 of 24</a:t>
+                      </a:r>
+                    </a:p>
+                  </a:txBody>
+                  <a:tcPr>
+                    <a:solidFill>
+                      <a:srgbClr val="FCFCFB"/>
+                    </a:solidFill>
+                  </a:tcPr>
+                </a:tc>
+                <a:tc>
+                  <a:txBody>
+                    <a:bodyPr/>
+                    <a:lstStyle/>
+                    <a:p>
+                      <a:pPr>
+                        <a:defRPr sz="1300" b="0">
+                          <a:solidFill>
+                            <a:srgbClr val="52514E"/>
+                          </a:solidFill>
+                          <a:latin typeface="DejaVu Sans"/>
+                        </a:defRPr>
+                      </a:pPr>
+                      <a:r>
+                        <a:t>10 of 10</a:t>
+                      </a:r>
+                    </a:p>
+                  </a:txBody>
+                  <a:tcPr>
+                    <a:solidFill>
+                      <a:srgbClr val="FCFCFB"/>
+                    </a:solidFill>
+                  </a:tcPr>
+                </a:tc>
+              </a:tr>
+            </a:tbl>
+          </a:graphicData>
+        </a:graphic>
+      </p:graphicFrame>
+      <p:sp>
+        <p:nvSpPr>
+          <p:cNvPr id="5" name="TextBox 4"/>
+          <p:cNvSpPr txBox="1"/>
+          <p:nvPr/>
+        </p:nvSpPr>
+        <p:spPr>
+          <a:xfrm>
+            <a:off x="548640" y="5029200"/>
+            <a:ext cx="11064240" cy="1463040"/>
+          </a:xfrm>
+          <a:prstGeom prst="rect">
+            <a:avLst/>
+          </a:prstGeom>
+          <a:noFill/>
+        </p:spPr>
+        <p:txBody>
+          <a:bodyPr wrap="square">
+            <a:spAutoFit/>
+          </a:bodyPr>
+          <a:lstStyle/>
+          <a:p>
+            <a:pPr algn="l">
+              <a:lnSpc>
+                <a:spcPct val="115000"/>
+              </a:lnSpc>
+            </a:pPr>
+            <a:r>
+              <a:rPr sz="1400" b="1">
+                <a:solidFill>
+                  <a:srgbClr val="0B0B0B"/>
+                </a:solidFill>
+                <a:latin typeface="DejaVu Sans"/>
+              </a:rPr>
+              <a:t>The ungated arm's numbers are not wrong.</a:t>
+            </a:r>
+          </a:p>
+          <a:p>
+            <a:pPr algn="l">
+              <a:lnSpc>
+                <a:spcPct val="115000"/>
+              </a:lnSpc>
+            </a:pPr>
+            <a:r>
+              <a:rPr sz="1200" b="0">
+                <a:solidFill>
+                  <a:srgbClr val="52514E"/>
+                </a:solidFill>
+                <a:latin typeface="DejaVu Sans"/>
+              </a:rPr>
+              <a:t>Every one of the 10 that reached the writer reproduced exactly. It fails on completeness — 5 of 15 results never got through the window, and in one run all three did not, leaving the writer a training log and no results — and on traceability: 0 of 15 carry a trace id or a code hash.</a:t>
+            </a:r>
+          </a:p>
+          <a:p>
+            <a:pPr algn="l">
+              <a:lnSpc>
+                <a:spcPct val="115000"/>
+              </a:lnSpc>
+            </a:pPr>
+            <a:r>
+              <a:rPr sz="1200" b="0">
+                <a:solidFill>
+                  <a:srgbClr val="EB6834"/>
+                </a:solidFill>
+                <a:latin typeface="DejaVu Sans"/>
+              </a:rPr>
+              <a:t>A number that reproduces by luck and a number that was measured look identical to a reader. That is the gap.</a:t>
+            </a:r>
+          </a:p>
+        </p:txBody>
+      </p:sp>
+    </p:spTree>
+  </p:cSld>
+  <p:clrMapOvr>
+    <a:masterClrMapping/>
+  </p:clrMapOvr>
+</p:sld>
+</file>
+
+<file path=ppt/slides/slide6.xml><?xml version="1.0" encoding="utf-8"?>
+<p:sld xmlns:a="http://schemas.openxmlformats.org/drawingml/2006/main" xmlns:p="http://schemas.openxmlformats.org/presentationml/2006/main" xmlns:r="http://schemas.openxmlformats.org/officeDocument/2006/relationships">
+  <p:cSld>
+    <p:bg>
+      <p:bgPr>
+        <a:solidFill>
+          <a:srgbClr val="FCFCFB"/>
+        </a:solidFill>
+        <a:effectLst/>
+      </p:bgPr>
+    </p:bg>
+    <p:spTree>
+      <p:nvGrpSpPr>
+        <p:cNvPr id="1" name=""/>
+        <p:cNvGrpSpPr/>
+        <p:nvPr/>
+      </p:nvGrpSpPr>
+      <p:grpSpPr/>
+      <p:sp>
+        <p:nvSpPr>
+          <p:cNvPr id="2" name="TextBox 1"/>
+          <p:cNvSpPr txBox="1"/>
+          <p:nvPr/>
+        </p:nvSpPr>
+        <p:spPr>
+          <a:xfrm>
+            <a:off x="548640" y="320040"/>
+            <a:ext cx="10972800" cy="365760"/>
+          </a:xfrm>
+          <a:prstGeom prst="rect">
+            <a:avLst/>
+          </a:prstGeom>
+          <a:noFill/>
+        </p:spPr>
+        <p:txBody>
+          <a:bodyPr wrap="square">
+            <a:spAutoFit/>
+          </a:bodyPr>
+          <a:lstStyle/>
+          <a:p>
+            <a:pPr algn="l">
+              <a:lnSpc>
+                <a:spcPct val="115000"/>
+              </a:lnSpc>
+            </a:pPr>
+            <a:r>
+              <a:rPr sz="1100" b="1">
+                <a:solidFill>
+                  <a:srgbClr val="2A78D6"/>
+                </a:solidFill>
+                <a:latin typeface="DejaVu Sans"/>
+              </a:rPr>
               <a:t>CHECKS</a:t>
             </a:r>
           </a:p>
@@ -11162,7 +12568,7 @@
 </p:sld>
 </file>
 
-<file path=ppt/slides/slide6.xml><?xml version="1.0" encoding="utf-8"?>
+<file path=ppt/slides/slide7.xml><?xml version="1.0" encoding="utf-8"?>
 <p:sld xmlns:a="http://schemas.openxmlformats.org/drawingml/2006/main" xmlns:p="http://schemas.openxmlformats.org/presentationml/2006/main" xmlns:r="http://schemas.openxmlformats.org/officeDocument/2006/relationships">
   <p:cSld>
     <p:bg>
@@ -11916,7 +13322,7 @@
 </p:sld>
 </file>
 
-<file path=ppt/slides/slide7.xml><?xml version="1.0" encoding="utf-8"?>
+<file path=ppt/slides/slide8.xml><?xml version="1.0" encoding="utf-8"?>
 <p:sld xmlns:a="http://schemas.openxmlformats.org/drawingml/2006/main" xmlns:p="http://schemas.openxmlformats.org/presentationml/2006/main" xmlns:r="http://schemas.openxmlformats.org/officeDocument/2006/relationships">
   <p:cSld>
     <p:bg>
@@ -12593,7 +13999,7 @@
 </p:sld>
 </file>
 
-<file path=ppt/slides/slide8.xml><?xml version="1.0" encoding="utf-8"?>
+<file path=ppt/slides/slide9.xml><?xml version="1.0" encoding="utf-8"?>
 <p:sld xmlns:a="http://schemas.openxmlformats.org/drawingml/2006/main" xmlns:p="http://schemas.openxmlformats.org/presentationml/2006/main" xmlns:r="http://schemas.openxmlformats.org/officeDocument/2006/relationships">
   <p:cSld>
     <p:bg>
@@ -13558,768 +14964,6 @@
                 <a:latin typeface="DejaVu Sans"/>
               </a:rPr>
               <a:t>What Gate 1 changes on the bill is rewrites: each rejection buys another engineer call. A rejection that names the real fault is a rewrite the agent does not waste — which is why the shadowed-contract check was worth adding.</a:t>
-            </a:r>
-          </a:p>
-        </p:txBody>
-      </p:sp>
-    </p:spTree>
-  </p:cSld>
-  <p:clrMapOvr>
-    <a:masterClrMapping/>
-  </p:clrMapOvr>
-</p:sld>
-</file>
-
-<file path=ppt/slides/slide9.xml><?xml version="1.0" encoding="utf-8"?>
-<p:sld xmlns:a="http://schemas.openxmlformats.org/drawingml/2006/main" xmlns:p="http://schemas.openxmlformats.org/presentationml/2006/main" xmlns:r="http://schemas.openxmlformats.org/officeDocument/2006/relationships">
-  <p:cSld>
-    <p:bg>
-      <p:bgPr>
-        <a:solidFill>
-          <a:srgbClr val="FCFCFB"/>
-        </a:solidFill>
-        <a:effectLst/>
-      </p:bgPr>
-    </p:bg>
-    <p:spTree>
-      <p:nvGrpSpPr>
-        <p:cNvPr id="1" name=""/>
-        <p:cNvGrpSpPr/>
-        <p:nvPr/>
-      </p:nvGrpSpPr>
-      <p:grpSpPr/>
-      <p:sp>
-        <p:nvSpPr>
-          <p:cNvPr id="2" name="TextBox 1"/>
-          <p:cNvSpPr txBox="1"/>
-          <p:nvPr/>
-        </p:nvSpPr>
-        <p:spPr>
-          <a:xfrm>
-            <a:off x="548640" y="320040"/>
-            <a:ext cx="10972800" cy="365760"/>
-          </a:xfrm>
-          <a:prstGeom prst="rect">
-            <a:avLst/>
-          </a:prstGeom>
-          <a:noFill/>
-        </p:spPr>
-        <p:txBody>
-          <a:bodyPr wrap="square">
-            <a:spAutoFit/>
-          </a:bodyPr>
-          <a:lstStyle/>
-          <a:p>
-            <a:pPr algn="l">
-              <a:lnSpc>
-                <a:spcPct val="115000"/>
-              </a:lnSpc>
-            </a:pPr>
-            <a:r>
-              <a:rPr sz="1100" b="1">
-                <a:solidFill>
-                  <a:srgbClr val="2A78D6"/>
-                </a:solidFill>
-                <a:latin typeface="DejaVu Sans"/>
-              </a:rPr>
-              <a:t>THE PROBLEM</a:t>
-            </a:r>
-          </a:p>
-        </p:txBody>
-      </p:sp>
-      <p:sp>
-        <p:nvSpPr>
-          <p:cNvPr id="3" name="TextBox 2"/>
-          <p:cNvSpPr txBox="1"/>
-          <p:nvPr/>
-        </p:nvSpPr>
-        <p:spPr>
-          <a:xfrm>
-            <a:off x="548640" y="658368"/>
-            <a:ext cx="10972800" cy="640080"/>
-          </a:xfrm>
-          <a:prstGeom prst="rect">
-            <a:avLst/>
-          </a:prstGeom>
-          <a:noFill/>
-        </p:spPr>
-        <p:txBody>
-          <a:bodyPr wrap="square">
-            <a:spAutoFit/>
-          </a:bodyPr>
-          <a:lstStyle/>
-          <a:p>
-            <a:pPr algn="l">
-              <a:lnSpc>
-                <a:spcPct val="115000"/>
-              </a:lnSpc>
-            </a:pPr>
-            <a:r>
-              <a:rPr sz="2600" b="1">
-                <a:solidFill>
-                  <a:srgbClr val="0B0B0B"/>
-                </a:solidFill>
-                <a:latin typeface="DejaVu Sans"/>
-              </a:rPr>
-              <a:t>One line produced both the silent failure and the fabrication</a:t>
-            </a:r>
-          </a:p>
-        </p:txBody>
-      </p:sp>
-      <p:sp>
-        <p:nvSpPr>
-          <p:cNvPr id="4" name="Rounded Rectangle 3"/>
-          <p:cNvSpPr/>
-          <p:nvPr/>
-        </p:nvSpPr>
-        <p:spPr>
-          <a:xfrm>
-            <a:off x="548640" y="1554480"/>
-            <a:ext cx="11064240" cy="1371600"/>
-          </a:xfrm>
-          <a:prstGeom prst="roundRect">
-            <a:avLst/>
-          </a:prstGeom>
-          <a:solidFill>
-            <a:srgbClr val="F4F3EE"/>
-          </a:solidFill>
-          <a:ln>
-            <a:noFill/>
-          </a:ln>
-          <a:effectLst/>
-        </p:spPr>
-        <p:style>
-          <a:lnRef idx="1">
-            <a:schemeClr val="accent1"/>
-          </a:lnRef>
-          <a:fillRef idx="3">
-            <a:schemeClr val="accent1"/>
-          </a:fillRef>
-          <a:effectRef idx="2">
-            <a:schemeClr val="accent1"/>
-          </a:effectRef>
-          <a:fontRef idx="minor">
-            <a:schemeClr val="lt1"/>
-          </a:fontRef>
-        </p:style>
-        <p:txBody>
-          <a:bodyPr rtlCol="0" anchor="ctr"/>
-          <a:lstStyle/>
-          <a:p>
-            <a:pPr algn="ctr"/>
-          </a:p>
-        </p:txBody>
-      </p:sp>
-      <p:sp>
-        <p:nvSpPr>
-          <p:cNvPr id="5" name="TextBox 4"/>
-          <p:cNvSpPr txBox="1"/>
-          <p:nvPr/>
-        </p:nvSpPr>
-        <p:spPr>
-          <a:xfrm>
-            <a:off x="822960" y="1691640"/>
-            <a:ext cx="10515600" cy="1097280"/>
-          </a:xfrm>
-          <a:prstGeom prst="rect">
-            <a:avLst/>
-          </a:prstGeom>
-          <a:noFill/>
-        </p:spPr>
-        <p:txBody>
-          <a:bodyPr wrap="square">
-            <a:spAutoFit/>
-          </a:bodyPr>
-          <a:lstStyle/>
-          <a:p>
-            <a:pPr algn="l">
-              <a:lnSpc>
-                <a:spcPct val="115000"/>
-              </a:lnSpc>
-            </a:pPr>
-            <a:r>
-              <a:rPr sz="1500" b="1">
-                <a:solidFill>
-                  <a:srgbClr val="0B0B0B"/>
-                </a:solidFill>
-                <a:latin typeface="DejaVu Sans"/>
-              </a:rPr>
-              <a:t>return output_capture.getvalue()[:MAX_LEN]      # MAX_LEN = 1000</a:t>
-            </a:r>
-          </a:p>
-          <a:p>
-            <a:pPr algn="l">
-              <a:lnSpc>
-                <a:spcPct val="115000"/>
-              </a:lnSpc>
-            </a:pPr>
-            <a:r>
-              <a:rPr sz="1200" b="0">
-                <a:solidFill>
-                  <a:srgbClr val="52514E"/>
-                </a:solidFill>
-                <a:latin typeface="DejaVu Sans"/>
-              </a:rPr>
-              <a:t>the crash marker is appended AFTER the program's own output — so it falls off the end of the same slice</a:t>
-            </a:r>
-          </a:p>
-        </p:txBody>
-      </p:sp>
-      <p:sp>
-        <p:nvSpPr>
-          <p:cNvPr id="6" name="TextBox 5"/>
-          <p:cNvSpPr txBox="1"/>
-          <p:nvPr/>
-        </p:nvSpPr>
-        <p:spPr>
-          <a:xfrm>
-            <a:off x="548640" y="3200400"/>
-            <a:ext cx="10972800" cy="3657600"/>
-          </a:xfrm>
-          <a:prstGeom prst="rect">
-            <a:avLst/>
-          </a:prstGeom>
-          <a:noFill/>
-        </p:spPr>
-        <p:txBody>
-          <a:bodyPr wrap="square">
-            <a:spAutoFit/>
-          </a:bodyPr>
-          <a:lstStyle/>
-          <a:p>
-            <a:pPr algn="l">
-              <a:lnSpc>
-                <a:spcPct val="150000"/>
-              </a:lnSpc>
-            </a:pPr>
-            <a:r>
-              <a:rPr sz="1400" b="0">
-                <a:solidFill>
-                  <a:srgbClr val="52514E"/>
-                </a:solidFill>
-                <a:latin typeface="DejaVu Sans"/>
-              </a:rPr>
-              <a:t>·  The writing agent received 1,000 characters as the entire experimental record</a:t>
-            </a:r>
-          </a:p>
-          <a:p>
-            <a:pPr algn="l">
-              <a:lnSpc>
-                <a:spcPct val="150000"/>
-              </a:lnSpc>
-            </a:pPr>
-            <a:r>
-              <a:rPr sz="1400" b="0">
-                <a:solidFill>
-                  <a:srgbClr val="52514E"/>
-                </a:solidFill>
-                <a:latin typeface="DejaVu Sans"/>
-              </a:rPr>
-              <a:t>·  The only crash test was a substring search for a marker that was no longer there</a:t>
-            </a:r>
-          </a:p>
-          <a:p>
-            <a:pPr algn="l">
-              <a:lnSpc>
-                <a:spcPct val="150000"/>
-              </a:lnSpc>
-            </a:pPr>
-            <a:r>
-              <a:rPr sz="1400" b="0">
-                <a:solidFill>
-                  <a:srgbClr val="52514E"/>
-                </a:solidFill>
-                <a:latin typeface="DejaVu Sans"/>
-              </a:rPr>
-              <a:t>·  Execution ran in a never-cleared namespace, in a thread the timeout could not kill</a:t>
-            </a:r>
-          </a:p>
-        </p:txBody>
-      </p:sp>
-      <p:sp>
-        <p:nvSpPr>
-          <p:cNvPr id="7" name="Rounded Rectangle 6"/>
-          <p:cNvSpPr/>
-          <p:nvPr/>
-        </p:nvSpPr>
-        <p:spPr>
-          <a:xfrm>
-            <a:off x="548640" y="5029200"/>
-            <a:ext cx="2743200" cy="1234440"/>
-          </a:xfrm>
-          <a:prstGeom prst="roundRect">
-            <a:avLst/>
-          </a:prstGeom>
-          <a:solidFill>
-            <a:srgbClr val="F4F3EE"/>
-          </a:solidFill>
-          <a:ln>
-            <a:noFill/>
-          </a:ln>
-          <a:effectLst/>
-        </p:spPr>
-        <p:style>
-          <a:lnRef idx="1">
-            <a:schemeClr val="accent1"/>
-          </a:lnRef>
-          <a:fillRef idx="3">
-            <a:schemeClr val="accent1"/>
-          </a:fillRef>
-          <a:effectRef idx="2">
-            <a:schemeClr val="accent1"/>
-          </a:effectRef>
-          <a:fontRef idx="minor">
-            <a:schemeClr val="lt1"/>
-          </a:fontRef>
-        </p:style>
-        <p:txBody>
-          <a:bodyPr rtlCol="0" anchor="ctr"/>
-          <a:lstStyle/>
-          <a:p>
-            <a:pPr algn="ctr"/>
-          </a:p>
-        </p:txBody>
-      </p:sp>
-      <p:sp>
-        <p:nvSpPr>
-          <p:cNvPr id="8" name="TextBox 7"/>
-          <p:cNvSpPr txBox="1"/>
-          <p:nvPr/>
-        </p:nvSpPr>
-        <p:spPr>
-          <a:xfrm>
-            <a:off x="731520" y="5138928"/>
-            <a:ext cx="2377440" cy="548640"/>
-          </a:xfrm>
-          <a:prstGeom prst="rect">
-            <a:avLst/>
-          </a:prstGeom>
-          <a:noFill/>
-        </p:spPr>
-        <p:txBody>
-          <a:bodyPr wrap="square">
-            <a:spAutoFit/>
-          </a:bodyPr>
-          <a:lstStyle/>
-          <a:p>
-            <a:pPr algn="l">
-              <a:lnSpc>
-                <a:spcPct val="115000"/>
-              </a:lnSpc>
-            </a:pPr>
-            <a:r>
-              <a:rPr sz="3000" b="1">
-                <a:solidFill>
-                  <a:srgbClr val="EB6834"/>
-                </a:solidFill>
-                <a:latin typeface="DejaVu Sans"/>
-              </a:rPr>
-              <a:t>1.0</a:t>
-            </a:r>
-          </a:p>
-        </p:txBody>
-      </p:sp>
-      <p:sp>
-        <p:nvSpPr>
-          <p:cNvPr id="9" name="TextBox 8"/>
-          <p:cNvSpPr txBox="1"/>
-          <p:nvPr/>
-        </p:nvSpPr>
-        <p:spPr>
-          <a:xfrm>
-            <a:off x="731520" y="5779008"/>
-            <a:ext cx="2377440" cy="411480"/>
-          </a:xfrm>
-          <a:prstGeom prst="rect">
-            <a:avLst/>
-          </a:prstGeom>
-          <a:noFill/>
-        </p:spPr>
-        <p:txBody>
-          <a:bodyPr wrap="square">
-            <a:spAutoFit/>
-          </a:bodyPr>
-          <a:lstStyle/>
-          <a:p>
-            <a:pPr algn="l">
-              <a:lnSpc>
-                <a:spcPct val="115000"/>
-              </a:lnSpc>
-            </a:pPr>
-            <a:r>
-              <a:rPr sz="1000" b="0">
-                <a:solidFill>
-                  <a:srgbClr val="52514E"/>
-                </a:solidFill>
-                <a:latin typeface="DejaVu Sans"/>
-              </a:rPr>
-              <a:t>reward score on a run raising NameError every attempt</a:t>
-            </a:r>
-          </a:p>
-        </p:txBody>
-      </p:sp>
-      <p:sp>
-        <p:nvSpPr>
-          <p:cNvPr id="10" name="Rounded Rectangle 9"/>
-          <p:cNvSpPr/>
-          <p:nvPr/>
-        </p:nvSpPr>
-        <p:spPr>
-          <a:xfrm>
-            <a:off x="3566160" y="5029200"/>
-            <a:ext cx="2743200" cy="1234440"/>
-          </a:xfrm>
-          <a:prstGeom prst="roundRect">
-            <a:avLst/>
-          </a:prstGeom>
-          <a:solidFill>
-            <a:srgbClr val="F4F3EE"/>
-          </a:solidFill>
-          <a:ln>
-            <a:noFill/>
-          </a:ln>
-          <a:effectLst/>
-        </p:spPr>
-        <p:style>
-          <a:lnRef idx="1">
-            <a:schemeClr val="accent1"/>
-          </a:lnRef>
-          <a:fillRef idx="3">
-            <a:schemeClr val="accent1"/>
-          </a:fillRef>
-          <a:effectRef idx="2">
-            <a:schemeClr val="accent1"/>
-          </a:effectRef>
-          <a:fontRef idx="minor">
-            <a:schemeClr val="lt1"/>
-          </a:fontRef>
-        </p:style>
-        <p:txBody>
-          <a:bodyPr rtlCol="0" anchor="ctr"/>
-          <a:lstStyle/>
-          <a:p>
-            <a:pPr algn="ctr"/>
-          </a:p>
-        </p:txBody>
-      </p:sp>
-      <p:sp>
-        <p:nvSpPr>
-          <p:cNvPr id="11" name="TextBox 10"/>
-          <p:cNvSpPr txBox="1"/>
-          <p:nvPr/>
-        </p:nvSpPr>
-        <p:spPr>
-          <a:xfrm>
-            <a:off x="3749040" y="5138928"/>
-            <a:ext cx="2377440" cy="548640"/>
-          </a:xfrm>
-          <a:prstGeom prst="rect">
-            <a:avLst/>
-          </a:prstGeom>
-          <a:noFill/>
-        </p:spPr>
-        <p:txBody>
-          <a:bodyPr wrap="square">
-            <a:spAutoFit/>
-          </a:bodyPr>
-          <a:lstStyle/>
-          <a:p>
-            <a:pPr algn="l">
-              <a:lnSpc>
-                <a:spcPct val="115000"/>
-              </a:lnSpc>
-            </a:pPr>
-            <a:r>
-              <a:rPr sz="3000" b="1">
-                <a:solidFill>
-                  <a:srgbClr val="EB6834"/>
-                </a:solidFill>
-                <a:latin typeface="DejaVu Sans"/>
-              </a:rPr>
-              <a:t>81.60%</a:t>
-            </a:r>
-          </a:p>
-        </p:txBody>
-      </p:sp>
-      <p:sp>
-        <p:nvSpPr>
-          <p:cNvPr id="12" name="TextBox 11"/>
-          <p:cNvSpPr txBox="1"/>
-          <p:nvPr/>
-        </p:nvSpPr>
-        <p:spPr>
-          <a:xfrm>
-            <a:off x="3749040" y="5779008"/>
-            <a:ext cx="2377440" cy="411480"/>
-          </a:xfrm>
-          <a:prstGeom prst="rect">
-            <a:avLst/>
-          </a:prstGeom>
-          <a:noFill/>
-        </p:spPr>
-        <p:txBody>
-          <a:bodyPr wrap="square">
-            <a:spAutoFit/>
-          </a:bodyPr>
-          <a:lstStyle/>
-          <a:p>
-            <a:pPr algn="l">
-              <a:lnSpc>
-                <a:spcPct val="115000"/>
-              </a:lnSpc>
-            </a:pPr>
-            <a:r>
-              <a:rPr sz="1000" b="0">
-                <a:solidFill>
-                  <a:srgbClr val="52514E"/>
-                </a:solidFill>
-                <a:latin typeface="DejaVu Sans"/>
-              </a:rPr>
-              <a:t>test accuracy reported — never measured</a:t>
-            </a:r>
-          </a:p>
-        </p:txBody>
-      </p:sp>
-      <p:sp>
-        <p:nvSpPr>
-          <p:cNvPr id="13" name="Rounded Rectangle 12"/>
-          <p:cNvSpPr/>
-          <p:nvPr/>
-        </p:nvSpPr>
-        <p:spPr>
-          <a:xfrm>
-            <a:off x="6583680" y="5029200"/>
-            <a:ext cx="2743200" cy="1234440"/>
-          </a:xfrm>
-          <a:prstGeom prst="roundRect">
-            <a:avLst/>
-          </a:prstGeom>
-          <a:solidFill>
-            <a:srgbClr val="F4F3EE"/>
-          </a:solidFill>
-          <a:ln>
-            <a:noFill/>
-          </a:ln>
-          <a:effectLst/>
-        </p:spPr>
-        <p:style>
-          <a:lnRef idx="1">
-            <a:schemeClr val="accent1"/>
-          </a:lnRef>
-          <a:fillRef idx="3">
-            <a:schemeClr val="accent1"/>
-          </a:fillRef>
-          <a:effectRef idx="2">
-            <a:schemeClr val="accent1"/>
-          </a:effectRef>
-          <a:fontRef idx="minor">
-            <a:schemeClr val="lt1"/>
-          </a:fontRef>
-        </p:style>
-        <p:txBody>
-          <a:bodyPr rtlCol="0" anchor="ctr"/>
-          <a:lstStyle/>
-          <a:p>
-            <a:pPr algn="ctr"/>
-          </a:p>
-        </p:txBody>
-      </p:sp>
-      <p:sp>
-        <p:nvSpPr>
-          <p:cNvPr id="14" name="TextBox 13"/>
-          <p:cNvSpPr txBox="1"/>
-          <p:nvPr/>
-        </p:nvSpPr>
-        <p:spPr>
-          <a:xfrm>
-            <a:off x="6766560" y="5138928"/>
-            <a:ext cx="2377440" cy="548640"/>
-          </a:xfrm>
-          <a:prstGeom prst="rect">
-            <a:avLst/>
-          </a:prstGeom>
-          <a:noFill/>
-        </p:spPr>
-        <p:txBody>
-          <a:bodyPr wrap="square">
-            <a:spAutoFit/>
-          </a:bodyPr>
-          <a:lstStyle/>
-          <a:p>
-            <a:pPr algn="l">
-              <a:lnSpc>
-                <a:spcPct val="115000"/>
-              </a:lnSpc>
-            </a:pPr>
-            <a:r>
-              <a:rPr sz="3000" b="1">
-                <a:solidFill>
-                  <a:srgbClr val="EB6834"/>
-                </a:solidFill>
-                <a:latin typeface="DejaVu Sans"/>
-              </a:rPr>
-              <a:t>13.61×</a:t>
-            </a:r>
-          </a:p>
-        </p:txBody>
-      </p:sp>
-      <p:sp>
-        <p:nvSpPr>
-          <p:cNvPr id="15" name="TextBox 14"/>
-          <p:cNvSpPr txBox="1"/>
-          <p:nvPr/>
-        </p:nvSpPr>
-        <p:spPr>
-          <a:xfrm>
-            <a:off x="6766560" y="5779008"/>
-            <a:ext cx="2377440" cy="411480"/>
-          </a:xfrm>
-          <a:prstGeom prst="rect">
-            <a:avLst/>
-          </a:prstGeom>
-          <a:noFill/>
-        </p:spPr>
-        <p:txBody>
-          <a:bodyPr wrap="square">
-            <a:spAutoFit/>
-          </a:bodyPr>
-          <a:lstStyle/>
-          <a:p>
-            <a:pPr algn="l">
-              <a:lnSpc>
-                <a:spcPct val="115000"/>
-              </a:lnSpc>
-            </a:pPr>
-            <a:r>
-              <a:rPr sz="1000" b="0">
-                <a:solidFill>
-                  <a:srgbClr val="52514E"/>
-                </a:solidFill>
-                <a:latin typeface="DejaVu Sans"/>
-              </a:rPr>
-              <a:t>speedup reported — never measured</a:t>
-            </a:r>
-          </a:p>
-        </p:txBody>
-      </p:sp>
-      <p:sp>
-        <p:nvSpPr>
-          <p:cNvPr id="16" name="Rounded Rectangle 15"/>
-          <p:cNvSpPr/>
-          <p:nvPr/>
-        </p:nvSpPr>
-        <p:spPr>
-          <a:xfrm>
-            <a:off x="9601200" y="5029200"/>
-            <a:ext cx="2011680" cy="1234440"/>
-          </a:xfrm>
-          <a:prstGeom prst="roundRect">
-            <a:avLst/>
-          </a:prstGeom>
-          <a:solidFill>
-            <a:srgbClr val="F4F3EE"/>
-          </a:solidFill>
-          <a:ln>
-            <a:noFill/>
-          </a:ln>
-          <a:effectLst/>
-        </p:spPr>
-        <p:style>
-          <a:lnRef idx="1">
-            <a:schemeClr val="accent1"/>
-          </a:lnRef>
-          <a:fillRef idx="3">
-            <a:schemeClr val="accent1"/>
-          </a:fillRef>
-          <a:effectRef idx="2">
-            <a:schemeClr val="accent1"/>
-          </a:effectRef>
-          <a:fontRef idx="minor">
-            <a:schemeClr val="lt1"/>
-          </a:fontRef>
-        </p:style>
-        <p:txBody>
-          <a:bodyPr rtlCol="0" anchor="ctr"/>
-          <a:lstStyle/>
-          <a:p>
-            <a:pPr algn="ctr"/>
-          </a:p>
-        </p:txBody>
-      </p:sp>
-      <p:sp>
-        <p:nvSpPr>
-          <p:cNvPr id="17" name="TextBox 16"/>
-          <p:cNvSpPr txBox="1"/>
-          <p:nvPr/>
-        </p:nvSpPr>
-        <p:spPr>
-          <a:xfrm>
-            <a:off x="9784080" y="5138928"/>
-            <a:ext cx="1645920" cy="548640"/>
-          </a:xfrm>
-          <a:prstGeom prst="rect">
-            <a:avLst/>
-          </a:prstGeom>
-          <a:noFill/>
-        </p:spPr>
-        <p:txBody>
-          <a:bodyPr wrap="square">
-            <a:spAutoFit/>
-          </a:bodyPr>
-          <a:lstStyle/>
-          <a:p>
-            <a:pPr algn="l">
-              <a:lnSpc>
-                <a:spcPct val="115000"/>
-              </a:lnSpc>
-            </a:pPr>
-            <a:r>
-              <a:rPr sz="3000" b="1">
-                <a:solidFill>
-                  <a:srgbClr val="8A8880"/>
-                </a:solidFill>
-                <a:latin typeface="DejaVu Sans"/>
-              </a:rPr>
-              <a:t>n=1</a:t>
-            </a:r>
-          </a:p>
-        </p:txBody>
-      </p:sp>
-      <p:sp>
-        <p:nvSpPr>
-          <p:cNvPr id="18" name="TextBox 17"/>
-          <p:cNvSpPr txBox="1"/>
-          <p:nvPr/>
-        </p:nvSpPr>
-        <p:spPr>
-          <a:xfrm>
-            <a:off x="9784080" y="5779008"/>
-            <a:ext cx="1645920" cy="411480"/>
-          </a:xfrm>
-          <a:prstGeom prst="rect">
-            <a:avLst/>
-          </a:prstGeom>
-          <a:noFill/>
-        </p:spPr>
-        <p:txBody>
-          <a:bodyPr wrap="square">
-            <a:spAutoFit/>
-          </a:bodyPr>
-          <a:lstStyle/>
-          <a:p>
-            <a:pPr algn="l">
-              <a:lnSpc>
-                <a:spcPct val="115000"/>
-              </a:lnSpc>
-            </a:pPr>
-            <a:r>
-              <a:rPr sz="1000" b="0">
-                <a:solidFill>
-                  <a:srgbClr val="52514E"/>
-                </a:solidFill>
-                <a:latin typeface="DejaVu Sans"/>
-              </a:rPr>
-              <a:t>archived runs usable of 7</a:t>
             </a:r>
           </a:p>
         </p:txBody>

--- a/reports/GATE1_DECK.pptx
+++ b/reports/GATE1_DECK.pptx
@@ -24,6 +24,7 @@
     <p:sldId id="272" r:id="rId23"/>
     <p:sldId id="273" r:id="rId24"/>
     <p:sldId id="274" r:id="rId25"/>
+    <p:sldId id="275" r:id="rId26"/>
   </p:sldIdLst>
   <p:sldSz cx="12191695" cy="6858000" type="screen4x3"/>
   <p:notesSz cx="6858000" cy="9144000"/>
@@ -3330,6 +3331,983 @@
                 </a:solidFill>
                 <a:latin typeface="DejaVu Sans"/>
               </a:rPr>
+              <a:t>COST</a:t>
+            </a:r>
+          </a:p>
+        </p:txBody>
+      </p:sp>
+      <p:sp>
+        <p:nvSpPr>
+          <p:cNvPr id="3" name="TextBox 2"/>
+          <p:cNvSpPr txBox="1"/>
+          <p:nvPr/>
+        </p:nvSpPr>
+        <p:spPr>
+          <a:xfrm>
+            <a:off x="548640" y="658368"/>
+            <a:ext cx="10972800" cy="640080"/>
+          </a:xfrm>
+          <a:prstGeom prst="rect">
+            <a:avLst/>
+          </a:prstGeom>
+          <a:noFill/>
+        </p:spPr>
+        <p:txBody>
+          <a:bodyPr wrap="square">
+            <a:spAutoFit/>
+          </a:bodyPr>
+          <a:lstStyle/>
+          <a:p>
+            <a:pPr algn="l">
+              <a:lnSpc>
+                <a:spcPct val="115000"/>
+              </a:lnSpc>
+            </a:pPr>
+            <a:r>
+              <a:rPr sz="2600" b="1">
+                <a:solidFill>
+                  <a:srgbClr val="0B0B0B"/>
+                </a:solidFill>
+                <a:latin typeface="DejaVu Sans"/>
+              </a:rPr>
+              <a:t>Gate 1's marginal cost on the paid API is zero</a:t>
+            </a:r>
+          </a:p>
+        </p:txBody>
+      </p:sp>
+      <p:graphicFrame>
+        <p:nvGraphicFramePr>
+          <p:cNvPr id="4" name="Table 3"/>
+          <p:cNvGraphicFramePr>
+            <a:graphicFrameLocks noGrp="1"/>
+          </p:cNvGraphicFramePr>
+          <p:nvPr/>
+        </p:nvGraphicFramePr>
+        <p:xfrm>
+          <a:off x="548640" y="1645920"/>
+          <a:ext cx="11064240" cy="1371600"/>
+        </p:xfrm>
+        <a:graphic>
+          <a:graphicData uri="http://schemas.openxmlformats.org/drawingml/2006/table">
+            <a:tbl>
+              <a:tblPr firstRow="1" bandRow="1">
+                <a:tableStyleId>{5C22544A-7EE6-4342-B048-85BDC9FD1C3A}</a:tableStyleId>
+              </a:tblPr>
+              <a:tblGrid>
+                <a:gridCol w="1828800"/>
+                <a:gridCol w="1188720"/>
+                <a:gridCol w="2011680"/>
+                <a:gridCol w="2194560"/>
+                <a:gridCol w="2194560"/>
+                <a:gridCol w="1645920"/>
+              </a:tblGrid>
+              <a:tr h="457200">
+                <a:tc>
+                  <a:txBody>
+                    <a:bodyPr/>
+                    <a:lstStyle/>
+                    <a:p>
+                      <a:pPr>
+                        <a:defRPr sz="1200" b="1">
+                          <a:solidFill>
+                            <a:srgbClr val="0B0B0B"/>
+                          </a:solidFill>
+                          <a:latin typeface="DejaVu Sans"/>
+                        </a:defRPr>
+                      </a:pPr>
+                      <a:r>
+                        <a:t>role</a:t>
+                      </a:r>
+                    </a:p>
+                  </a:txBody>
+                  <a:tcPr>
+                    <a:solidFill>
+                      <a:srgbClr val="F4F3EE"/>
+                    </a:solidFill>
+                  </a:tcPr>
+                </a:tc>
+                <a:tc>
+                  <a:txBody>
+                    <a:bodyPr/>
+                    <a:lstStyle/>
+                    <a:p>
+                      <a:pPr>
+                        <a:defRPr sz="1200" b="1">
+                          <a:solidFill>
+                            <a:srgbClr val="0B0B0B"/>
+                          </a:solidFill>
+                          <a:latin typeface="DejaVu Sans"/>
+                        </a:defRPr>
+                      </a:pPr>
+                      <a:r>
+                        <a:t>calls</a:t>
+                      </a:r>
+                    </a:p>
+                  </a:txBody>
+                  <a:tcPr>
+                    <a:solidFill>
+                      <a:srgbClr val="F4F3EE"/>
+                    </a:solidFill>
+                  </a:tcPr>
+                </a:tc>
+                <a:tc>
+                  <a:txBody>
+                    <a:bodyPr/>
+                    <a:lstStyle/>
+                    <a:p>
+                      <a:pPr>
+                        <a:defRPr sz="1200" b="1">
+                          <a:solidFill>
+                            <a:srgbClr val="0B0B0B"/>
+                          </a:solidFill>
+                          <a:latin typeface="DejaVu Sans"/>
+                        </a:defRPr>
+                      </a:pPr>
+                      <a:r>
+                        <a:t>prompt tok</a:t>
+                      </a:r>
+                    </a:p>
+                  </a:txBody>
+                  <a:tcPr>
+                    <a:solidFill>
+                      <a:srgbClr val="F4F3EE"/>
+                    </a:solidFill>
+                  </a:tcPr>
+                </a:tc>
+                <a:tc>
+                  <a:txBody>
+                    <a:bodyPr/>
+                    <a:lstStyle/>
+                    <a:p>
+                      <a:pPr>
+                        <a:defRPr sz="1200" b="1">
+                          <a:solidFill>
+                            <a:srgbClr val="0B0B0B"/>
+                          </a:solidFill>
+                          <a:latin typeface="DejaVu Sans"/>
+                        </a:defRPr>
+                      </a:pPr>
+                      <a:r>
+                        <a:t>completion tok</a:t>
+                      </a:r>
+                    </a:p>
+                  </a:txBody>
+                  <a:tcPr>
+                    <a:solidFill>
+                      <a:srgbClr val="F4F3EE"/>
+                    </a:solidFill>
+                  </a:tcPr>
+                </a:tc>
+                <a:tc>
+                  <a:txBody>
+                    <a:bodyPr/>
+                    <a:lstStyle/>
+                    <a:p>
+                      <a:pPr>
+                        <a:defRPr sz="1200" b="1">
+                          <a:solidFill>
+                            <a:srgbClr val="0B0B0B"/>
+                          </a:solidFill>
+                          <a:latin typeface="DejaVu Sans"/>
+                        </a:defRPr>
+                      </a:pPr>
+                      <a:r>
+                        <a:t>of which reasoning</a:t>
+                      </a:r>
+                    </a:p>
+                  </a:txBody>
+                  <a:tcPr>
+                    <a:solidFill>
+                      <a:srgbClr val="F4F3EE"/>
+                    </a:solidFill>
+                  </a:tcPr>
+                </a:tc>
+                <a:tc>
+                  <a:txBody>
+                    <a:bodyPr/>
+                    <a:lstStyle/>
+                    <a:p>
+                      <a:pPr>
+                        <a:defRPr sz="1200" b="1">
+                          <a:solidFill>
+                            <a:srgbClr val="0B0B0B"/>
+                          </a:solidFill>
+                          <a:latin typeface="DejaVu Sans"/>
+                        </a:defRPr>
+                      </a:pPr>
+                      <a:r>
+                        <a:t>billed</a:t>
+                      </a:r>
+                    </a:p>
+                  </a:txBody>
+                  <a:tcPr>
+                    <a:solidFill>
+                      <a:srgbClr val="F4F3EE"/>
+                    </a:solidFill>
+                  </a:tcPr>
+                </a:tc>
+              </a:tr>
+              <a:tr h="457200">
+                <a:tc>
+                  <a:txBody>
+                    <a:bodyPr/>
+                    <a:lstStyle/>
+                    <a:p>
+                      <a:pPr>
+                        <a:defRPr sz="1200" b="0">
+                          <a:solidFill>
+                            <a:srgbClr val="52514E"/>
+                          </a:solidFill>
+                          <a:latin typeface="DejaVu Sans"/>
+                        </a:defRPr>
+                      </a:pPr>
+                      <a:r>
+                        <a:t>engineer</a:t>
+                      </a:r>
+                    </a:p>
+                  </a:txBody>
+                  <a:tcPr>
+                    <a:solidFill>
+                      <a:srgbClr val="FCFCFB"/>
+                    </a:solidFill>
+                  </a:tcPr>
+                </a:tc>
+                <a:tc>
+                  <a:txBody>
+                    <a:bodyPr/>
+                    <a:lstStyle/>
+                    <a:p>
+                      <a:pPr>
+                        <a:defRPr sz="1200" b="0">
+                          <a:solidFill>
+                            <a:srgbClr val="52514E"/>
+                          </a:solidFill>
+                          <a:latin typeface="DejaVu Sans"/>
+                        </a:defRPr>
+                      </a:pPr>
+                      <a:r>
+                        <a:t>3</a:t>
+                      </a:r>
+                    </a:p>
+                  </a:txBody>
+                  <a:tcPr>
+                    <a:solidFill>
+                      <a:srgbClr val="FCFCFB"/>
+                    </a:solidFill>
+                  </a:tcPr>
+                </a:tc>
+                <a:tc>
+                  <a:txBody>
+                    <a:bodyPr/>
+                    <a:lstStyle/>
+                    <a:p>
+                      <a:pPr>
+                        <a:defRPr sz="1200" b="0">
+                          <a:solidFill>
+                            <a:srgbClr val="52514E"/>
+                          </a:solidFill>
+                          <a:latin typeface="DejaVu Sans"/>
+                        </a:defRPr>
+                      </a:pPr>
+                      <a:r>
+                        <a:t>1,755</a:t>
+                      </a:r>
+                    </a:p>
+                  </a:txBody>
+                  <a:tcPr>
+                    <a:solidFill>
+                      <a:srgbClr val="FCFCFB"/>
+                    </a:solidFill>
+                  </a:tcPr>
+                </a:tc>
+                <a:tc>
+                  <a:txBody>
+                    <a:bodyPr/>
+                    <a:lstStyle/>
+                    <a:p>
+                      <a:pPr>
+                        <a:defRPr sz="1200" b="0">
+                          <a:solidFill>
+                            <a:srgbClr val="52514E"/>
+                          </a:solidFill>
+                          <a:latin typeface="DejaVu Sans"/>
+                        </a:defRPr>
+                      </a:pPr>
+                      <a:r>
+                        <a:t>8,452</a:t>
+                      </a:r>
+                    </a:p>
+                  </a:txBody>
+                  <a:tcPr>
+                    <a:solidFill>
+                      <a:srgbClr val="FCFCFB"/>
+                    </a:solidFill>
+                  </a:tcPr>
+                </a:tc>
+                <a:tc>
+                  <a:txBody>
+                    <a:bodyPr/>
+                    <a:lstStyle/>
+                    <a:p>
+                      <a:pPr>
+                        <a:defRPr sz="1200" b="0">
+                          <a:solidFill>
+                            <a:srgbClr val="52514E"/>
+                          </a:solidFill>
+                          <a:latin typeface="DejaVu Sans"/>
+                        </a:defRPr>
+                      </a:pPr>
+                      <a:r>
+                        <a:t>5,568</a:t>
+                      </a:r>
+                    </a:p>
+                  </a:txBody>
+                  <a:tcPr>
+                    <a:solidFill>
+                      <a:srgbClr val="FCFCFB"/>
+                    </a:solidFill>
+                  </a:tcPr>
+                </a:tc>
+                <a:tc>
+                  <a:txBody>
+                    <a:bodyPr/>
+                    <a:lstStyle/>
+                    <a:p>
+                      <a:pPr>
+                        <a:defRPr sz="1200" b="0">
+                          <a:solidFill>
+                            <a:srgbClr val="52514E"/>
+                          </a:solidFill>
+                          <a:latin typeface="DejaVu Sans"/>
+                        </a:defRPr>
+                      </a:pPr>
+                      <a:r>
+                        <a:t>paid API</a:t>
+                      </a:r>
+                    </a:p>
+                  </a:txBody>
+                  <a:tcPr>
+                    <a:solidFill>
+                      <a:srgbClr val="FCFCFB"/>
+                    </a:solidFill>
+                  </a:tcPr>
+                </a:tc>
+              </a:tr>
+              <a:tr h="457200">
+                <a:tc>
+                  <a:txBody>
+                    <a:bodyPr/>
+                    <a:lstStyle/>
+                    <a:p>
+                      <a:pPr>
+                        <a:defRPr sz="1200" b="0">
+                          <a:solidFill>
+                            <a:srgbClr val="52514E"/>
+                          </a:solidFill>
+                          <a:latin typeface="DejaVu Sans"/>
+                        </a:defRPr>
+                      </a:pPr>
+                      <a:r>
+                        <a:t>gate</a:t>
+                      </a:r>
+                    </a:p>
+                  </a:txBody>
+                  <a:tcPr>
+                    <a:solidFill>
+                      <a:srgbClr val="FCFCFB"/>
+                    </a:solidFill>
+                  </a:tcPr>
+                </a:tc>
+                <a:tc>
+                  <a:txBody>
+                    <a:bodyPr/>
+                    <a:lstStyle/>
+                    <a:p>
+                      <a:pPr>
+                        <a:defRPr sz="1200" b="0">
+                          <a:solidFill>
+                            <a:srgbClr val="52514E"/>
+                          </a:solidFill>
+                          <a:latin typeface="DejaVu Sans"/>
+                        </a:defRPr>
+                      </a:pPr>
+                      <a:r>
+                        <a:t>4</a:t>
+                      </a:r>
+                    </a:p>
+                  </a:txBody>
+                  <a:tcPr>
+                    <a:solidFill>
+                      <a:srgbClr val="FCFCFB"/>
+                    </a:solidFill>
+                  </a:tcPr>
+                </a:tc>
+                <a:tc>
+                  <a:txBody>
+                    <a:bodyPr/>
+                    <a:lstStyle/>
+                    <a:p>
+                      <a:pPr>
+                        <a:defRPr sz="1200" b="0">
+                          <a:solidFill>
+                            <a:srgbClr val="52514E"/>
+                          </a:solidFill>
+                          <a:latin typeface="DejaVu Sans"/>
+                        </a:defRPr>
+                      </a:pPr>
+                      <a:r>
+                        <a:t>2,426</a:t>
+                      </a:r>
+                    </a:p>
+                  </a:txBody>
+                  <a:tcPr>
+                    <a:solidFill>
+                      <a:srgbClr val="FCFCFB"/>
+                    </a:solidFill>
+                  </a:tcPr>
+                </a:tc>
+                <a:tc>
+                  <a:txBody>
+                    <a:bodyPr/>
+                    <a:lstStyle/>
+                    <a:p>
+                      <a:pPr>
+                        <a:defRPr sz="1200" b="0">
+                          <a:solidFill>
+                            <a:srgbClr val="52514E"/>
+                          </a:solidFill>
+                          <a:latin typeface="DejaVu Sans"/>
+                        </a:defRPr>
+                      </a:pPr>
+                      <a:r>
+                        <a:t>2,836</a:t>
+                      </a:r>
+                    </a:p>
+                  </a:txBody>
+                  <a:tcPr>
+                    <a:solidFill>
+                      <a:srgbClr val="FCFCFB"/>
+                    </a:solidFill>
+                  </a:tcPr>
+                </a:tc>
+                <a:tc>
+                  <a:txBody>
+                    <a:bodyPr/>
+                    <a:lstStyle/>
+                    <a:p>
+                      <a:pPr>
+                        <a:defRPr sz="1200" b="0">
+                          <a:solidFill>
+                            <a:srgbClr val="52514E"/>
+                          </a:solidFill>
+                          <a:latin typeface="DejaVu Sans"/>
+                        </a:defRPr>
+                      </a:pPr>
+                      <a:r>
+                        <a:t>0</a:t>
+                      </a:r>
+                    </a:p>
+                  </a:txBody>
+                  <a:tcPr>
+                    <a:solidFill>
+                      <a:srgbClr val="FCFCFB"/>
+                    </a:solidFill>
+                  </a:tcPr>
+                </a:tc>
+                <a:tc>
+                  <a:txBody>
+                    <a:bodyPr/>
+                    <a:lstStyle/>
+                    <a:p>
+                      <a:pPr>
+                        <a:defRPr sz="1200" b="0">
+                          <a:solidFill>
+                            <a:srgbClr val="52514E"/>
+                          </a:solidFill>
+                          <a:latin typeface="DejaVu Sans"/>
+                        </a:defRPr>
+                      </a:pPr>
+                      <a:r>
+                        <a:t>local — free</a:t>
+                      </a:r>
+                    </a:p>
+                  </a:txBody>
+                  <a:tcPr>
+                    <a:solidFill>
+                      <a:srgbClr val="FCFCFB"/>
+                    </a:solidFill>
+                  </a:tcPr>
+                </a:tc>
+              </a:tr>
+            </a:tbl>
+          </a:graphicData>
+        </a:graphic>
+      </p:graphicFrame>
+      <p:sp>
+        <p:nvSpPr>
+          <p:cNvPr id="5" name="Rounded Rectangle 4"/>
+          <p:cNvSpPr/>
+          <p:nvPr/>
+        </p:nvSpPr>
+        <p:spPr>
+          <a:xfrm>
+            <a:off x="548640" y="4206240"/>
+            <a:ext cx="3474720" cy="1234440"/>
+          </a:xfrm>
+          <a:prstGeom prst="roundRect">
+            <a:avLst/>
+          </a:prstGeom>
+          <a:solidFill>
+            <a:srgbClr val="F4F3EE"/>
+          </a:solidFill>
+          <a:ln>
+            <a:noFill/>
+          </a:ln>
+          <a:effectLst/>
+        </p:spPr>
+        <p:style>
+          <a:lnRef idx="1">
+            <a:schemeClr val="accent1"/>
+          </a:lnRef>
+          <a:fillRef idx="3">
+            <a:schemeClr val="accent1"/>
+          </a:fillRef>
+          <a:effectRef idx="2">
+            <a:schemeClr val="accent1"/>
+          </a:effectRef>
+          <a:fontRef idx="minor">
+            <a:schemeClr val="lt1"/>
+          </a:fontRef>
+        </p:style>
+        <p:txBody>
+          <a:bodyPr rtlCol="0" anchor="ctr"/>
+          <a:lstStyle/>
+          <a:p>
+            <a:pPr algn="ctr"/>
+          </a:p>
+        </p:txBody>
+      </p:sp>
+      <p:sp>
+        <p:nvSpPr>
+          <p:cNvPr id="6" name="TextBox 5"/>
+          <p:cNvSpPr txBox="1"/>
+          <p:nvPr/>
+        </p:nvSpPr>
+        <p:spPr>
+          <a:xfrm>
+            <a:off x="731520" y="4315968"/>
+            <a:ext cx="3108960" cy="548640"/>
+          </a:xfrm>
+          <a:prstGeom prst="rect">
+            <a:avLst/>
+          </a:prstGeom>
+          <a:noFill/>
+        </p:spPr>
+        <p:txBody>
+          <a:bodyPr wrap="square">
+            <a:spAutoFit/>
+          </a:bodyPr>
+          <a:lstStyle/>
+          <a:p>
+            <a:pPr algn="l">
+              <a:lnSpc>
+                <a:spcPct val="115000"/>
+              </a:lnSpc>
+            </a:pPr>
+            <a:r>
+              <a:rPr sz="3000" b="1">
+                <a:solidFill>
+                  <a:srgbClr val="EB6834"/>
+                </a:solidFill>
+                <a:latin typeface="DejaVu Sans"/>
+              </a:rPr>
+              <a:t>4x</a:t>
+            </a:r>
+          </a:p>
+        </p:txBody>
+      </p:sp>
+      <p:sp>
+        <p:nvSpPr>
+          <p:cNvPr id="7" name="TextBox 6"/>
+          <p:cNvSpPr txBox="1"/>
+          <p:nvPr/>
+        </p:nvSpPr>
+        <p:spPr>
+          <a:xfrm>
+            <a:off x="731520" y="4956048"/>
+            <a:ext cx="3108960" cy="411480"/>
+          </a:xfrm>
+          <a:prstGeom prst="rect">
+            <a:avLst/>
+          </a:prstGeom>
+          <a:noFill/>
+        </p:spPr>
+        <p:txBody>
+          <a:bodyPr wrap="square">
+            <a:spAutoFit/>
+          </a:bodyPr>
+          <a:lstStyle/>
+          <a:p>
+            <a:pPr algn="l">
+              <a:lnSpc>
+                <a:spcPct val="115000"/>
+              </a:lnSpc>
+            </a:pPr>
+            <a:r>
+              <a:rPr sz="1000" b="0">
+                <a:solidFill>
+                  <a:srgbClr val="52514E"/>
+                </a:solidFill>
+                <a:latin typeface="DejaVu Sans"/>
+              </a:rPr>
+              <a:t>one engineer call vs one gate call, in completion tokens</a:t>
+            </a:r>
+          </a:p>
+        </p:txBody>
+      </p:sp>
+      <p:sp>
+        <p:nvSpPr>
+          <p:cNvPr id="8" name="Rounded Rectangle 7"/>
+          <p:cNvSpPr/>
+          <p:nvPr/>
+        </p:nvSpPr>
+        <p:spPr>
+          <a:xfrm>
+            <a:off x="4297680" y="4206240"/>
+            <a:ext cx="3474720" cy="1234440"/>
+          </a:xfrm>
+          <a:prstGeom prst="roundRect">
+            <a:avLst/>
+          </a:prstGeom>
+          <a:solidFill>
+            <a:srgbClr val="F4F3EE"/>
+          </a:solidFill>
+          <a:ln>
+            <a:noFill/>
+          </a:ln>
+          <a:effectLst/>
+        </p:spPr>
+        <p:style>
+          <a:lnRef idx="1">
+            <a:schemeClr val="accent1"/>
+          </a:lnRef>
+          <a:fillRef idx="3">
+            <a:schemeClr val="accent1"/>
+          </a:fillRef>
+          <a:effectRef idx="2">
+            <a:schemeClr val="accent1"/>
+          </a:effectRef>
+          <a:fontRef idx="minor">
+            <a:schemeClr val="lt1"/>
+          </a:fontRef>
+        </p:style>
+        <p:txBody>
+          <a:bodyPr rtlCol="0" anchor="ctr"/>
+          <a:lstStyle/>
+          <a:p>
+            <a:pPr algn="ctr"/>
+          </a:p>
+        </p:txBody>
+      </p:sp>
+      <p:sp>
+        <p:nvSpPr>
+          <p:cNvPr id="9" name="TextBox 8"/>
+          <p:cNvSpPr txBox="1"/>
+          <p:nvPr/>
+        </p:nvSpPr>
+        <p:spPr>
+          <a:xfrm>
+            <a:off x="4480560" y="4315968"/>
+            <a:ext cx="3108960" cy="548640"/>
+          </a:xfrm>
+          <a:prstGeom prst="rect">
+            <a:avLst/>
+          </a:prstGeom>
+          <a:noFill/>
+        </p:spPr>
+        <p:txBody>
+          <a:bodyPr wrap="square">
+            <a:spAutoFit/>
+          </a:bodyPr>
+          <a:lstStyle/>
+          <a:p>
+            <a:pPr algn="l">
+              <a:lnSpc>
+                <a:spcPct val="115000"/>
+              </a:lnSpc>
+            </a:pPr>
+            <a:r>
+              <a:rPr sz="3000" b="1">
+                <a:solidFill>
+                  <a:srgbClr val="2A78D6"/>
+                </a:solidFill>
+                <a:latin typeface="DejaVu Sans"/>
+              </a:rPr>
+              <a:t>2,836</a:t>
+            </a:r>
+          </a:p>
+        </p:txBody>
+      </p:sp>
+      <p:sp>
+        <p:nvSpPr>
+          <p:cNvPr id="10" name="TextBox 9"/>
+          <p:cNvSpPr txBox="1"/>
+          <p:nvPr/>
+        </p:nvSpPr>
+        <p:spPr>
+          <a:xfrm>
+            <a:off x="4480560" y="4956048"/>
+            <a:ext cx="3108960" cy="411480"/>
+          </a:xfrm>
+          <a:prstGeom prst="rect">
+            <a:avLst/>
+          </a:prstGeom>
+          <a:noFill/>
+        </p:spPr>
+        <p:txBody>
+          <a:bodyPr wrap="square">
+            <a:spAutoFit/>
+          </a:bodyPr>
+          <a:lstStyle/>
+          <a:p>
+            <a:pPr algn="l">
+              <a:lnSpc>
+                <a:spcPct val="115000"/>
+              </a:lnSpc>
+            </a:pPr>
+            <a:r>
+              <a:rPr sz="1000" b="0">
+                <a:solidFill>
+                  <a:srgbClr val="52514E"/>
+                </a:solidFill>
+                <a:latin typeface="DejaVu Sans"/>
+              </a:rPr>
+              <a:t>gate tokens — all local, none billed</a:t>
+            </a:r>
+          </a:p>
+        </p:txBody>
+      </p:sp>
+      <p:sp>
+        <p:nvSpPr>
+          <p:cNvPr id="11" name="Rounded Rectangle 10"/>
+          <p:cNvSpPr/>
+          <p:nvPr/>
+        </p:nvSpPr>
+        <p:spPr>
+          <a:xfrm>
+            <a:off x="8046720" y="4206240"/>
+            <a:ext cx="3566160" cy="1234440"/>
+          </a:xfrm>
+          <a:prstGeom prst="roundRect">
+            <a:avLst/>
+          </a:prstGeom>
+          <a:solidFill>
+            <a:srgbClr val="F4F3EE"/>
+          </a:solidFill>
+          <a:ln>
+            <a:noFill/>
+          </a:ln>
+          <a:effectLst/>
+        </p:spPr>
+        <p:style>
+          <a:lnRef idx="1">
+            <a:schemeClr val="accent1"/>
+          </a:lnRef>
+          <a:fillRef idx="3">
+            <a:schemeClr val="accent1"/>
+          </a:fillRef>
+          <a:effectRef idx="2">
+            <a:schemeClr val="accent1"/>
+          </a:effectRef>
+          <a:fontRef idx="minor">
+            <a:schemeClr val="lt1"/>
+          </a:fontRef>
+        </p:style>
+        <p:txBody>
+          <a:bodyPr rtlCol="0" anchor="ctr"/>
+          <a:lstStyle/>
+          <a:p>
+            <a:pPr algn="ctr"/>
+          </a:p>
+        </p:txBody>
+      </p:sp>
+      <p:sp>
+        <p:nvSpPr>
+          <p:cNvPr id="12" name="TextBox 11"/>
+          <p:cNvSpPr txBox="1"/>
+          <p:nvPr/>
+        </p:nvSpPr>
+        <p:spPr>
+          <a:xfrm>
+            <a:off x="8229600" y="4315968"/>
+            <a:ext cx="3200400" cy="548640"/>
+          </a:xfrm>
+          <a:prstGeom prst="rect">
+            <a:avLst/>
+          </a:prstGeom>
+          <a:noFill/>
+        </p:spPr>
+        <p:txBody>
+          <a:bodyPr wrap="square">
+            <a:spAutoFit/>
+          </a:bodyPr>
+          <a:lstStyle/>
+          <a:p>
+            <a:pPr algn="l">
+              <a:lnSpc>
+                <a:spcPct val="115000"/>
+              </a:lnSpc>
+            </a:pPr>
+            <a:r>
+              <a:rPr sz="3000" b="1">
+                <a:solidFill>
+                  <a:srgbClr val="EB6834"/>
+                </a:solidFill>
+                <a:latin typeface="DejaVu Sans"/>
+              </a:rPr>
+              <a:t>5,568</a:t>
+            </a:r>
+          </a:p>
+        </p:txBody>
+      </p:sp>
+      <p:sp>
+        <p:nvSpPr>
+          <p:cNvPr id="13" name="TextBox 12"/>
+          <p:cNvSpPr txBox="1"/>
+          <p:nvPr/>
+        </p:nvSpPr>
+        <p:spPr>
+          <a:xfrm>
+            <a:off x="8229600" y="4956048"/>
+            <a:ext cx="3200400" cy="411480"/>
+          </a:xfrm>
+          <a:prstGeom prst="rect">
+            <a:avLst/>
+          </a:prstGeom>
+          <a:noFill/>
+        </p:spPr>
+        <p:txBody>
+          <a:bodyPr wrap="square">
+            <a:spAutoFit/>
+          </a:bodyPr>
+          <a:lstStyle/>
+          <a:p>
+            <a:pPr algn="l">
+              <a:lnSpc>
+                <a:spcPct val="115000"/>
+              </a:lnSpc>
+            </a:pPr>
+            <a:r>
+              <a:rPr sz="1000" b="0">
+                <a:solidFill>
+                  <a:srgbClr val="52514E"/>
+                </a:solidFill>
+                <a:latin typeface="DejaVu Sans"/>
+              </a:rPr>
+              <a:t>engineer reasoning tokens: billed, never seen in the output</a:t>
+            </a:r>
+          </a:p>
+        </p:txBody>
+      </p:sp>
+      <p:sp>
+        <p:nvSpPr>
+          <p:cNvPr id="14" name="TextBox 13"/>
+          <p:cNvSpPr txBox="1"/>
+          <p:nvPr/>
+        </p:nvSpPr>
+        <p:spPr>
+          <a:xfrm>
+            <a:off x="548640" y="5760720"/>
+            <a:ext cx="11064240" cy="822960"/>
+          </a:xfrm>
+          <a:prstGeom prst="rect">
+            <a:avLst/>
+          </a:prstGeom>
+          <a:noFill/>
+        </p:spPr>
+        <p:txBody>
+          <a:bodyPr wrap="square">
+            <a:spAutoFit/>
+          </a:bodyPr>
+          <a:lstStyle/>
+          <a:p>
+            <a:pPr algn="l">
+              <a:lnSpc>
+                <a:spcPct val="115000"/>
+              </a:lnSpc>
+            </a:pPr>
+            <a:r>
+              <a:rPr sz="1300" b="0">
+                <a:solidFill>
+                  <a:srgbClr val="52514E"/>
+                </a:solidFill>
+                <a:latin typeface="DejaVu Sans"/>
+              </a:rPr>
+              <a:t>What Gate 1 changes on the bill is rewrites: each rejection buys another engineer call. A rejection that names the real fault is a rewrite the agent does not waste — which is why the shadowed-contract check was worth adding.</a:t>
+            </a:r>
+          </a:p>
+        </p:txBody>
+      </p:sp>
+    </p:spTree>
+  </p:cSld>
+  <p:clrMapOvr>
+    <a:masterClrMapping/>
+  </p:clrMapOvr>
+</p:sld>
+</file>
+
+<file path=ppt/slides/slide11.xml><?xml version="1.0" encoding="utf-8"?>
+<p:sld xmlns:a="http://schemas.openxmlformats.org/drawingml/2006/main" xmlns:p="http://schemas.openxmlformats.org/presentationml/2006/main" xmlns:r="http://schemas.openxmlformats.org/officeDocument/2006/relationships">
+  <p:cSld>
+    <p:bg>
+      <p:bgPr>
+        <a:solidFill>
+          <a:srgbClr val="FCFCFB"/>
+        </a:solidFill>
+        <a:effectLst/>
+      </p:bgPr>
+    </p:bg>
+    <p:spTree>
+      <p:nvGrpSpPr>
+        <p:cNvPr id="1" name=""/>
+        <p:cNvGrpSpPr/>
+        <p:nvPr/>
+      </p:nvGrpSpPr>
+      <p:grpSpPr/>
+      <p:sp>
+        <p:nvSpPr>
+          <p:cNvPr id="2" name="TextBox 1"/>
+          <p:cNvSpPr txBox="1"/>
+          <p:nvPr/>
+        </p:nvSpPr>
+        <p:spPr>
+          <a:xfrm>
+            <a:off x="548640" y="320040"/>
+            <a:ext cx="10972800" cy="365760"/>
+          </a:xfrm>
+          <a:prstGeom prst="rect">
+            <a:avLst/>
+          </a:prstGeom>
+          <a:noFill/>
+        </p:spPr>
+        <p:txBody>
+          <a:bodyPr wrap="square">
+            <a:spAutoFit/>
+          </a:bodyPr>
+          <a:lstStyle/>
+          <a:p>
+            <a:pPr algn="l">
+              <a:lnSpc>
+                <a:spcPct val="115000"/>
+              </a:lnSpc>
+            </a:pPr>
+            <a:r>
+              <a:rPr sz="1100" b="1">
+                <a:solidFill>
+                  <a:srgbClr val="2A78D6"/>
+                </a:solidFill>
+                <a:latin typeface="DejaVu Sans"/>
+              </a:rPr>
               <a:t>THE PROBLEM</a:t>
             </a:r>
           </a:p>
@@ -4040,7 +5018,7 @@
 </p:sld>
 </file>
 
-<file path=ppt/slides/slide11.xml><?xml version="1.0" encoding="utf-8"?>
+<file path=ppt/slides/slide12.xml><?xml version="1.0" encoding="utf-8"?>
 <p:sld xmlns:a="http://schemas.openxmlformats.org/drawingml/2006/main" xmlns:p="http://schemas.openxmlformats.org/presentationml/2006/main" xmlns:r="http://schemas.openxmlformats.org/officeDocument/2006/relationships">
   <p:cSld>
     <p:bg>
@@ -4370,7 +5348,7 @@
 </p:sld>
 </file>
 
-<file path=ppt/slides/slide12.xml><?xml version="1.0" encoding="utf-8"?>
+<file path=ppt/slides/slide13.xml><?xml version="1.0" encoding="utf-8"?>
 <p:sld xmlns:a="http://schemas.openxmlformats.org/drawingml/2006/main" xmlns:p="http://schemas.openxmlformats.org/presentationml/2006/main" xmlns:r="http://schemas.openxmlformats.org/officeDocument/2006/relationships">
   <p:cSld>
     <p:bg>
@@ -4701,7 +5679,7 @@
 </p:sld>
 </file>
 
-<file path=ppt/slides/slide13.xml><?xml version="1.0" encoding="utf-8"?>
+<file path=ppt/slides/slide14.xml><?xml version="1.0" encoding="utf-8"?>
 <p:sld xmlns:a="http://schemas.openxmlformats.org/drawingml/2006/main" xmlns:p="http://schemas.openxmlformats.org/presentationml/2006/main" xmlns:r="http://schemas.openxmlformats.org/officeDocument/2006/relationships">
   <p:cSld>
     <p:bg>
@@ -5649,7 +6627,7 @@
 </p:sld>
 </file>
 
-<file path=ppt/slides/slide14.xml><?xml version="1.0" encoding="utf-8"?>
+<file path=ppt/slides/slide15.xml><?xml version="1.0" encoding="utf-8"?>
 <p:sld xmlns:a="http://schemas.openxmlformats.org/drawingml/2006/main" xmlns:p="http://schemas.openxmlformats.org/presentationml/2006/main" xmlns:r="http://schemas.openxmlformats.org/officeDocument/2006/relationships">
   <p:cSld>
     <p:bg>
@@ -6118,7 +7096,7 @@
 </p:sld>
 </file>
 
-<file path=ppt/slides/slide15.xml><?xml version="1.0" encoding="utf-8"?>
+<file path=ppt/slides/slide16.xml><?xml version="1.0" encoding="utf-8"?>
 <p:sld xmlns:a="http://schemas.openxmlformats.org/drawingml/2006/main" xmlns:p="http://schemas.openxmlformats.org/presentationml/2006/main" xmlns:r="http://schemas.openxmlformats.org/officeDocument/2006/relationships">
   <p:cSld>
     <p:bg>
@@ -6441,7 +7419,7 @@
 </p:sld>
 </file>
 
-<file path=ppt/slides/slide16.xml><?xml version="1.0" encoding="utf-8"?>
+<file path=ppt/slides/slide17.xml><?xml version="1.0" encoding="utf-8"?>
 <p:sld xmlns:a="http://schemas.openxmlformats.org/drawingml/2006/main" xmlns:p="http://schemas.openxmlformats.org/presentationml/2006/main" xmlns:r="http://schemas.openxmlformats.org/officeDocument/2006/relationships">
   <p:cSld>
     <p:bg>
@@ -6732,7 +7710,7 @@
 </p:sld>
 </file>
 
-<file path=ppt/slides/slide17.xml><?xml version="1.0" encoding="utf-8"?>
+<file path=ppt/slides/slide18.xml><?xml version="1.0" encoding="utf-8"?>
 <p:sld xmlns:a="http://schemas.openxmlformats.org/drawingml/2006/main" xmlns:p="http://schemas.openxmlformats.org/presentationml/2006/main" xmlns:r="http://schemas.openxmlformats.org/officeDocument/2006/relationships">
   <p:cSld>
     <p:bg>
@@ -7023,7 +8001,7 @@
 </p:sld>
 </file>
 
-<file path=ppt/slides/slide18.xml><?xml version="1.0" encoding="utf-8"?>
+<file path=ppt/slides/slide19.xml><?xml version="1.0" encoding="utf-8"?>
 <p:sld xmlns:a="http://schemas.openxmlformats.org/drawingml/2006/main" xmlns:p="http://schemas.openxmlformats.org/presentationml/2006/main" xmlns:r="http://schemas.openxmlformats.org/officeDocument/2006/relationships">
   <p:cSld>
     <p:bg>
@@ -7329,261 +8307,6 @@
 </p:sld>
 </file>
 
-<file path=ppt/slides/slide19.xml><?xml version="1.0" encoding="utf-8"?>
-<p:sld xmlns:a="http://schemas.openxmlformats.org/drawingml/2006/main" xmlns:p="http://schemas.openxmlformats.org/presentationml/2006/main" xmlns:r="http://schemas.openxmlformats.org/officeDocument/2006/relationships">
-  <p:cSld>
-    <p:bg>
-      <p:bgPr>
-        <a:solidFill>
-          <a:srgbClr val="FCFCFB"/>
-        </a:solidFill>
-        <a:effectLst/>
-      </p:bgPr>
-    </p:bg>
-    <p:spTree>
-      <p:nvGrpSpPr>
-        <p:cNvPr id="1" name=""/>
-        <p:cNvGrpSpPr/>
-        <p:nvPr/>
-      </p:nvGrpSpPr>
-      <p:grpSpPr/>
-      <p:sp>
-        <p:nvSpPr>
-          <p:cNvPr id="2" name="TextBox 1"/>
-          <p:cNvSpPr txBox="1"/>
-          <p:nvPr/>
-        </p:nvSpPr>
-        <p:spPr>
-          <a:xfrm>
-            <a:off x="548640" y="320040"/>
-            <a:ext cx="10972800" cy="365760"/>
-          </a:xfrm>
-          <a:prstGeom prst="rect">
-            <a:avLst/>
-          </a:prstGeom>
-          <a:noFill/>
-        </p:spPr>
-        <p:txBody>
-          <a:bodyPr wrap="square">
-            <a:spAutoFit/>
-          </a:bodyPr>
-          <a:lstStyle/>
-          <a:p>
-            <a:pPr algn="l">
-              <a:lnSpc>
-                <a:spcPct val="115000"/>
-              </a:lnSpc>
-            </a:pPr>
-            <a:r>
-              <a:rPr sz="1100" b="1">
-                <a:solidFill>
-                  <a:srgbClr val="2A78D6"/>
-                </a:solidFill>
-                <a:latin typeface="DejaVu Sans"/>
-              </a:rPr>
-              <a:t>NEXT</a:t>
-            </a:r>
-          </a:p>
-        </p:txBody>
-      </p:sp>
-      <p:sp>
-        <p:nvSpPr>
-          <p:cNvPr id="3" name="TextBox 2"/>
-          <p:cNvSpPr txBox="1"/>
-          <p:nvPr/>
-        </p:nvSpPr>
-        <p:spPr>
-          <a:xfrm>
-            <a:off x="548640" y="658368"/>
-            <a:ext cx="10972800" cy="640080"/>
-          </a:xfrm>
-          <a:prstGeom prst="rect">
-            <a:avLst/>
-          </a:prstGeom>
-          <a:noFill/>
-        </p:spPr>
-        <p:txBody>
-          <a:bodyPr wrap="square">
-            <a:spAutoFit/>
-          </a:bodyPr>
-          <a:lstStyle/>
-          <a:p>
-            <a:pPr algn="l">
-              <a:lnSpc>
-                <a:spcPct val="115000"/>
-              </a:lnSpc>
-            </a:pPr>
-            <a:r>
-              <a:rPr sz="2600" b="1">
-                <a:solidFill>
-                  <a:srgbClr val="0B0B0B"/>
-                </a:solidFill>
-                <a:latin typeface="DejaVu Sans"/>
-              </a:rPr>
-              <a:t>Gate 1 is complete as an implementation</a:t>
-            </a:r>
-          </a:p>
-        </p:txBody>
-      </p:sp>
-      <p:sp>
-        <p:nvSpPr>
-          <p:cNvPr id="4" name="TextBox 3"/>
-          <p:cNvSpPr txBox="1"/>
-          <p:nvPr/>
-        </p:nvSpPr>
-        <p:spPr>
-          <a:xfrm>
-            <a:off x="548640" y="1737360"/>
-            <a:ext cx="11064240" cy="3657600"/>
-          </a:xfrm>
-          <a:prstGeom prst="rect">
-            <a:avLst/>
-          </a:prstGeom>
-          <a:noFill/>
-        </p:spPr>
-        <p:txBody>
-          <a:bodyPr wrap="square">
-            <a:spAutoFit/>
-          </a:bodyPr>
-          <a:lstStyle/>
-          <a:p>
-            <a:pPr algn="l">
-              <a:lnSpc>
-                <a:spcPct val="150000"/>
-              </a:lnSpc>
-            </a:pPr>
-            <a:r>
-              <a:rPr sz="1600" b="1">
-                <a:solidFill>
-                  <a:srgbClr val="0B0B0B"/>
-                </a:solidFill>
-                <a:latin typeface="DejaVu Sans"/>
-              </a:rPr>
-              <a:t>Measurement, not code, is what remains</a:t>
-            </a:r>
-          </a:p>
-          <a:p>
-            <a:pPr algn="l">
-              <a:lnSpc>
-                <a:spcPct val="150000"/>
-              </a:lnSpc>
-            </a:pPr>
-            <a:r>
-              <a:rPr sz="1400" b="0">
-                <a:solidFill>
-                  <a:srgbClr val="52514E"/>
-                </a:solidFill>
-                <a:latin typeface="DejaVu Sans"/>
-              </a:rPr>
-              <a:t>·  Re-run the archive for a real n — both arms, needs a billed key and hand annotation</a:t>
-            </a:r>
-          </a:p>
-          <a:p>
-            <a:pPr algn="l">
-              <a:lnSpc>
-                <a:spcPct val="150000"/>
-              </a:lnSpc>
-            </a:pPr>
-            <a:r>
-              <a:rPr sz="1400" b="0">
-                <a:solidFill>
-                  <a:srgbClr val="52514E"/>
-                </a:solidFill>
-                <a:latin typeface="DejaVu Sans"/>
-              </a:rPr>
-              <a:t>·  Channel-fidelity writer arm at MAX_LEN ∈ {1000, 4000, 16000, ∞}</a:t>
-            </a:r>
-          </a:p>
-          <a:p>
-            <a:pPr algn="l">
-              <a:lnSpc>
-                <a:spcPct val="150000"/>
-              </a:lnSpc>
-            </a:pPr>
-            <a:r>
-              <a:rPr sz="1400" b="0">
-                <a:solidFill>
-                  <a:srgbClr val="52514E"/>
-                </a:solidFill>
-                <a:latin typeface="DejaVu Sans"/>
-              </a:rPr>
-              <a:t>·  Capture integrity: a missing log must fail loudly, not read as clean</a:t>
-            </a:r>
-          </a:p>
-          <a:p>
-            <a:pPr algn="l">
-              <a:lnSpc>
-                <a:spcPct val="150000"/>
-              </a:lnSpc>
-            </a:pPr>
-            <a:r>
-              <a:rPr sz="1400" b="0">
-                <a:solidFill>
-                  <a:srgbClr val="52514E"/>
-                </a:solidFill>
-                <a:latin typeface="DejaVu Sans"/>
-              </a:rPr>
-              <a:t>·  Re-execution verification — turn P10 from possible into performed</a:t>
-            </a:r>
-          </a:p>
-          <a:p>
-            <a:pPr algn="l">
-              <a:lnSpc>
-                <a:spcPct val="150000"/>
-              </a:lnSpc>
-            </a:pPr>
-            <a:r>
-              <a:rPr sz="1400" b="0">
-                <a:solidFill>
-                  <a:srgbClr val="52514E"/>
-                </a:solidFill>
-                <a:latin typeface="DejaVu Sans"/>
-              </a:rPr>
-              <a:t>·  A second adapter, to make portability a demonstration rather than an argument</a:t>
-            </a:r>
-          </a:p>
-          <a:p>
-            <a:pPr algn="l">
-              <a:lnSpc>
-                <a:spcPct val="150000"/>
-              </a:lnSpc>
-            </a:pPr>
-            <a:r>
-              <a:rPr sz="1000" b="0">
-                <a:solidFill>
-                  <a:srgbClr val="52514E"/>
-                </a:solidFill>
-                <a:latin typeface="DejaVu Sans"/>
-              </a:rPr>
-              <a:t/>
-            </a:r>
-          </a:p>
-          <a:p>
-            <a:pPr algn="l">
-              <a:lnSpc>
-                <a:spcPct val="150000"/>
-              </a:lnSpc>
-            </a:pPr>
-            <a:r>
-              <a:rPr sz="1600" b="1">
-                <a:solidFill>
-                  <a:srgbClr val="2A78D6"/>
-                </a:solidFill>
-                <a:latin typeface="DejaVu Sans"/>
-              </a:rPr>
-              <a:t>Then Gate 2 — source ↔ result coherence, on the same model seam</a:t>
-            </a:r>
-          </a:p>
-        </p:txBody>
-      </p:sp>
-    </p:spTree>
-  </p:cSld>
-  <p:clrMapOvr>
-    <a:masterClrMapping/>
-  </p:clrMapOvr>
-</p:sld>
-</file>
-
 <file path=ppt/slides/slide2.xml><?xml version="1.0" encoding="utf-8"?>
 <p:sld xmlns:a="http://schemas.openxmlformats.org/drawingml/2006/main" xmlns:p="http://schemas.openxmlformats.org/presentationml/2006/main" xmlns:r="http://schemas.openxmlformats.org/officeDocument/2006/relationships">
   <p:cSld>
@@ -8577,6 +9300,261 @@
 </p:sld>
 </file>
 
+<file path=ppt/slides/slide20.xml><?xml version="1.0" encoding="utf-8"?>
+<p:sld xmlns:a="http://schemas.openxmlformats.org/drawingml/2006/main" xmlns:p="http://schemas.openxmlformats.org/presentationml/2006/main" xmlns:r="http://schemas.openxmlformats.org/officeDocument/2006/relationships">
+  <p:cSld>
+    <p:bg>
+      <p:bgPr>
+        <a:solidFill>
+          <a:srgbClr val="FCFCFB"/>
+        </a:solidFill>
+        <a:effectLst/>
+      </p:bgPr>
+    </p:bg>
+    <p:spTree>
+      <p:nvGrpSpPr>
+        <p:cNvPr id="1" name=""/>
+        <p:cNvGrpSpPr/>
+        <p:nvPr/>
+      </p:nvGrpSpPr>
+      <p:grpSpPr/>
+      <p:sp>
+        <p:nvSpPr>
+          <p:cNvPr id="2" name="TextBox 1"/>
+          <p:cNvSpPr txBox="1"/>
+          <p:nvPr/>
+        </p:nvSpPr>
+        <p:spPr>
+          <a:xfrm>
+            <a:off x="548640" y="320040"/>
+            <a:ext cx="10972800" cy="365760"/>
+          </a:xfrm>
+          <a:prstGeom prst="rect">
+            <a:avLst/>
+          </a:prstGeom>
+          <a:noFill/>
+        </p:spPr>
+        <p:txBody>
+          <a:bodyPr wrap="square">
+            <a:spAutoFit/>
+          </a:bodyPr>
+          <a:lstStyle/>
+          <a:p>
+            <a:pPr algn="l">
+              <a:lnSpc>
+                <a:spcPct val="115000"/>
+              </a:lnSpc>
+            </a:pPr>
+            <a:r>
+              <a:rPr sz="1100" b="1">
+                <a:solidFill>
+                  <a:srgbClr val="2A78D6"/>
+                </a:solidFill>
+                <a:latin typeface="DejaVu Sans"/>
+              </a:rPr>
+              <a:t>NEXT</a:t>
+            </a:r>
+          </a:p>
+        </p:txBody>
+      </p:sp>
+      <p:sp>
+        <p:nvSpPr>
+          <p:cNvPr id="3" name="TextBox 2"/>
+          <p:cNvSpPr txBox="1"/>
+          <p:nvPr/>
+        </p:nvSpPr>
+        <p:spPr>
+          <a:xfrm>
+            <a:off x="548640" y="658368"/>
+            <a:ext cx="10972800" cy="640080"/>
+          </a:xfrm>
+          <a:prstGeom prst="rect">
+            <a:avLst/>
+          </a:prstGeom>
+          <a:noFill/>
+        </p:spPr>
+        <p:txBody>
+          <a:bodyPr wrap="square">
+            <a:spAutoFit/>
+          </a:bodyPr>
+          <a:lstStyle/>
+          <a:p>
+            <a:pPr algn="l">
+              <a:lnSpc>
+                <a:spcPct val="115000"/>
+              </a:lnSpc>
+            </a:pPr>
+            <a:r>
+              <a:rPr sz="2600" b="1">
+                <a:solidFill>
+                  <a:srgbClr val="0B0B0B"/>
+                </a:solidFill>
+                <a:latin typeface="DejaVu Sans"/>
+              </a:rPr>
+              <a:t>Gate 1 is complete as an implementation</a:t>
+            </a:r>
+          </a:p>
+        </p:txBody>
+      </p:sp>
+      <p:sp>
+        <p:nvSpPr>
+          <p:cNvPr id="4" name="TextBox 3"/>
+          <p:cNvSpPr txBox="1"/>
+          <p:nvPr/>
+        </p:nvSpPr>
+        <p:spPr>
+          <a:xfrm>
+            <a:off x="548640" y="1737360"/>
+            <a:ext cx="11064240" cy="3657600"/>
+          </a:xfrm>
+          <a:prstGeom prst="rect">
+            <a:avLst/>
+          </a:prstGeom>
+          <a:noFill/>
+        </p:spPr>
+        <p:txBody>
+          <a:bodyPr wrap="square">
+            <a:spAutoFit/>
+          </a:bodyPr>
+          <a:lstStyle/>
+          <a:p>
+            <a:pPr algn="l">
+              <a:lnSpc>
+                <a:spcPct val="150000"/>
+              </a:lnSpc>
+            </a:pPr>
+            <a:r>
+              <a:rPr sz="1600" b="1">
+                <a:solidFill>
+                  <a:srgbClr val="0B0B0B"/>
+                </a:solidFill>
+                <a:latin typeface="DejaVu Sans"/>
+              </a:rPr>
+              <a:t>Measurement, not code, is what remains</a:t>
+            </a:r>
+          </a:p>
+          <a:p>
+            <a:pPr algn="l">
+              <a:lnSpc>
+                <a:spcPct val="150000"/>
+              </a:lnSpc>
+            </a:pPr>
+            <a:r>
+              <a:rPr sz="1400" b="0">
+                <a:solidFill>
+                  <a:srgbClr val="52514E"/>
+                </a:solidFill>
+                <a:latin typeface="DejaVu Sans"/>
+              </a:rPr>
+              <a:t>·  Re-run the archive for a real n — both arms, needs a billed key and hand annotation</a:t>
+            </a:r>
+          </a:p>
+          <a:p>
+            <a:pPr algn="l">
+              <a:lnSpc>
+                <a:spcPct val="150000"/>
+              </a:lnSpc>
+            </a:pPr>
+            <a:r>
+              <a:rPr sz="1400" b="0">
+                <a:solidFill>
+                  <a:srgbClr val="52514E"/>
+                </a:solidFill>
+                <a:latin typeface="DejaVu Sans"/>
+              </a:rPr>
+              <a:t>·  Channel-fidelity writer arm at MAX_LEN ∈ {1000, 4000, 16000, ∞}</a:t>
+            </a:r>
+          </a:p>
+          <a:p>
+            <a:pPr algn="l">
+              <a:lnSpc>
+                <a:spcPct val="150000"/>
+              </a:lnSpc>
+            </a:pPr>
+            <a:r>
+              <a:rPr sz="1400" b="0">
+                <a:solidFill>
+                  <a:srgbClr val="52514E"/>
+                </a:solidFill>
+                <a:latin typeface="DejaVu Sans"/>
+              </a:rPr>
+              <a:t>·  Capture integrity: a missing log must fail loudly, not read as clean</a:t>
+            </a:r>
+          </a:p>
+          <a:p>
+            <a:pPr algn="l">
+              <a:lnSpc>
+                <a:spcPct val="150000"/>
+              </a:lnSpc>
+            </a:pPr>
+            <a:r>
+              <a:rPr sz="1400" b="0">
+                <a:solidFill>
+                  <a:srgbClr val="52514E"/>
+                </a:solidFill>
+                <a:latin typeface="DejaVu Sans"/>
+              </a:rPr>
+              <a:t>·  Re-execution verification — turn P10 from possible into performed</a:t>
+            </a:r>
+          </a:p>
+          <a:p>
+            <a:pPr algn="l">
+              <a:lnSpc>
+                <a:spcPct val="150000"/>
+              </a:lnSpc>
+            </a:pPr>
+            <a:r>
+              <a:rPr sz="1400" b="0">
+                <a:solidFill>
+                  <a:srgbClr val="52514E"/>
+                </a:solidFill>
+                <a:latin typeface="DejaVu Sans"/>
+              </a:rPr>
+              <a:t>·  A second adapter, to make portability a demonstration rather than an argument</a:t>
+            </a:r>
+          </a:p>
+          <a:p>
+            <a:pPr algn="l">
+              <a:lnSpc>
+                <a:spcPct val="150000"/>
+              </a:lnSpc>
+            </a:pPr>
+            <a:r>
+              <a:rPr sz="1000" b="0">
+                <a:solidFill>
+                  <a:srgbClr val="52514E"/>
+                </a:solidFill>
+                <a:latin typeface="DejaVu Sans"/>
+              </a:rPr>
+              <a:t/>
+            </a:r>
+          </a:p>
+          <a:p>
+            <a:pPr algn="l">
+              <a:lnSpc>
+                <a:spcPct val="150000"/>
+              </a:lnSpc>
+            </a:pPr>
+            <a:r>
+              <a:rPr sz="1600" b="1">
+                <a:solidFill>
+                  <a:srgbClr val="2A78D6"/>
+                </a:solidFill>
+                <a:latin typeface="DejaVu Sans"/>
+              </a:rPr>
+              <a:t>Then Gate 2 — source ↔ result coherence, on the same model seam</a:t>
+            </a:r>
+          </a:p>
+        </p:txBody>
+      </p:sp>
+    </p:spTree>
+  </p:cSld>
+  <p:clrMapOvr>
+    <a:masterClrMapping/>
+  </p:clrMapOvr>
+</p:sld>
+</file>
+
 <file path=ppt/slides/slide3.xml><?xml version="1.0" encoding="utf-8"?>
 <p:sld xmlns:a="http://schemas.openxmlformats.org/drawingml/2006/main" xmlns:p="http://schemas.openxmlformats.org/presentationml/2006/main" xmlns:r="http://schemas.openxmlformats.org/officeDocument/2006/relationships">
   <p:cSld>
@@ -11018,6 +11996,503 @@
                 </a:solidFill>
                 <a:latin typeface="DejaVu Sans"/>
               </a:rPr>
+              <a:t>THE PAPERS</a:t>
+            </a:r>
+          </a:p>
+        </p:txBody>
+      </p:sp>
+      <p:sp>
+        <p:nvSpPr>
+          <p:cNvPr id="3" name="TextBox 2"/>
+          <p:cNvSpPr txBox="1"/>
+          <p:nvPr/>
+        </p:nvSpPr>
+        <p:spPr>
+          <a:xfrm>
+            <a:off x="548640" y="658368"/>
+            <a:ext cx="10972800" cy="640080"/>
+          </a:xfrm>
+          <a:prstGeom prst="rect">
+            <a:avLst/>
+          </a:prstGeom>
+          <a:noFill/>
+        </p:spPr>
+        <p:txBody>
+          <a:bodyPr wrap="square">
+            <a:spAutoFit/>
+          </a:bodyPr>
+          <a:lstStyle/>
+          <a:p>
+            <a:pPr algn="l">
+              <a:lnSpc>
+                <a:spcPct val="115000"/>
+              </a:lnSpc>
+            </a:pPr>
+            <a:r>
+              <a:rPr sz="2600" b="1">
+                <a:solidFill>
+                  <a:srgbClr val="0B0B0B"/>
+                </a:solidFill>
+                <a:latin typeface="DejaVu Sans"/>
+              </a:rPr>
+              <a:t>Of the numbers a paper states, how many are sourced</a:t>
+            </a:r>
+          </a:p>
+        </p:txBody>
+      </p:sp>
+      <p:graphicFrame>
+        <p:nvGraphicFramePr>
+          <p:cNvPr id="4" name="Table 3"/>
+          <p:cNvGraphicFramePr>
+            <a:graphicFrameLocks noGrp="1"/>
+          </p:cNvGraphicFramePr>
+          <p:nvPr/>
+        </p:nvGraphicFramePr>
+        <p:xfrm>
+          <a:off x="548640" y="1600200"/>
+          <a:ext cx="11064240" cy="1371600"/>
+        </p:xfrm>
+        <a:graphic>
+          <a:graphicData uri="http://schemas.openxmlformats.org/drawingml/2006/table">
+            <a:tbl>
+              <a:tblPr firstRow="1" bandRow="1">
+                <a:tableStyleId>{5C22544A-7EE6-4342-B048-85BDC9FD1C3A}</a:tableStyleId>
+              </a:tblPr>
+              <a:tblGrid>
+                <a:gridCol w="3291840"/>
+                <a:gridCol w="2743200"/>
+                <a:gridCol w="2743200"/>
+                <a:gridCol w="2286000"/>
+              </a:tblGrid>
+              <a:tr h="457200">
+                <a:tc>
+                  <a:txBody>
+                    <a:bodyPr/>
+                    <a:lstStyle/>
+                    <a:p>
+                      <a:pPr>
+                        <a:defRPr sz="1300" b="1">
+                          <a:solidFill>
+                            <a:srgbClr val="0B0B0B"/>
+                          </a:solidFill>
+                          <a:latin typeface="DejaVu Sans"/>
+                        </a:defRPr>
+                      </a:pPr>
+                      <a:r>
+                        <a:t>paper</a:t>
+                      </a:r>
+                    </a:p>
+                  </a:txBody>
+                  <a:tcPr>
+                    <a:solidFill>
+                      <a:srgbClr val="F4F3EE"/>
+                    </a:solidFill>
+                  </a:tcPr>
+                </a:tc>
+                <a:tc>
+                  <a:txBody>
+                    <a:bodyPr/>
+                    <a:lstStyle/>
+                    <a:p>
+                      <a:pPr>
+                        <a:defRPr sz="1300" b="1">
+                          <a:solidFill>
+                            <a:srgbClr val="0B0B0B"/>
+                          </a:solidFill>
+                          <a:latin typeface="DejaVu Sans"/>
+                        </a:defRPr>
+                      </a:pPr>
+                      <a:r>
+                        <a:t>numeric claims</a:t>
+                      </a:r>
+                    </a:p>
+                  </a:txBody>
+                  <a:tcPr>
+                    <a:solidFill>
+                      <a:srgbClr val="F4F3EE"/>
+                    </a:solidFill>
+                  </a:tcPr>
+                </a:tc>
+                <a:tc>
+                  <a:txBody>
+                    <a:bodyPr/>
+                    <a:lstStyle/>
+                    <a:p>
+                      <a:pPr>
+                        <a:defRPr sz="1300" b="1">
+                          <a:solidFill>
+                            <a:srgbClr val="0B0B0B"/>
+                          </a:solidFill>
+                          <a:latin typeface="DejaVu Sans"/>
+                        </a:defRPr>
+                      </a:pPr>
+                      <a:r>
+                        <a:t>sourced to a result</a:t>
+                      </a:r>
+                    </a:p>
+                  </a:txBody>
+                  <a:tcPr>
+                    <a:solidFill>
+                      <a:srgbClr val="F4F3EE"/>
+                    </a:solidFill>
+                  </a:tcPr>
+                </a:tc>
+                <a:tc>
+                  <a:txBody>
+                    <a:bodyPr/>
+                    <a:lstStyle/>
+                    <a:p>
+                      <a:pPr>
+                        <a:defRPr sz="1300" b="1">
+                          <a:solidFill>
+                            <a:srgbClr val="0B0B0B"/>
+                          </a:solidFill>
+                          <a:latin typeface="DejaVu Sans"/>
+                        </a:defRPr>
+                      </a:pPr>
+                      <a:r>
+                        <a:t>record_result calls</a:t>
+                      </a:r>
+                    </a:p>
+                  </a:txBody>
+                  <a:tcPr>
+                    <a:solidFill>
+                      <a:srgbClr val="F4F3EE"/>
+                    </a:solidFill>
+                  </a:tcPr>
+                </a:tc>
+              </a:tr>
+              <a:tr h="457200">
+                <a:tc>
+                  <a:txBody>
+                    <a:bodyPr/>
+                    <a:lstStyle/>
+                    <a:p>
+                      <a:pPr>
+                        <a:defRPr sz="1300" b="0">
+                          <a:solidFill>
+                            <a:srgbClr val="52514E"/>
+                          </a:solidFill>
+                          <a:latin typeface="DejaVu Sans"/>
+                        </a:defRPr>
+                      </a:pPr>
+                      <a:r>
+                        <a:t>without Gate 1</a:t>
+                      </a:r>
+                    </a:p>
+                  </a:txBody>
+                  <a:tcPr>
+                    <a:solidFill>
+                      <a:srgbClr val="FCFCFB"/>
+                    </a:solidFill>
+                  </a:tcPr>
+                </a:tc>
+                <a:tc>
+                  <a:txBody>
+                    <a:bodyPr/>
+                    <a:lstStyle/>
+                    <a:p>
+                      <a:pPr>
+                        <a:defRPr sz="1300" b="0">
+                          <a:solidFill>
+                            <a:srgbClr val="52514E"/>
+                          </a:solidFill>
+                          <a:latin typeface="DejaVu Sans"/>
+                        </a:defRPr>
+                      </a:pPr>
+                      <a:r>
+                        <a:t>65</a:t>
+                      </a:r>
+                    </a:p>
+                  </a:txBody>
+                  <a:tcPr>
+                    <a:solidFill>
+                      <a:srgbClr val="FCFCFB"/>
+                    </a:solidFill>
+                  </a:tcPr>
+                </a:tc>
+                <a:tc>
+                  <a:txBody>
+                    <a:bodyPr/>
+                    <a:lstStyle/>
+                    <a:p>
+                      <a:pPr>
+                        <a:defRPr sz="1300" b="0">
+                          <a:solidFill>
+                            <a:srgbClr val="52514E"/>
+                          </a:solidFill>
+                          <a:latin typeface="DejaVu Sans"/>
+                        </a:defRPr>
+                      </a:pPr>
+                      <a:r>
+                        <a:t>0  (0%)</a:t>
+                      </a:r>
+                    </a:p>
+                  </a:txBody>
+                  <a:tcPr>
+                    <a:solidFill>
+                      <a:srgbClr val="FCFCFB"/>
+                    </a:solidFill>
+                  </a:tcPr>
+                </a:tc>
+                <a:tc>
+                  <a:txBody>
+                    <a:bodyPr/>
+                    <a:lstStyle/>
+                    <a:p>
+                      <a:pPr>
+                        <a:defRPr sz="1300" b="0">
+                          <a:solidFill>
+                            <a:srgbClr val="52514E"/>
+                          </a:solidFill>
+                          <a:latin typeface="DejaVu Sans"/>
+                        </a:defRPr>
+                      </a:pPr>
+                      <a:r>
+                        <a:t>0</a:t>
+                      </a:r>
+                    </a:p>
+                  </a:txBody>
+                  <a:tcPr>
+                    <a:solidFill>
+                      <a:srgbClr val="FCFCFB"/>
+                    </a:solidFill>
+                  </a:tcPr>
+                </a:tc>
+              </a:tr>
+              <a:tr h="457200">
+                <a:tc>
+                  <a:txBody>
+                    <a:bodyPr/>
+                    <a:lstStyle/>
+                    <a:p>
+                      <a:pPr>
+                        <a:defRPr sz="1300" b="0">
+                          <a:solidFill>
+                            <a:srgbClr val="52514E"/>
+                          </a:solidFill>
+                          <a:latin typeface="DejaVu Sans"/>
+                        </a:defRPr>
+                      </a:pPr>
+                      <a:r>
+                        <a:t>with Gate 1</a:t>
+                      </a:r>
+                    </a:p>
+                  </a:txBody>
+                  <a:tcPr>
+                    <a:solidFill>
+                      <a:srgbClr val="FCFCFB"/>
+                    </a:solidFill>
+                  </a:tcPr>
+                </a:tc>
+                <a:tc>
+                  <a:txBody>
+                    <a:bodyPr/>
+                    <a:lstStyle/>
+                    <a:p>
+                      <a:pPr>
+                        <a:defRPr sz="1300" b="0">
+                          <a:solidFill>
+                            <a:srgbClr val="52514E"/>
+                          </a:solidFill>
+                          <a:latin typeface="DejaVu Sans"/>
+                        </a:defRPr>
+                      </a:pPr>
+                      <a:r>
+                        <a:t>paper not found</a:t>
+                      </a:r>
+                    </a:p>
+                  </a:txBody>
+                  <a:tcPr>
+                    <a:solidFill>
+                      <a:srgbClr val="FCFCFB"/>
+                    </a:solidFill>
+                  </a:tcPr>
+                </a:tc>
+                <a:tc>
+                  <a:txBody>
+                    <a:bodyPr/>
+                    <a:lstStyle/>
+                    <a:p>
+                      <a:pPr>
+                        <a:defRPr sz="1300" b="0">
+                          <a:solidFill>
+                            <a:srgbClr val="52514E"/>
+                          </a:solidFill>
+                          <a:latin typeface="DejaVu Sans"/>
+                        </a:defRPr>
+                      </a:pPr>
+                      <a:r>
+                        <a:t>—</a:t>
+                      </a:r>
+                    </a:p>
+                  </a:txBody>
+                  <a:tcPr>
+                    <a:solidFill>
+                      <a:srgbClr val="FCFCFB"/>
+                    </a:solidFill>
+                  </a:tcPr>
+                </a:tc>
+                <a:tc>
+                  <a:txBody>
+                    <a:bodyPr/>
+                    <a:lstStyle/>
+                    <a:p>
+                      <a:pPr>
+                        <a:defRPr sz="1300" b="0">
+                          <a:solidFill>
+                            <a:srgbClr val="52514E"/>
+                          </a:solidFill>
+                          <a:latin typeface="DejaVu Sans"/>
+                        </a:defRPr>
+                      </a:pPr>
+                      <a:r>
+                        <a:t>—</a:t>
+                      </a:r>
+                    </a:p>
+                  </a:txBody>
+                  <a:tcPr>
+                    <a:solidFill>
+                      <a:srgbClr val="FCFCFB"/>
+                    </a:solidFill>
+                  </a:tcPr>
+                </a:tc>
+              </a:tr>
+            </a:tbl>
+          </a:graphicData>
+        </a:graphic>
+      </p:graphicFrame>
+      <p:sp>
+        <p:nvSpPr>
+          <p:cNvPr id="5" name="TextBox 4"/>
+          <p:cNvSpPr txBox="1"/>
+          <p:nvPr/>
+        </p:nvSpPr>
+        <p:spPr>
+          <a:xfrm>
+            <a:off x="548640" y="3840480"/>
+            <a:ext cx="11064240" cy="2194560"/>
+          </a:xfrm>
+          <a:prstGeom prst="rect">
+            <a:avLst/>
+          </a:prstGeom>
+          <a:noFill/>
+        </p:spPr>
+        <p:txBody>
+          <a:bodyPr wrap="square">
+            <a:spAutoFit/>
+          </a:bodyPr>
+          <a:lstStyle/>
+          <a:p>
+            <a:pPr algn="l">
+              <a:lnSpc>
+                <a:spcPct val="115000"/>
+              </a:lnSpc>
+            </a:pPr>
+            <a:r>
+              <a:rPr sz="1500" b="1">
+                <a:solidFill>
+                  <a:srgbClr val="0B0B0B"/>
+                </a:solidFill>
+                <a:latin typeface="DejaVu Sans"/>
+              </a:rPr>
+              <a:t>The archived paper reads well. That is the problem.</a:t>
+            </a:r>
+          </a:p>
+          <a:p>
+            <a:pPr algn="l">
+              <a:lnSpc>
+                <a:spcPct val="115000"/>
+              </a:lnSpc>
+            </a:pPr>
+            <a:r>
+              <a:rPr sz="1300" b="0">
+                <a:solidFill>
+                  <a:srgbClr val="52514E"/>
+                </a:solidFill>
+                <a:latin typeface="DejaVu Sans"/>
+              </a:rPr>
+              <a:t>It states 65 numeric findings and sources none of them: 81.60% test accuracy, a 13.61x speedup, a 39.20% collapse. Its saved code calls record_result zero times and contains none of those numbers. The run behind it raised NameError on every attempt and scored 1.0.</a:t>
+            </a:r>
+          </a:p>
+          <a:p>
+            <a:pPr algn="l">
+              <a:lnSpc>
+                <a:spcPct val="115000"/>
+              </a:lnSpc>
+            </a:pPr>
+            <a:r>
+              <a:rPr sz="1300" b="0">
+                <a:solidFill>
+                  <a:srgbClr val="EB6834"/>
+                </a:solidFill>
+                <a:latin typeface="DejaVu Sans"/>
+              </a:rPr>
+              <a:t>Nothing in the pipeline could tell the difference between a measurement and a sentence. That is what a validity layer is for.</a:t>
+            </a:r>
+          </a:p>
+        </p:txBody>
+      </p:sp>
+    </p:spTree>
+  </p:cSld>
+  <p:clrMapOvr>
+    <a:masterClrMapping/>
+  </p:clrMapOvr>
+</p:sld>
+</file>
+
+<file path=ppt/slides/slide7.xml><?xml version="1.0" encoding="utf-8"?>
+<p:sld xmlns:a="http://schemas.openxmlformats.org/drawingml/2006/main" xmlns:p="http://schemas.openxmlformats.org/presentationml/2006/main" xmlns:r="http://schemas.openxmlformats.org/officeDocument/2006/relationships">
+  <p:cSld>
+    <p:bg>
+      <p:bgPr>
+        <a:solidFill>
+          <a:srgbClr val="FCFCFB"/>
+        </a:solidFill>
+        <a:effectLst/>
+      </p:bgPr>
+    </p:bg>
+    <p:spTree>
+      <p:nvGrpSpPr>
+        <p:cNvPr id="1" name=""/>
+        <p:cNvGrpSpPr/>
+        <p:nvPr/>
+      </p:nvGrpSpPr>
+      <p:grpSpPr/>
+      <p:sp>
+        <p:nvSpPr>
+          <p:cNvPr id="2" name="TextBox 1"/>
+          <p:cNvSpPr txBox="1"/>
+          <p:nvPr/>
+        </p:nvSpPr>
+        <p:spPr>
+          <a:xfrm>
+            <a:off x="548640" y="320040"/>
+            <a:ext cx="10972800" cy="365760"/>
+          </a:xfrm>
+          <a:prstGeom prst="rect">
+            <a:avLst/>
+          </a:prstGeom>
+          <a:noFill/>
+        </p:spPr>
+        <p:txBody>
+          <a:bodyPr wrap="square">
+            <a:spAutoFit/>
+          </a:bodyPr>
+          <a:lstStyle/>
+          <a:p>
+            <a:pPr algn="l">
+              <a:lnSpc>
+                <a:spcPct val="115000"/>
+              </a:lnSpc>
+            </a:pPr>
+            <a:r>
+              <a:rPr sz="1100" b="1">
+                <a:solidFill>
+                  <a:srgbClr val="2A78D6"/>
+                </a:solidFill>
+                <a:latin typeface="DejaVu Sans"/>
+              </a:rPr>
               <a:t>CHECKS</a:t>
             </a:r>
           </a:p>
@@ -12568,7 +14043,7 @@
 </p:sld>
 </file>
 
-<file path=ppt/slides/slide7.xml><?xml version="1.0" encoding="utf-8"?>
+<file path=ppt/slides/slide8.xml><?xml version="1.0" encoding="utf-8"?>
 <p:sld xmlns:a="http://schemas.openxmlformats.org/drawingml/2006/main" xmlns:p="http://schemas.openxmlformats.org/presentationml/2006/main" xmlns:r="http://schemas.openxmlformats.org/officeDocument/2006/relationships">
   <p:cSld>
     <p:bg>
@@ -13322,7 +14797,7 @@
 </p:sld>
 </file>
 
-<file path=ppt/slides/slide8.xml><?xml version="1.0" encoding="utf-8"?>
+<file path=ppt/slides/slide9.xml><?xml version="1.0" encoding="utf-8"?>
 <p:sld xmlns:a="http://schemas.openxmlformats.org/drawingml/2006/main" xmlns:p="http://schemas.openxmlformats.org/presentationml/2006/main" xmlns:r="http://schemas.openxmlformats.org/officeDocument/2006/relationships">
   <p:cSld>
     <p:bg>
@@ -13987,983 +15462,6 @@
                 <a:latin typeface="DejaVu Sans"/>
               </a:rPr>
               <a:t>For scale, MLR-Bench reports faked results and hallucinated methodology in more than half of 10 tasks, and almost all AI Scientist V2 papers contain both. BadScientist reports fabricated papers accepted at up to 82.0% with detection barely above chance.</a:t>
-            </a:r>
-          </a:p>
-        </p:txBody>
-      </p:sp>
-    </p:spTree>
-  </p:cSld>
-  <p:clrMapOvr>
-    <a:masterClrMapping/>
-  </p:clrMapOvr>
-</p:sld>
-</file>
-
-<file path=ppt/slides/slide9.xml><?xml version="1.0" encoding="utf-8"?>
-<p:sld xmlns:a="http://schemas.openxmlformats.org/drawingml/2006/main" xmlns:p="http://schemas.openxmlformats.org/presentationml/2006/main" xmlns:r="http://schemas.openxmlformats.org/officeDocument/2006/relationships">
-  <p:cSld>
-    <p:bg>
-      <p:bgPr>
-        <a:solidFill>
-          <a:srgbClr val="FCFCFB"/>
-        </a:solidFill>
-        <a:effectLst/>
-      </p:bgPr>
-    </p:bg>
-    <p:spTree>
-      <p:nvGrpSpPr>
-        <p:cNvPr id="1" name=""/>
-        <p:cNvGrpSpPr/>
-        <p:nvPr/>
-      </p:nvGrpSpPr>
-      <p:grpSpPr/>
-      <p:sp>
-        <p:nvSpPr>
-          <p:cNvPr id="2" name="TextBox 1"/>
-          <p:cNvSpPr txBox="1"/>
-          <p:nvPr/>
-        </p:nvSpPr>
-        <p:spPr>
-          <a:xfrm>
-            <a:off x="548640" y="320040"/>
-            <a:ext cx="10972800" cy="365760"/>
-          </a:xfrm>
-          <a:prstGeom prst="rect">
-            <a:avLst/>
-          </a:prstGeom>
-          <a:noFill/>
-        </p:spPr>
-        <p:txBody>
-          <a:bodyPr wrap="square">
-            <a:spAutoFit/>
-          </a:bodyPr>
-          <a:lstStyle/>
-          <a:p>
-            <a:pPr algn="l">
-              <a:lnSpc>
-                <a:spcPct val="115000"/>
-              </a:lnSpc>
-            </a:pPr>
-            <a:r>
-              <a:rPr sz="1100" b="1">
-                <a:solidFill>
-                  <a:srgbClr val="2A78D6"/>
-                </a:solidFill>
-                <a:latin typeface="DejaVu Sans"/>
-              </a:rPr>
-              <a:t>COST</a:t>
-            </a:r>
-          </a:p>
-        </p:txBody>
-      </p:sp>
-      <p:sp>
-        <p:nvSpPr>
-          <p:cNvPr id="3" name="TextBox 2"/>
-          <p:cNvSpPr txBox="1"/>
-          <p:nvPr/>
-        </p:nvSpPr>
-        <p:spPr>
-          <a:xfrm>
-            <a:off x="548640" y="658368"/>
-            <a:ext cx="10972800" cy="640080"/>
-          </a:xfrm>
-          <a:prstGeom prst="rect">
-            <a:avLst/>
-          </a:prstGeom>
-          <a:noFill/>
-        </p:spPr>
-        <p:txBody>
-          <a:bodyPr wrap="square">
-            <a:spAutoFit/>
-          </a:bodyPr>
-          <a:lstStyle/>
-          <a:p>
-            <a:pPr algn="l">
-              <a:lnSpc>
-                <a:spcPct val="115000"/>
-              </a:lnSpc>
-            </a:pPr>
-            <a:r>
-              <a:rPr sz="2600" b="1">
-                <a:solidFill>
-                  <a:srgbClr val="0B0B0B"/>
-                </a:solidFill>
-                <a:latin typeface="DejaVu Sans"/>
-              </a:rPr>
-              <a:t>Gate 1's marginal cost on the paid API is zero</a:t>
-            </a:r>
-          </a:p>
-        </p:txBody>
-      </p:sp>
-      <p:graphicFrame>
-        <p:nvGraphicFramePr>
-          <p:cNvPr id="4" name="Table 3"/>
-          <p:cNvGraphicFramePr>
-            <a:graphicFrameLocks noGrp="1"/>
-          </p:cNvGraphicFramePr>
-          <p:nvPr/>
-        </p:nvGraphicFramePr>
-        <p:xfrm>
-          <a:off x="548640" y="1645920"/>
-          <a:ext cx="11064240" cy="1371600"/>
-        </p:xfrm>
-        <a:graphic>
-          <a:graphicData uri="http://schemas.openxmlformats.org/drawingml/2006/table">
-            <a:tbl>
-              <a:tblPr firstRow="1" bandRow="1">
-                <a:tableStyleId>{5C22544A-7EE6-4342-B048-85BDC9FD1C3A}</a:tableStyleId>
-              </a:tblPr>
-              <a:tblGrid>
-                <a:gridCol w="1828800"/>
-                <a:gridCol w="1188720"/>
-                <a:gridCol w="2011680"/>
-                <a:gridCol w="2194560"/>
-                <a:gridCol w="2194560"/>
-                <a:gridCol w="1645920"/>
-              </a:tblGrid>
-              <a:tr h="457200">
-                <a:tc>
-                  <a:txBody>
-                    <a:bodyPr/>
-                    <a:lstStyle/>
-                    <a:p>
-                      <a:pPr>
-                        <a:defRPr sz="1200" b="1">
-                          <a:solidFill>
-                            <a:srgbClr val="0B0B0B"/>
-                          </a:solidFill>
-                          <a:latin typeface="DejaVu Sans"/>
-                        </a:defRPr>
-                      </a:pPr>
-                      <a:r>
-                        <a:t>role</a:t>
-                      </a:r>
-                    </a:p>
-                  </a:txBody>
-                  <a:tcPr>
-                    <a:solidFill>
-                      <a:srgbClr val="F4F3EE"/>
-                    </a:solidFill>
-                  </a:tcPr>
-                </a:tc>
-                <a:tc>
-                  <a:txBody>
-                    <a:bodyPr/>
-                    <a:lstStyle/>
-                    <a:p>
-                      <a:pPr>
-                        <a:defRPr sz="1200" b="1">
-                          <a:solidFill>
-                            <a:srgbClr val="0B0B0B"/>
-                          </a:solidFill>
-                          <a:latin typeface="DejaVu Sans"/>
-                        </a:defRPr>
-                      </a:pPr>
-                      <a:r>
-                        <a:t>calls</a:t>
-                      </a:r>
-                    </a:p>
-                  </a:txBody>
-                  <a:tcPr>
-                    <a:solidFill>
-                      <a:srgbClr val="F4F3EE"/>
-                    </a:solidFill>
-                  </a:tcPr>
-                </a:tc>
-                <a:tc>
-                  <a:txBody>
-                    <a:bodyPr/>
-                    <a:lstStyle/>
-                    <a:p>
-                      <a:pPr>
-                        <a:defRPr sz="1200" b="1">
-                          <a:solidFill>
-                            <a:srgbClr val="0B0B0B"/>
-                          </a:solidFill>
-                          <a:latin typeface="DejaVu Sans"/>
-                        </a:defRPr>
-                      </a:pPr>
-                      <a:r>
-                        <a:t>prompt tok</a:t>
-                      </a:r>
-                    </a:p>
-                  </a:txBody>
-                  <a:tcPr>
-                    <a:solidFill>
-                      <a:srgbClr val="F4F3EE"/>
-                    </a:solidFill>
-                  </a:tcPr>
-                </a:tc>
-                <a:tc>
-                  <a:txBody>
-                    <a:bodyPr/>
-                    <a:lstStyle/>
-                    <a:p>
-                      <a:pPr>
-                        <a:defRPr sz="1200" b="1">
-                          <a:solidFill>
-                            <a:srgbClr val="0B0B0B"/>
-                          </a:solidFill>
-                          <a:latin typeface="DejaVu Sans"/>
-                        </a:defRPr>
-                      </a:pPr>
-                      <a:r>
-                        <a:t>completion tok</a:t>
-                      </a:r>
-                    </a:p>
-                  </a:txBody>
-                  <a:tcPr>
-                    <a:solidFill>
-                      <a:srgbClr val="F4F3EE"/>
-                    </a:solidFill>
-                  </a:tcPr>
-                </a:tc>
-                <a:tc>
-                  <a:txBody>
-                    <a:bodyPr/>
-                    <a:lstStyle/>
-                    <a:p>
-                      <a:pPr>
-                        <a:defRPr sz="1200" b="1">
-                          <a:solidFill>
-                            <a:srgbClr val="0B0B0B"/>
-                          </a:solidFill>
-                          <a:latin typeface="DejaVu Sans"/>
-                        </a:defRPr>
-                      </a:pPr>
-                      <a:r>
-                        <a:t>of which reasoning</a:t>
-                      </a:r>
-                    </a:p>
-                  </a:txBody>
-                  <a:tcPr>
-                    <a:solidFill>
-                      <a:srgbClr val="F4F3EE"/>
-                    </a:solidFill>
-                  </a:tcPr>
-                </a:tc>
-                <a:tc>
-                  <a:txBody>
-                    <a:bodyPr/>
-                    <a:lstStyle/>
-                    <a:p>
-                      <a:pPr>
-                        <a:defRPr sz="1200" b="1">
-                          <a:solidFill>
-                            <a:srgbClr val="0B0B0B"/>
-                          </a:solidFill>
-                          <a:latin typeface="DejaVu Sans"/>
-                        </a:defRPr>
-                      </a:pPr>
-                      <a:r>
-                        <a:t>billed</a:t>
-                      </a:r>
-                    </a:p>
-                  </a:txBody>
-                  <a:tcPr>
-                    <a:solidFill>
-                      <a:srgbClr val="F4F3EE"/>
-                    </a:solidFill>
-                  </a:tcPr>
-                </a:tc>
-              </a:tr>
-              <a:tr h="457200">
-                <a:tc>
-                  <a:txBody>
-                    <a:bodyPr/>
-                    <a:lstStyle/>
-                    <a:p>
-                      <a:pPr>
-                        <a:defRPr sz="1200" b="0">
-                          <a:solidFill>
-                            <a:srgbClr val="52514E"/>
-                          </a:solidFill>
-                          <a:latin typeface="DejaVu Sans"/>
-                        </a:defRPr>
-                      </a:pPr>
-                      <a:r>
-                        <a:t>engineer</a:t>
-                      </a:r>
-                    </a:p>
-                  </a:txBody>
-                  <a:tcPr>
-                    <a:solidFill>
-                      <a:srgbClr val="FCFCFB"/>
-                    </a:solidFill>
-                  </a:tcPr>
-                </a:tc>
-                <a:tc>
-                  <a:txBody>
-                    <a:bodyPr/>
-                    <a:lstStyle/>
-                    <a:p>
-                      <a:pPr>
-                        <a:defRPr sz="1200" b="0">
-                          <a:solidFill>
-                            <a:srgbClr val="52514E"/>
-                          </a:solidFill>
-                          <a:latin typeface="DejaVu Sans"/>
-                        </a:defRPr>
-                      </a:pPr>
-                      <a:r>
-                        <a:t>3</a:t>
-                      </a:r>
-                    </a:p>
-                  </a:txBody>
-                  <a:tcPr>
-                    <a:solidFill>
-                      <a:srgbClr val="FCFCFB"/>
-                    </a:solidFill>
-                  </a:tcPr>
-                </a:tc>
-                <a:tc>
-                  <a:txBody>
-                    <a:bodyPr/>
-                    <a:lstStyle/>
-                    <a:p>
-                      <a:pPr>
-                        <a:defRPr sz="1200" b="0">
-                          <a:solidFill>
-                            <a:srgbClr val="52514E"/>
-                          </a:solidFill>
-                          <a:latin typeface="DejaVu Sans"/>
-                        </a:defRPr>
-                      </a:pPr>
-                      <a:r>
-                        <a:t>1,755</a:t>
-                      </a:r>
-                    </a:p>
-                  </a:txBody>
-                  <a:tcPr>
-                    <a:solidFill>
-                      <a:srgbClr val="FCFCFB"/>
-                    </a:solidFill>
-                  </a:tcPr>
-                </a:tc>
-                <a:tc>
-                  <a:txBody>
-                    <a:bodyPr/>
-                    <a:lstStyle/>
-                    <a:p>
-                      <a:pPr>
-                        <a:defRPr sz="1200" b="0">
-                          <a:solidFill>
-                            <a:srgbClr val="52514E"/>
-                          </a:solidFill>
-                          <a:latin typeface="DejaVu Sans"/>
-                        </a:defRPr>
-                      </a:pPr>
-                      <a:r>
-                        <a:t>8,452</a:t>
-                      </a:r>
-                    </a:p>
-                  </a:txBody>
-                  <a:tcPr>
-                    <a:solidFill>
-                      <a:srgbClr val="FCFCFB"/>
-                    </a:solidFill>
-                  </a:tcPr>
-                </a:tc>
-                <a:tc>
-                  <a:txBody>
-                    <a:bodyPr/>
-                    <a:lstStyle/>
-                    <a:p>
-                      <a:pPr>
-                        <a:defRPr sz="1200" b="0">
-                          <a:solidFill>
-                            <a:srgbClr val="52514E"/>
-                          </a:solidFill>
-                          <a:latin typeface="DejaVu Sans"/>
-                        </a:defRPr>
-                      </a:pPr>
-                      <a:r>
-                        <a:t>5,568</a:t>
-                      </a:r>
-                    </a:p>
-                  </a:txBody>
-                  <a:tcPr>
-                    <a:solidFill>
-                      <a:srgbClr val="FCFCFB"/>
-                    </a:solidFill>
-                  </a:tcPr>
-                </a:tc>
-                <a:tc>
-                  <a:txBody>
-                    <a:bodyPr/>
-                    <a:lstStyle/>
-                    <a:p>
-                      <a:pPr>
-                        <a:defRPr sz="1200" b="0">
-                          <a:solidFill>
-                            <a:srgbClr val="52514E"/>
-                          </a:solidFill>
-                          <a:latin typeface="DejaVu Sans"/>
-                        </a:defRPr>
-                      </a:pPr>
-                      <a:r>
-                        <a:t>paid API</a:t>
-                      </a:r>
-                    </a:p>
-                  </a:txBody>
-                  <a:tcPr>
-                    <a:solidFill>
-                      <a:srgbClr val="FCFCFB"/>
-                    </a:solidFill>
-                  </a:tcPr>
-                </a:tc>
-              </a:tr>
-              <a:tr h="457200">
-                <a:tc>
-                  <a:txBody>
-                    <a:bodyPr/>
-                    <a:lstStyle/>
-                    <a:p>
-                      <a:pPr>
-                        <a:defRPr sz="1200" b="0">
-                          <a:solidFill>
-                            <a:srgbClr val="52514E"/>
-                          </a:solidFill>
-                          <a:latin typeface="DejaVu Sans"/>
-                        </a:defRPr>
-                      </a:pPr>
-                      <a:r>
-                        <a:t>gate</a:t>
-                      </a:r>
-                    </a:p>
-                  </a:txBody>
-                  <a:tcPr>
-                    <a:solidFill>
-                      <a:srgbClr val="FCFCFB"/>
-                    </a:solidFill>
-                  </a:tcPr>
-                </a:tc>
-                <a:tc>
-                  <a:txBody>
-                    <a:bodyPr/>
-                    <a:lstStyle/>
-                    <a:p>
-                      <a:pPr>
-                        <a:defRPr sz="1200" b="0">
-                          <a:solidFill>
-                            <a:srgbClr val="52514E"/>
-                          </a:solidFill>
-                          <a:latin typeface="DejaVu Sans"/>
-                        </a:defRPr>
-                      </a:pPr>
-                      <a:r>
-                        <a:t>4</a:t>
-                      </a:r>
-                    </a:p>
-                  </a:txBody>
-                  <a:tcPr>
-                    <a:solidFill>
-                      <a:srgbClr val="FCFCFB"/>
-                    </a:solidFill>
-                  </a:tcPr>
-                </a:tc>
-                <a:tc>
-                  <a:txBody>
-                    <a:bodyPr/>
-                    <a:lstStyle/>
-                    <a:p>
-                      <a:pPr>
-                        <a:defRPr sz="1200" b="0">
-                          <a:solidFill>
-                            <a:srgbClr val="52514E"/>
-                          </a:solidFill>
-                          <a:latin typeface="DejaVu Sans"/>
-                        </a:defRPr>
-                      </a:pPr>
-                      <a:r>
-                        <a:t>2,426</a:t>
-                      </a:r>
-                    </a:p>
-                  </a:txBody>
-                  <a:tcPr>
-                    <a:solidFill>
-                      <a:srgbClr val="FCFCFB"/>
-                    </a:solidFill>
-                  </a:tcPr>
-                </a:tc>
-                <a:tc>
-                  <a:txBody>
-                    <a:bodyPr/>
-                    <a:lstStyle/>
-                    <a:p>
-                      <a:pPr>
-                        <a:defRPr sz="1200" b="0">
-                          <a:solidFill>
-                            <a:srgbClr val="52514E"/>
-                          </a:solidFill>
-                          <a:latin typeface="DejaVu Sans"/>
-                        </a:defRPr>
-                      </a:pPr>
-                      <a:r>
-                        <a:t>2,836</a:t>
-                      </a:r>
-                    </a:p>
-                  </a:txBody>
-                  <a:tcPr>
-                    <a:solidFill>
-                      <a:srgbClr val="FCFCFB"/>
-                    </a:solidFill>
-                  </a:tcPr>
-                </a:tc>
-                <a:tc>
-                  <a:txBody>
-                    <a:bodyPr/>
-                    <a:lstStyle/>
-                    <a:p>
-                      <a:pPr>
-                        <a:defRPr sz="1200" b="0">
-                          <a:solidFill>
-                            <a:srgbClr val="52514E"/>
-                          </a:solidFill>
-                          <a:latin typeface="DejaVu Sans"/>
-                        </a:defRPr>
-                      </a:pPr>
-                      <a:r>
-                        <a:t>0</a:t>
-                      </a:r>
-                    </a:p>
-                  </a:txBody>
-                  <a:tcPr>
-                    <a:solidFill>
-                      <a:srgbClr val="FCFCFB"/>
-                    </a:solidFill>
-                  </a:tcPr>
-                </a:tc>
-                <a:tc>
-                  <a:txBody>
-                    <a:bodyPr/>
-                    <a:lstStyle/>
-                    <a:p>
-                      <a:pPr>
-                        <a:defRPr sz="1200" b="0">
-                          <a:solidFill>
-                            <a:srgbClr val="52514E"/>
-                          </a:solidFill>
-                          <a:latin typeface="DejaVu Sans"/>
-                        </a:defRPr>
-                      </a:pPr>
-                      <a:r>
-                        <a:t>local — free</a:t>
-                      </a:r>
-                    </a:p>
-                  </a:txBody>
-                  <a:tcPr>
-                    <a:solidFill>
-                      <a:srgbClr val="FCFCFB"/>
-                    </a:solidFill>
-                  </a:tcPr>
-                </a:tc>
-              </a:tr>
-            </a:tbl>
-          </a:graphicData>
-        </a:graphic>
-      </p:graphicFrame>
-      <p:sp>
-        <p:nvSpPr>
-          <p:cNvPr id="5" name="Rounded Rectangle 4"/>
-          <p:cNvSpPr/>
-          <p:nvPr/>
-        </p:nvSpPr>
-        <p:spPr>
-          <a:xfrm>
-            <a:off x="548640" y="4206240"/>
-            <a:ext cx="3474720" cy="1234440"/>
-          </a:xfrm>
-          <a:prstGeom prst="roundRect">
-            <a:avLst/>
-          </a:prstGeom>
-          <a:solidFill>
-            <a:srgbClr val="F4F3EE"/>
-          </a:solidFill>
-          <a:ln>
-            <a:noFill/>
-          </a:ln>
-          <a:effectLst/>
-        </p:spPr>
-        <p:style>
-          <a:lnRef idx="1">
-            <a:schemeClr val="accent1"/>
-          </a:lnRef>
-          <a:fillRef idx="3">
-            <a:schemeClr val="accent1"/>
-          </a:fillRef>
-          <a:effectRef idx="2">
-            <a:schemeClr val="accent1"/>
-          </a:effectRef>
-          <a:fontRef idx="minor">
-            <a:schemeClr val="lt1"/>
-          </a:fontRef>
-        </p:style>
-        <p:txBody>
-          <a:bodyPr rtlCol="0" anchor="ctr"/>
-          <a:lstStyle/>
-          <a:p>
-            <a:pPr algn="ctr"/>
-          </a:p>
-        </p:txBody>
-      </p:sp>
-      <p:sp>
-        <p:nvSpPr>
-          <p:cNvPr id="6" name="TextBox 5"/>
-          <p:cNvSpPr txBox="1"/>
-          <p:nvPr/>
-        </p:nvSpPr>
-        <p:spPr>
-          <a:xfrm>
-            <a:off x="731520" y="4315968"/>
-            <a:ext cx="3108960" cy="548640"/>
-          </a:xfrm>
-          <a:prstGeom prst="rect">
-            <a:avLst/>
-          </a:prstGeom>
-          <a:noFill/>
-        </p:spPr>
-        <p:txBody>
-          <a:bodyPr wrap="square">
-            <a:spAutoFit/>
-          </a:bodyPr>
-          <a:lstStyle/>
-          <a:p>
-            <a:pPr algn="l">
-              <a:lnSpc>
-                <a:spcPct val="115000"/>
-              </a:lnSpc>
-            </a:pPr>
-            <a:r>
-              <a:rPr sz="3000" b="1">
-                <a:solidFill>
-                  <a:srgbClr val="EB6834"/>
-                </a:solidFill>
-                <a:latin typeface="DejaVu Sans"/>
-              </a:rPr>
-              <a:t>4x</a:t>
-            </a:r>
-          </a:p>
-        </p:txBody>
-      </p:sp>
-      <p:sp>
-        <p:nvSpPr>
-          <p:cNvPr id="7" name="TextBox 6"/>
-          <p:cNvSpPr txBox="1"/>
-          <p:nvPr/>
-        </p:nvSpPr>
-        <p:spPr>
-          <a:xfrm>
-            <a:off x="731520" y="4956048"/>
-            <a:ext cx="3108960" cy="411480"/>
-          </a:xfrm>
-          <a:prstGeom prst="rect">
-            <a:avLst/>
-          </a:prstGeom>
-          <a:noFill/>
-        </p:spPr>
-        <p:txBody>
-          <a:bodyPr wrap="square">
-            <a:spAutoFit/>
-          </a:bodyPr>
-          <a:lstStyle/>
-          <a:p>
-            <a:pPr algn="l">
-              <a:lnSpc>
-                <a:spcPct val="115000"/>
-              </a:lnSpc>
-            </a:pPr>
-            <a:r>
-              <a:rPr sz="1000" b="0">
-                <a:solidFill>
-                  <a:srgbClr val="52514E"/>
-                </a:solidFill>
-                <a:latin typeface="DejaVu Sans"/>
-              </a:rPr>
-              <a:t>one engineer call vs one gate call, in completion tokens</a:t>
-            </a:r>
-          </a:p>
-        </p:txBody>
-      </p:sp>
-      <p:sp>
-        <p:nvSpPr>
-          <p:cNvPr id="8" name="Rounded Rectangle 7"/>
-          <p:cNvSpPr/>
-          <p:nvPr/>
-        </p:nvSpPr>
-        <p:spPr>
-          <a:xfrm>
-            <a:off x="4297680" y="4206240"/>
-            <a:ext cx="3474720" cy="1234440"/>
-          </a:xfrm>
-          <a:prstGeom prst="roundRect">
-            <a:avLst/>
-          </a:prstGeom>
-          <a:solidFill>
-            <a:srgbClr val="F4F3EE"/>
-          </a:solidFill>
-          <a:ln>
-            <a:noFill/>
-          </a:ln>
-          <a:effectLst/>
-        </p:spPr>
-        <p:style>
-          <a:lnRef idx="1">
-            <a:schemeClr val="accent1"/>
-          </a:lnRef>
-          <a:fillRef idx="3">
-            <a:schemeClr val="accent1"/>
-          </a:fillRef>
-          <a:effectRef idx="2">
-            <a:schemeClr val="accent1"/>
-          </a:effectRef>
-          <a:fontRef idx="minor">
-            <a:schemeClr val="lt1"/>
-          </a:fontRef>
-        </p:style>
-        <p:txBody>
-          <a:bodyPr rtlCol="0" anchor="ctr"/>
-          <a:lstStyle/>
-          <a:p>
-            <a:pPr algn="ctr"/>
-          </a:p>
-        </p:txBody>
-      </p:sp>
-      <p:sp>
-        <p:nvSpPr>
-          <p:cNvPr id="9" name="TextBox 8"/>
-          <p:cNvSpPr txBox="1"/>
-          <p:nvPr/>
-        </p:nvSpPr>
-        <p:spPr>
-          <a:xfrm>
-            <a:off x="4480560" y="4315968"/>
-            <a:ext cx="3108960" cy="548640"/>
-          </a:xfrm>
-          <a:prstGeom prst="rect">
-            <a:avLst/>
-          </a:prstGeom>
-          <a:noFill/>
-        </p:spPr>
-        <p:txBody>
-          <a:bodyPr wrap="square">
-            <a:spAutoFit/>
-          </a:bodyPr>
-          <a:lstStyle/>
-          <a:p>
-            <a:pPr algn="l">
-              <a:lnSpc>
-                <a:spcPct val="115000"/>
-              </a:lnSpc>
-            </a:pPr>
-            <a:r>
-              <a:rPr sz="3000" b="1">
-                <a:solidFill>
-                  <a:srgbClr val="2A78D6"/>
-                </a:solidFill>
-                <a:latin typeface="DejaVu Sans"/>
-              </a:rPr>
-              <a:t>2,836</a:t>
-            </a:r>
-          </a:p>
-        </p:txBody>
-      </p:sp>
-      <p:sp>
-        <p:nvSpPr>
-          <p:cNvPr id="10" name="TextBox 9"/>
-          <p:cNvSpPr txBox="1"/>
-          <p:nvPr/>
-        </p:nvSpPr>
-        <p:spPr>
-          <a:xfrm>
-            <a:off x="4480560" y="4956048"/>
-            <a:ext cx="3108960" cy="411480"/>
-          </a:xfrm>
-          <a:prstGeom prst="rect">
-            <a:avLst/>
-          </a:prstGeom>
-          <a:noFill/>
-        </p:spPr>
-        <p:txBody>
-          <a:bodyPr wrap="square">
-            <a:spAutoFit/>
-          </a:bodyPr>
-          <a:lstStyle/>
-          <a:p>
-            <a:pPr algn="l">
-              <a:lnSpc>
-                <a:spcPct val="115000"/>
-              </a:lnSpc>
-            </a:pPr>
-            <a:r>
-              <a:rPr sz="1000" b="0">
-                <a:solidFill>
-                  <a:srgbClr val="52514E"/>
-                </a:solidFill>
-                <a:latin typeface="DejaVu Sans"/>
-              </a:rPr>
-              <a:t>gate tokens — all local, none billed</a:t>
-            </a:r>
-          </a:p>
-        </p:txBody>
-      </p:sp>
-      <p:sp>
-        <p:nvSpPr>
-          <p:cNvPr id="11" name="Rounded Rectangle 10"/>
-          <p:cNvSpPr/>
-          <p:nvPr/>
-        </p:nvSpPr>
-        <p:spPr>
-          <a:xfrm>
-            <a:off x="8046720" y="4206240"/>
-            <a:ext cx="3566160" cy="1234440"/>
-          </a:xfrm>
-          <a:prstGeom prst="roundRect">
-            <a:avLst/>
-          </a:prstGeom>
-          <a:solidFill>
-            <a:srgbClr val="F4F3EE"/>
-          </a:solidFill>
-          <a:ln>
-            <a:noFill/>
-          </a:ln>
-          <a:effectLst/>
-        </p:spPr>
-        <p:style>
-          <a:lnRef idx="1">
-            <a:schemeClr val="accent1"/>
-          </a:lnRef>
-          <a:fillRef idx="3">
-            <a:schemeClr val="accent1"/>
-          </a:fillRef>
-          <a:effectRef idx="2">
-            <a:schemeClr val="accent1"/>
-          </a:effectRef>
-          <a:fontRef idx="minor">
-            <a:schemeClr val="lt1"/>
-          </a:fontRef>
-        </p:style>
-        <p:txBody>
-          <a:bodyPr rtlCol="0" anchor="ctr"/>
-          <a:lstStyle/>
-          <a:p>
-            <a:pPr algn="ctr"/>
-          </a:p>
-        </p:txBody>
-      </p:sp>
-      <p:sp>
-        <p:nvSpPr>
-          <p:cNvPr id="12" name="TextBox 11"/>
-          <p:cNvSpPr txBox="1"/>
-          <p:nvPr/>
-        </p:nvSpPr>
-        <p:spPr>
-          <a:xfrm>
-            <a:off x="8229600" y="4315968"/>
-            <a:ext cx="3200400" cy="548640"/>
-          </a:xfrm>
-          <a:prstGeom prst="rect">
-            <a:avLst/>
-          </a:prstGeom>
-          <a:noFill/>
-        </p:spPr>
-        <p:txBody>
-          <a:bodyPr wrap="square">
-            <a:spAutoFit/>
-          </a:bodyPr>
-          <a:lstStyle/>
-          <a:p>
-            <a:pPr algn="l">
-              <a:lnSpc>
-                <a:spcPct val="115000"/>
-              </a:lnSpc>
-            </a:pPr>
-            <a:r>
-              <a:rPr sz="3000" b="1">
-                <a:solidFill>
-                  <a:srgbClr val="EB6834"/>
-                </a:solidFill>
-                <a:latin typeface="DejaVu Sans"/>
-              </a:rPr>
-              <a:t>5,568</a:t>
-            </a:r>
-          </a:p>
-        </p:txBody>
-      </p:sp>
-      <p:sp>
-        <p:nvSpPr>
-          <p:cNvPr id="13" name="TextBox 12"/>
-          <p:cNvSpPr txBox="1"/>
-          <p:nvPr/>
-        </p:nvSpPr>
-        <p:spPr>
-          <a:xfrm>
-            <a:off x="8229600" y="4956048"/>
-            <a:ext cx="3200400" cy="411480"/>
-          </a:xfrm>
-          <a:prstGeom prst="rect">
-            <a:avLst/>
-          </a:prstGeom>
-          <a:noFill/>
-        </p:spPr>
-        <p:txBody>
-          <a:bodyPr wrap="square">
-            <a:spAutoFit/>
-          </a:bodyPr>
-          <a:lstStyle/>
-          <a:p>
-            <a:pPr algn="l">
-              <a:lnSpc>
-                <a:spcPct val="115000"/>
-              </a:lnSpc>
-            </a:pPr>
-            <a:r>
-              <a:rPr sz="1000" b="0">
-                <a:solidFill>
-                  <a:srgbClr val="52514E"/>
-                </a:solidFill>
-                <a:latin typeface="DejaVu Sans"/>
-              </a:rPr>
-              <a:t>engineer reasoning tokens: billed, never seen in the output</a:t>
-            </a:r>
-          </a:p>
-        </p:txBody>
-      </p:sp>
-      <p:sp>
-        <p:nvSpPr>
-          <p:cNvPr id="14" name="TextBox 13"/>
-          <p:cNvSpPr txBox="1"/>
-          <p:nvPr/>
-        </p:nvSpPr>
-        <p:spPr>
-          <a:xfrm>
-            <a:off x="548640" y="5760720"/>
-            <a:ext cx="11064240" cy="822960"/>
-          </a:xfrm>
-          <a:prstGeom prst="rect">
-            <a:avLst/>
-          </a:prstGeom>
-          <a:noFill/>
-        </p:spPr>
-        <p:txBody>
-          <a:bodyPr wrap="square">
-            <a:spAutoFit/>
-          </a:bodyPr>
-          <a:lstStyle/>
-          <a:p>
-            <a:pPr algn="l">
-              <a:lnSpc>
-                <a:spcPct val="115000"/>
-              </a:lnSpc>
-            </a:pPr>
-            <a:r>
-              <a:rPr sz="1300" b="0">
-                <a:solidFill>
-                  <a:srgbClr val="52514E"/>
-                </a:solidFill>
-                <a:latin typeface="DejaVu Sans"/>
-              </a:rPr>
-              <a:t>What Gate 1 changes on the bill is rewrites: each rejection buys another engineer call. A rejection that names the real fault is a rewrite the agent does not waste — which is why the shadowed-contract check was worth adding.</a:t>
             </a:r>
           </a:p>
         </p:txBody>

--- a/reports/GATE1_DECK.pptx
+++ b/reports/GATE1_DECK.pptx
@@ -5787,7 +5787,7 @@
         </p:nvGraphicFramePr>
         <p:xfrm>
           <a:off x="548640" y="1600200"/>
-          <a:ext cx="11064240" cy="1371600"/>
+          <a:ext cx="11064240" cy="1828800"/>
         </p:xfrm>
         <a:graphic>
           <a:graphicData uri="http://schemas.openxmlformats.org/drawingml/2006/table">
@@ -5796,10 +5796,10 @@
                 <a:tableStyleId>{5C22544A-7EE6-4342-B048-85BDC9FD1C3A}</a:tableStyleId>
               </a:tblPr>
               <a:tblGrid>
-                <a:gridCol w="3291840"/>
-                <a:gridCol w="2743200"/>
-                <a:gridCol w="2743200"/>
-                <a:gridCol w="2286000"/>
+                <a:gridCol w="4206240"/>
+                <a:gridCol w="2377440"/>
+                <a:gridCol w="2468880"/>
+                <a:gridCol w="2011680"/>
               </a:tblGrid>
               <a:tr h="457200">
                 <a:tc>
@@ -5808,7 +5808,7 @@
                     <a:lstStyle/>
                     <a:p>
                       <a:pPr>
-                        <a:defRPr sz="1300" b="1">
+                        <a:defRPr sz="1200" b="1">
                           <a:solidFill>
                             <a:srgbClr val="0B0B0B"/>
                           </a:solidFill>
@@ -5832,7 +5832,7 @@
                     <a:lstStyle/>
                     <a:p>
                       <a:pPr>
-                        <a:defRPr sz="1300" b="1">
+                        <a:defRPr sz="1200" b="1">
                           <a:solidFill>
                             <a:srgbClr val="0B0B0B"/>
                           </a:solidFill>
@@ -5856,7 +5856,7 @@
                     <a:lstStyle/>
                     <a:p>
                       <a:pPr>
-                        <a:defRPr sz="1300" b="1">
+                        <a:defRPr sz="1200" b="1">
                           <a:solidFill>
                             <a:srgbClr val="0B0B0B"/>
                           </a:solidFill>
@@ -5880,7 +5880,7 @@
                     <a:lstStyle/>
                     <a:p>
                       <a:pPr>
-                        <a:defRPr sz="1300" b="1">
+                        <a:defRPr sz="1200" b="1">
                           <a:solidFill>
                             <a:srgbClr val="0B0B0B"/>
                           </a:solidFill>
@@ -5906,7 +5906,105 @@
                     <a:lstStyle/>
                     <a:p>
                       <a:pPr>
-                        <a:defRPr sz="1300" b="0">
+                        <a:defRPr sz="1200" b="0">
+                          <a:solidFill>
+                            <a:srgbClr val="52514E"/>
+                          </a:solidFill>
+                          <a:latin typeface="DejaVu Sans"/>
+                        </a:defRPr>
+                      </a:pPr>
+                      <a:r>
+                        <a:t>with Gate 1</a:t>
+                      </a:r>
+                    </a:p>
+                  </a:txBody>
+                  <a:tcPr>
+                    <a:solidFill>
+                      <a:srgbClr val="FCFCFB"/>
+                    </a:solidFill>
+                  </a:tcPr>
+                </a:tc>
+                <a:tc>
+                  <a:txBody>
+                    <a:bodyPr/>
+                    <a:lstStyle/>
+                    <a:p>
+                      <a:pPr>
+                        <a:defRPr sz="1200" b="0">
+                          <a:solidFill>
+                            <a:srgbClr val="52514E"/>
+                          </a:solidFill>
+                          <a:latin typeface="DejaVu Sans"/>
+                        </a:defRPr>
+                      </a:pPr>
+                      <a:r>
+                        <a:t>paper not found</a:t>
+                      </a:r>
+                    </a:p>
+                  </a:txBody>
+                  <a:tcPr>
+                    <a:solidFill>
+                      <a:srgbClr val="FCFCFB"/>
+                    </a:solidFill>
+                  </a:tcPr>
+                </a:tc>
+                <a:tc>
+                  <a:txBody>
+                    <a:bodyPr/>
+                    <a:lstStyle/>
+                    <a:p>
+                      <a:pPr>
+                        <a:defRPr sz="1200" b="0">
+                          <a:solidFill>
+                            <a:srgbClr val="52514E"/>
+                          </a:solidFill>
+                          <a:latin typeface="DejaVu Sans"/>
+                        </a:defRPr>
+                      </a:pPr>
+                      <a:r>
+                        <a:t>—</a:t>
+                      </a:r>
+                    </a:p>
+                  </a:txBody>
+                  <a:tcPr>
+                    <a:solidFill>
+                      <a:srgbClr val="FCFCFB"/>
+                    </a:solidFill>
+                  </a:tcPr>
+                </a:tc>
+                <a:tc>
+                  <a:txBody>
+                    <a:bodyPr/>
+                    <a:lstStyle/>
+                    <a:p>
+                      <a:pPr>
+                        <a:defRPr sz="1200" b="0">
+                          <a:solidFill>
+                            <a:srgbClr val="52514E"/>
+                          </a:solidFill>
+                          <a:latin typeface="DejaVu Sans"/>
+                        </a:defRPr>
+                      </a:pPr>
+                      <a:r>
+                        <a:t>—</a:t>
+                      </a:r>
+                    </a:p>
+                  </a:txBody>
+                  <a:tcPr>
+                    <a:solidFill>
+                      <a:srgbClr val="FCFCFB"/>
+                    </a:solidFill>
+                  </a:tcPr>
+                </a:tc>
+              </a:tr>
+              <a:tr h="457200">
+                <a:tc>
+                  <a:txBody>
+                    <a:bodyPr/>
+                    <a:lstStyle/>
+                    <a:p>
+                      <a:pPr>
+                        <a:defRPr sz="1200" b="0">
                           <a:solidFill>
                             <a:srgbClr val="52514E"/>
                           </a:solidFill>
@@ -5930,7 +6028,105 @@
                     <a:lstStyle/>
                     <a:p>
                       <a:pPr>
-                        <a:defRPr sz="1300" b="0">
+                        <a:defRPr sz="1200" b="0">
+                          <a:solidFill>
+                            <a:srgbClr val="52514E"/>
+                          </a:solidFill>
+                          <a:latin typeface="DejaVu Sans"/>
+                        </a:defRPr>
+                      </a:pPr>
+                      <a:r>
+                        <a:t>paper not found</a:t>
+                      </a:r>
+                    </a:p>
+                  </a:txBody>
+                  <a:tcPr>
+                    <a:solidFill>
+                      <a:srgbClr val="FCFCFB"/>
+                    </a:solidFill>
+                  </a:tcPr>
+                </a:tc>
+                <a:tc>
+                  <a:txBody>
+                    <a:bodyPr/>
+                    <a:lstStyle/>
+                    <a:p>
+                      <a:pPr>
+                        <a:defRPr sz="1200" b="0">
+                          <a:solidFill>
+                            <a:srgbClr val="52514E"/>
+                          </a:solidFill>
+                          <a:latin typeface="DejaVu Sans"/>
+                        </a:defRPr>
+                      </a:pPr>
+                      <a:r>
+                        <a:t>—</a:t>
+                      </a:r>
+                    </a:p>
+                  </a:txBody>
+                  <a:tcPr>
+                    <a:solidFill>
+                      <a:srgbClr val="FCFCFB"/>
+                    </a:solidFill>
+                  </a:tcPr>
+                </a:tc>
+                <a:tc>
+                  <a:txBody>
+                    <a:bodyPr/>
+                    <a:lstStyle/>
+                    <a:p>
+                      <a:pPr>
+                        <a:defRPr sz="1200" b="0">
+                          <a:solidFill>
+                            <a:srgbClr val="52514E"/>
+                          </a:solidFill>
+                          <a:latin typeface="DejaVu Sans"/>
+                        </a:defRPr>
+                      </a:pPr>
+                      <a:r>
+                        <a:t>—</a:t>
+                      </a:r>
+                    </a:p>
+                  </a:txBody>
+                  <a:tcPr>
+                    <a:solidFill>
+                      <a:srgbClr val="FCFCFB"/>
+                    </a:solidFill>
+                  </a:tcPr>
+                </a:tc>
+              </a:tr>
+              <a:tr h="457200">
+                <a:tc>
+                  <a:txBody>
+                    <a:bodyPr/>
+                    <a:lstStyle/>
+                    <a:p>
+                      <a:pPr>
+                        <a:defRPr sz="1200" b="0">
+                          <a:solidFill>
+                            <a:srgbClr val="52514E"/>
+                          </a:solidFill>
+                          <a:latin typeface="DejaVu Sans"/>
+                        </a:defRPr>
+                      </a:pPr>
+                      <a:r>
+                        <a:t>archived run (different topic, no gate)</a:t>
+                      </a:r>
+                    </a:p>
+                  </a:txBody>
+                  <a:tcPr>
+                    <a:solidFill>
+                      <a:srgbClr val="FCFCFB"/>
+                    </a:solidFill>
+                  </a:tcPr>
+                </a:tc>
+                <a:tc>
+                  <a:txBody>
+                    <a:bodyPr/>
+                    <a:lstStyle/>
+                    <a:p>
+                      <a:pPr>
+                        <a:defRPr sz="1200" b="0">
                           <a:solidFill>
                             <a:srgbClr val="52514E"/>
                           </a:solidFill>
@@ -5954,7 +6150,7 @@
                     <a:lstStyle/>
                     <a:p>
                       <a:pPr>
-                        <a:defRPr sz="1300" b="0">
+                        <a:defRPr sz="1200" b="0">
                           <a:solidFill>
                             <a:srgbClr val="52514E"/>
                           </a:solidFill>
@@ -5978,7 +6174,7 @@
                     <a:lstStyle/>
                     <a:p>
                       <a:pPr>
-                        <a:defRPr sz="1300" b="0">
+                        <a:defRPr sz="1200" b="0">
                           <a:solidFill>
                             <a:srgbClr val="52514E"/>
                           </a:solidFill>
@@ -5997,104 +6193,6 @@
                   </a:tcPr>
                 </a:tc>
               </a:tr>
-              <a:tr h="457200">
-                <a:tc>
-                  <a:txBody>
-                    <a:bodyPr/>
-                    <a:lstStyle/>
-                    <a:p>
-                      <a:pPr>
-                        <a:defRPr sz="1300" b="0">
-                          <a:solidFill>
-                            <a:srgbClr val="52514E"/>
-                          </a:solidFill>
-                          <a:latin typeface="DejaVu Sans"/>
-                        </a:defRPr>
-                      </a:pPr>
-                      <a:r>
-                        <a:t>with Gate 1</a:t>
-                      </a:r>
-                    </a:p>
-                  </a:txBody>
-                  <a:tcPr>
-                    <a:solidFill>
-                      <a:srgbClr val="FCFCFB"/>
-                    </a:solidFill>
-                  </a:tcPr>
-                </a:tc>
-                <a:tc>
-                  <a:txBody>
-                    <a:bodyPr/>
-                    <a:lstStyle/>
-                    <a:p>
-                      <a:pPr>
-                        <a:defRPr sz="1300" b="0">
-                          <a:solidFill>
-                            <a:srgbClr val="52514E"/>
-                          </a:solidFill>
-                          <a:latin typeface="DejaVu Sans"/>
-                        </a:defRPr>
-                      </a:pPr>
-                      <a:r>
-                        <a:t>paper not found</a:t>
-                      </a:r>
-                    </a:p>
-                  </a:txBody>
-                  <a:tcPr>
-                    <a:solidFill>
-                      <a:srgbClr val="FCFCFB"/>
-                    </a:solidFill>
-                  </a:tcPr>
-                </a:tc>
-                <a:tc>
-                  <a:txBody>
-                    <a:bodyPr/>
-                    <a:lstStyle/>
-                    <a:p>
-                      <a:pPr>
-                        <a:defRPr sz="1300" b="0">
-                          <a:solidFill>
-                            <a:srgbClr val="52514E"/>
-                          </a:solidFill>
-                          <a:latin typeface="DejaVu Sans"/>
-                        </a:defRPr>
-                      </a:pPr>
-                      <a:r>
-                        <a:t>—</a:t>
-                      </a:r>
-                    </a:p>
-                  </a:txBody>
-                  <a:tcPr>
-                    <a:solidFill>
-                      <a:srgbClr val="FCFCFB"/>
-                    </a:solidFill>
-                  </a:tcPr>
-                </a:tc>
-                <a:tc>
-                  <a:txBody>
-                    <a:bodyPr/>
-                    <a:lstStyle/>
-                    <a:p>
-                      <a:pPr>
-                        <a:defRPr sz="1300" b="0">
-                          <a:solidFill>
-                            <a:srgbClr val="52514E"/>
-                          </a:solidFill>
-                          <a:latin typeface="DejaVu Sans"/>
-                        </a:defRPr>
-                      </a:pPr>
-                      <a:r>
-                        <a:t>—</a:t>
-                      </a:r>
-                    </a:p>
-                  </a:txBody>
-                  <a:tcPr>
-                    <a:solidFill>
-                      <a:srgbClr val="FCFCFB"/>
-                    </a:solidFill>
-                  </a:tcPr>
-                </a:tc>
-              </a:tr>
             </a:tbl>
           </a:graphicData>
         </a:graphic>
@@ -6107,8 +6205,8 @@
         </p:nvSpPr>
         <p:spPr>
           <a:xfrm>
-            <a:off x="548640" y="3840480"/>
-            <a:ext cx="11064240" cy="2194560"/>
+            <a:off x="548640" y="3703320"/>
+            <a:ext cx="11064240" cy="2377440"/>
           </a:xfrm>
           <a:prstGeom prst="rect">
             <a:avLst/>
@@ -6127,13 +6225,13 @@
               </a:lnSpc>
             </a:pPr>
             <a:r>
-              <a:rPr sz="1500" b="1">
+              <a:rPr sz="1300" b="1">
                 <a:solidFill>
                   <a:srgbClr val="0B0B0B"/>
                 </a:solidFill>
                 <a:latin typeface="DejaVu Sans"/>
               </a:rPr>
-              <a:t>The archived paper reads well. That is the problem.</a:t>
+              <a:t>The first two rows are the ablation: same question, same model, same prompts — the gate is the only difference.</a:t>
             </a:r>
           </a:p>
           <a:p>
@@ -6143,13 +6241,13 @@
               </a:lnSpc>
             </a:pPr>
             <a:r>
-              <a:rPr sz="1300" b="0">
+              <a:rPr sz="1200" b="0">
                 <a:solidFill>
                   <a:srgbClr val="52514E"/>
                 </a:solidFill>
                 <a:latin typeface="DejaVu Sans"/>
               </a:rPr>
-              <a:t>It states 65 numeric findings and sources none of them: 81.60% test accuracy, a 13.61x speedup, a 39.20% collapse. Its saved code calls record_result zero times and contains none of those numbers. The run behind it raised NameError on every attempt and scored 1.0.</a:t>
+              <a:t>The third is the archived Agent Laboratory run on its own topic. One controlled pair shows what the gate changes; an independent instance shows the failure was not manufactured for the occasion.</a:t>
             </a:r>
           </a:p>
           <a:p>
@@ -6159,13 +6257,45 @@
               </a:lnSpc>
             </a:pPr>
             <a:r>
-              <a:rPr sz="1300" b="0">
-                <a:solidFill>
-                  <a:srgbClr val="EB6834"/>
+              <a:rPr sz="800" b="0">
+                <a:solidFill>
+                  <a:srgbClr val="52514E"/>
                 </a:solidFill>
                 <a:latin typeface="DejaVu Sans"/>
               </a:rPr>
-              <a:t>Nothing in the pipeline could tell the difference between a measurement and a sentence. That is what a validity layer is for.</a:t>
+              <a:t/>
+            </a:r>
+          </a:p>
+          <a:p>
+            <a:pPr algn="l">
+              <a:lnSpc>
+                <a:spcPct val="115000"/>
+              </a:lnSpc>
+            </a:pPr>
+            <a:r>
+              <a:rPr sz="1200" b="0">
+                <a:solidFill>
+                  <a:srgbClr val="52514E"/>
+                </a:solidFill>
+                <a:latin typeface="DejaVu Sans"/>
+              </a:rPr>
+              <a:t>That archived paper states 65 numeric findings and sources none of them: 81.60% test accuracy, a 13.61x speedup, a 39.20% collapse. Its saved code calls record_result zero times and contains none of those numbers. The run behind it raised NameError on every attempt and scored 1.0.</a:t>
+            </a:r>
+          </a:p>
+          <a:p>
+            <a:pPr algn="l">
+              <a:lnSpc>
+                <a:spcPct val="115000"/>
+              </a:lnSpc>
+            </a:pPr>
+            <a:r>
+              <a:rPr sz="1300" b="1">
+                <a:solidFill>
+                  <a:srgbClr val="EB6834"/>
+                </a:solidFill>
+                <a:latin typeface="DejaVu Sans"/>
+              </a:rPr>
+              <a:t>Nothing in the pipeline could tell the difference between a measurement and a sentence.</a:t>
             </a:r>
           </a:p>
         </p:txBody>
@@ -6614,7 +6744,7 @@
         </p:nvGraphicFramePr>
         <p:xfrm>
           <a:off x="548640" y="1554480"/>
-          <a:ext cx="11064240" cy="2414016"/>
+          <a:ext cx="11064240" cy="2816352"/>
         </p:xfrm>
         <a:graphic>
           <a:graphicData uri="http://schemas.openxmlformats.org/drawingml/2006/table">
@@ -7216,6 +7346,104 @@
                   </a:tcPr>
                 </a:tc>
               </a:tr>
+              <a:tr h="402336">
+                <a:tc>
+                  <a:txBody>
+                    <a:bodyPr/>
+                    <a:lstStyle/>
+                    <a:p>
+                      <a:pPr>
+                        <a:defRPr sz="1200" b="0">
+                          <a:solidFill>
+                            <a:srgbClr val="52514E"/>
+                          </a:solidFill>
+                          <a:latin typeface="DejaVu Sans"/>
+                        </a:defRPr>
+                      </a:pPr>
+                      <a:r>
+                        <a:t>attempt 07</a:t>
+                      </a:r>
+                    </a:p>
+                  </a:txBody>
+                  <a:tcPr>
+                    <a:solidFill>
+                      <a:srgbClr val="FCFCFB"/>
+                    </a:solidFill>
+                  </a:tcPr>
+                </a:tc>
+                <a:tc>
+                  <a:txBody>
+                    <a:bodyPr/>
+                    <a:lstStyle/>
+                    <a:p>
+                      <a:pPr>
+                        <a:defRPr sz="1200" b="0">
+                          <a:solidFill>
+                            <a:srgbClr val="52514E"/>
+                          </a:solidFill>
+                          <a:latin typeface="DejaVu Sans"/>
+                        </a:defRPr>
+                      </a:pPr>
+                      <a:r>
+                        <a:t>PASS</a:t>
+                      </a:r>
+                    </a:p>
+                  </a:txBody>
+                  <a:tcPr>
+                    <a:solidFill>
+                      <a:srgbClr val="FCFCFB"/>
+                    </a:solidFill>
+                  </a:tcPr>
+                </a:tc>
+                <a:tc>
+                  <a:txBody>
+                    <a:bodyPr/>
+                    <a:lstStyle/>
+                    <a:p>
+                      <a:pPr>
+                        <a:defRPr sz="1200" b="0">
+                          <a:solidFill>
+                            <a:srgbClr val="52514E"/>
+                          </a:solidFill>
+                          <a:latin typeface="DejaVu Sans"/>
+                        </a:defRPr>
+                      </a:pPr>
+                      <a:r>
+                        <a:t>12</a:t>
+                      </a:r>
+                    </a:p>
+                  </a:txBody>
+                  <a:tcPr>
+                    <a:solidFill>
+                      <a:srgbClr val="FCFCFB"/>
+                    </a:solidFill>
+                  </a:tcPr>
+                </a:tc>
+                <a:tc>
+                  <a:txBody>
+                    <a:bodyPr/>
+                    <a:lstStyle/>
+                    <a:p>
+                      <a:pPr>
+                        <a:defRPr sz="1200" b="0">
+                          <a:solidFill>
+                            <a:srgbClr val="52514E"/>
+                          </a:solidFill>
+                          <a:latin typeface="DejaVu Sans"/>
+                        </a:defRPr>
+                      </a:pPr>
+                      <a:r>
+                        <a:t>—</a:t>
+                      </a:r>
+                    </a:p>
+                  </a:txBody>
+                  <a:tcPr>
+                    <a:solidFill>
+                      <a:srgbClr val="FCFCFB"/>
+                    </a:solidFill>
+                  </a:tcPr>
+                </a:tc>
+              </a:tr>
             </a:tbl>
           </a:graphicData>
         </a:graphic>
@@ -7228,7 +7456,7 @@
         </p:nvSpPr>
         <p:spPr>
           <a:xfrm>
-            <a:off x="548640" y="4334256"/>
+            <a:off x="548640" y="4736592"/>
             <a:ext cx="11064240" cy="1828800"/>
           </a:xfrm>
           <a:prstGeom prst="rect">

--- a/reports/GATE1_DECK.pptx
+++ b/reports/GATE1_DECK.pptx
@@ -5772,441 +5772,89 @@
                 </a:solidFill>
                 <a:latin typeface="DejaVu Sans"/>
               </a:rPr>
-              <a:t>Of the numbers a paper states, how many are sourced</a:t>
-            </a:r>
-          </a:p>
-        </p:txBody>
-      </p:sp>
-      <p:graphicFrame>
-        <p:nvGraphicFramePr>
-          <p:cNvPr id="4" name="Table 3"/>
-          <p:cNvGraphicFramePr>
-            <a:graphicFrameLocks noGrp="1"/>
-          </p:cNvGraphicFramePr>
+              <a:t>Three full workflows, audited on identical criteria</a:t>
+            </a:r>
+          </a:p>
+        </p:txBody>
+      </p:sp>
+      <p:pic>
+        <p:nvPicPr>
+          <p:cNvPr id="4" name="Picture 3" descr="papers.png"/>
+          <p:cNvPicPr>
+            <a:picLocks noChangeAspect="1"/>
+          </p:cNvPicPr>
           <p:nvPr/>
-        </p:nvGraphicFramePr>
-        <p:xfrm>
-          <a:off x="548640" y="1600200"/>
-          <a:ext cx="11064240" cy="1828800"/>
-        </p:xfrm>
-        <a:graphic>
-          <a:graphicData uri="http://schemas.openxmlformats.org/drawingml/2006/table">
-            <a:tbl>
-              <a:tblPr firstRow="1" bandRow="1">
-                <a:tableStyleId>{5C22544A-7EE6-4342-B048-85BDC9FD1C3A}</a:tableStyleId>
-              </a:tblPr>
-              <a:tblGrid>
-                <a:gridCol w="4206240"/>
-                <a:gridCol w="2377440"/>
-                <a:gridCol w="2468880"/>
-                <a:gridCol w="2011680"/>
-              </a:tblGrid>
-              <a:tr h="457200">
-                <a:tc>
-                  <a:txBody>
-                    <a:bodyPr/>
-                    <a:lstStyle/>
-                    <a:p>
-                      <a:pPr>
-                        <a:defRPr sz="1200" b="1">
-                          <a:solidFill>
-                            <a:srgbClr val="0B0B0B"/>
-                          </a:solidFill>
-                          <a:latin typeface="DejaVu Sans"/>
-                        </a:defRPr>
-                      </a:pPr>
-                      <a:r>
-                        <a:t>paper</a:t>
-                      </a:r>
-                    </a:p>
-                  </a:txBody>
-                  <a:tcPr>
-                    <a:solidFill>
-                      <a:srgbClr val="F4F3EE"/>
-                    </a:solidFill>
-                  </a:tcPr>
-                </a:tc>
-                <a:tc>
-                  <a:txBody>
-                    <a:bodyPr/>
-                    <a:lstStyle/>
-                    <a:p>
-                      <a:pPr>
-                        <a:defRPr sz="1200" b="1">
-                          <a:solidFill>
-                            <a:srgbClr val="0B0B0B"/>
-                          </a:solidFill>
-                          <a:latin typeface="DejaVu Sans"/>
-                        </a:defRPr>
-                      </a:pPr>
-                      <a:r>
-                        <a:t>numeric claims</a:t>
-                      </a:r>
-                    </a:p>
-                  </a:txBody>
-                  <a:tcPr>
-                    <a:solidFill>
-                      <a:srgbClr val="F4F3EE"/>
-                    </a:solidFill>
-                  </a:tcPr>
-                </a:tc>
-                <a:tc>
-                  <a:txBody>
-                    <a:bodyPr/>
-                    <a:lstStyle/>
-                    <a:p>
-                      <a:pPr>
-                        <a:defRPr sz="1200" b="1">
-                          <a:solidFill>
-                            <a:srgbClr val="0B0B0B"/>
-                          </a:solidFill>
-                          <a:latin typeface="DejaVu Sans"/>
-                        </a:defRPr>
-                      </a:pPr>
-                      <a:r>
-                        <a:t>sourced to a result</a:t>
-                      </a:r>
-                    </a:p>
-                  </a:txBody>
-                  <a:tcPr>
-                    <a:solidFill>
-                      <a:srgbClr val="F4F3EE"/>
-                    </a:solidFill>
-                  </a:tcPr>
-                </a:tc>
-                <a:tc>
-                  <a:txBody>
-                    <a:bodyPr/>
-                    <a:lstStyle/>
-                    <a:p>
-                      <a:pPr>
-                        <a:defRPr sz="1200" b="1">
-                          <a:solidFill>
-                            <a:srgbClr val="0B0B0B"/>
-                          </a:solidFill>
-                          <a:latin typeface="DejaVu Sans"/>
-                        </a:defRPr>
-                      </a:pPr>
-                      <a:r>
-                        <a:t>record_result calls</a:t>
-                      </a:r>
-                    </a:p>
-                  </a:txBody>
-                  <a:tcPr>
-                    <a:solidFill>
-                      <a:srgbClr val="F4F3EE"/>
-                    </a:solidFill>
-                  </a:tcPr>
-                </a:tc>
-              </a:tr>
-              <a:tr h="457200">
-                <a:tc>
-                  <a:txBody>
-                    <a:bodyPr/>
-                    <a:lstStyle/>
-                    <a:p>
-                      <a:pPr>
-                        <a:defRPr sz="1200" b="0">
-                          <a:solidFill>
-                            <a:srgbClr val="52514E"/>
-                          </a:solidFill>
-                          <a:latin typeface="DejaVu Sans"/>
-                        </a:defRPr>
-                      </a:pPr>
-                      <a:r>
-                        <a:t>with Gate 1</a:t>
-                      </a:r>
-                    </a:p>
-                  </a:txBody>
-                  <a:tcPr>
-                    <a:solidFill>
-                      <a:srgbClr val="FCFCFB"/>
-                    </a:solidFill>
-                  </a:tcPr>
-                </a:tc>
-                <a:tc>
-                  <a:txBody>
-                    <a:bodyPr/>
-                    <a:lstStyle/>
-                    <a:p>
-                      <a:pPr>
-                        <a:defRPr sz="1200" b="0">
-                          <a:solidFill>
-                            <a:srgbClr val="52514E"/>
-                          </a:solidFill>
-                          <a:latin typeface="DejaVu Sans"/>
-                        </a:defRPr>
-                      </a:pPr>
-                      <a:r>
-                        <a:t>paper not found</a:t>
-                      </a:r>
-                    </a:p>
-                  </a:txBody>
-                  <a:tcPr>
-                    <a:solidFill>
-                      <a:srgbClr val="FCFCFB"/>
-                    </a:solidFill>
-                  </a:tcPr>
-                </a:tc>
-                <a:tc>
-                  <a:txBody>
-                    <a:bodyPr/>
-                    <a:lstStyle/>
-                    <a:p>
-                      <a:pPr>
-                        <a:defRPr sz="1200" b="0">
-                          <a:solidFill>
-                            <a:srgbClr val="52514E"/>
-                          </a:solidFill>
-                          <a:latin typeface="DejaVu Sans"/>
-                        </a:defRPr>
-                      </a:pPr>
-                      <a:r>
-                        <a:t>—</a:t>
-                      </a:r>
-                    </a:p>
-                  </a:txBody>
-                  <a:tcPr>
-                    <a:solidFill>
-                      <a:srgbClr val="FCFCFB"/>
-                    </a:solidFill>
-                  </a:tcPr>
-                </a:tc>
-                <a:tc>
-                  <a:txBody>
-                    <a:bodyPr/>
-                    <a:lstStyle/>
-                    <a:p>
-                      <a:pPr>
-                        <a:defRPr sz="1200" b="0">
-                          <a:solidFill>
-                            <a:srgbClr val="52514E"/>
-                          </a:solidFill>
-                          <a:latin typeface="DejaVu Sans"/>
-                        </a:defRPr>
-                      </a:pPr>
-                      <a:r>
-                        <a:t>—</a:t>
-                      </a:r>
-                    </a:p>
-                  </a:txBody>
-                  <a:tcPr>
-                    <a:solidFill>
-                      <a:srgbClr val="FCFCFB"/>
-                    </a:solidFill>
-                  </a:tcPr>
-                </a:tc>
-              </a:tr>
-              <a:tr h="457200">
-                <a:tc>
-                  <a:txBody>
-                    <a:bodyPr/>
-                    <a:lstStyle/>
-                    <a:p>
-                      <a:pPr>
-                        <a:defRPr sz="1200" b="0">
-                          <a:solidFill>
-                            <a:srgbClr val="52514E"/>
-                          </a:solidFill>
-                          <a:latin typeface="DejaVu Sans"/>
-                        </a:defRPr>
-                      </a:pPr>
-                      <a:r>
-                        <a:t>without Gate 1</a:t>
-                      </a:r>
-                    </a:p>
-                  </a:txBody>
-                  <a:tcPr>
-                    <a:solidFill>
-                      <a:srgbClr val="FCFCFB"/>
-                    </a:solidFill>
-                  </a:tcPr>
-                </a:tc>
-                <a:tc>
-                  <a:txBody>
-                    <a:bodyPr/>
-                    <a:lstStyle/>
-                    <a:p>
-                      <a:pPr>
-                        <a:defRPr sz="1200" b="0">
-                          <a:solidFill>
-                            <a:srgbClr val="52514E"/>
-                          </a:solidFill>
-                          <a:latin typeface="DejaVu Sans"/>
-                        </a:defRPr>
-                      </a:pPr>
-                      <a:r>
-                        <a:t>paper not found</a:t>
-                      </a:r>
-                    </a:p>
-                  </a:txBody>
-                  <a:tcPr>
-                    <a:solidFill>
-                      <a:srgbClr val="FCFCFB"/>
-                    </a:solidFill>
-                  </a:tcPr>
-                </a:tc>
-                <a:tc>
-                  <a:txBody>
-                    <a:bodyPr/>
-                    <a:lstStyle/>
-                    <a:p>
-                      <a:pPr>
-                        <a:defRPr sz="1200" b="0">
-                          <a:solidFill>
-                            <a:srgbClr val="52514E"/>
-                          </a:solidFill>
-                          <a:latin typeface="DejaVu Sans"/>
-                        </a:defRPr>
-                      </a:pPr>
-                      <a:r>
-                        <a:t>—</a:t>
-                      </a:r>
-                    </a:p>
-                  </a:txBody>
-                  <a:tcPr>
-                    <a:solidFill>
-                      <a:srgbClr val="FCFCFB"/>
-                    </a:solidFill>
-                  </a:tcPr>
-                </a:tc>
-                <a:tc>
-                  <a:txBody>
-                    <a:bodyPr/>
-                    <a:lstStyle/>
-                    <a:p>
-                      <a:pPr>
-                        <a:defRPr sz="1200" b="0">
-                          <a:solidFill>
-                            <a:srgbClr val="52514E"/>
-                          </a:solidFill>
-                          <a:latin typeface="DejaVu Sans"/>
-                        </a:defRPr>
-                      </a:pPr>
-                      <a:r>
-                        <a:t>—</a:t>
-                      </a:r>
-                    </a:p>
-                  </a:txBody>
-                  <a:tcPr>
-                    <a:solidFill>
-                      <a:srgbClr val="FCFCFB"/>
-                    </a:solidFill>
-                  </a:tcPr>
-                </a:tc>
-              </a:tr>
-              <a:tr h="457200">
-                <a:tc>
-                  <a:txBody>
-                    <a:bodyPr/>
-                    <a:lstStyle/>
-                    <a:p>
-                      <a:pPr>
-                        <a:defRPr sz="1200" b="0">
-                          <a:solidFill>
-                            <a:srgbClr val="52514E"/>
-                          </a:solidFill>
-                          <a:latin typeface="DejaVu Sans"/>
-                        </a:defRPr>
-                      </a:pPr>
-                      <a:r>
-                        <a:t>archived run (different topic, no gate)</a:t>
-                      </a:r>
-                    </a:p>
-                  </a:txBody>
-                  <a:tcPr>
-                    <a:solidFill>
-                      <a:srgbClr val="FCFCFB"/>
-                    </a:solidFill>
-                  </a:tcPr>
-                </a:tc>
-                <a:tc>
-                  <a:txBody>
-                    <a:bodyPr/>
-                    <a:lstStyle/>
-                    <a:p>
-                      <a:pPr>
-                        <a:defRPr sz="1200" b="0">
-                          <a:solidFill>
-                            <a:srgbClr val="52514E"/>
-                          </a:solidFill>
-                          <a:latin typeface="DejaVu Sans"/>
-                        </a:defRPr>
-                      </a:pPr>
-                      <a:r>
-                        <a:t>65</a:t>
-                      </a:r>
-                    </a:p>
-                  </a:txBody>
-                  <a:tcPr>
-                    <a:solidFill>
-                      <a:srgbClr val="FCFCFB"/>
-                    </a:solidFill>
-                  </a:tcPr>
-                </a:tc>
-                <a:tc>
-                  <a:txBody>
-                    <a:bodyPr/>
-                    <a:lstStyle/>
-                    <a:p>
-                      <a:pPr>
-                        <a:defRPr sz="1200" b="0">
-                          <a:solidFill>
-                            <a:srgbClr val="52514E"/>
-                          </a:solidFill>
-                          <a:latin typeface="DejaVu Sans"/>
-                        </a:defRPr>
-                      </a:pPr>
-                      <a:r>
-                        <a:t>0  (0%)</a:t>
-                      </a:r>
-                    </a:p>
-                  </a:txBody>
-                  <a:tcPr>
-                    <a:solidFill>
-                      <a:srgbClr val="FCFCFB"/>
-                    </a:solidFill>
-                  </a:tcPr>
-                </a:tc>
-                <a:tc>
-                  <a:txBody>
-                    <a:bodyPr/>
-                    <a:lstStyle/>
-                    <a:p>
-                      <a:pPr>
-                        <a:defRPr sz="1200" b="0">
-                          <a:solidFill>
-                            <a:srgbClr val="52514E"/>
-                          </a:solidFill>
-                          <a:latin typeface="DejaVu Sans"/>
-                        </a:defRPr>
-                      </a:pPr>
-                      <a:r>
-                        <a:t>0</a:t>
-                      </a:r>
-                    </a:p>
-                  </a:txBody>
-                  <a:tcPr>
-                    <a:solidFill>
-                      <a:srgbClr val="FCFCFB"/>
-                    </a:solidFill>
-                  </a:tcPr>
-                </a:tc>
-              </a:tr>
-            </a:tbl>
-          </a:graphicData>
-        </a:graphic>
-      </p:graphicFrame>
-      <p:sp>
-        <p:nvSpPr>
-          <p:cNvPr id="5" name="TextBox 4"/>
+        </p:nvPicPr>
+        <p:blipFill>
+          <a:blip r:embed="rId2"/>
+          <a:stretch>
+            <a:fillRect/>
+          </a:stretch>
+        </p:blipFill>
+        <p:spPr>
+          <a:xfrm>
+            <a:off x="548640" y="1371600"/>
+            <a:ext cx="6858000" cy="3814533"/>
+          </a:xfrm>
+          <a:prstGeom prst="rect">
+            <a:avLst/>
+          </a:prstGeom>
+        </p:spPr>
+      </p:pic>
+      <p:sp>
+        <p:nvSpPr>
+          <p:cNvPr id="5" name="Rounded Rectangle 4"/>
+          <p:cNvSpPr/>
+          <p:nvPr/>
+        </p:nvSpPr>
+        <p:spPr>
+          <a:xfrm>
+            <a:off x="7680960" y="1371600"/>
+            <a:ext cx="3931920" cy="4480560"/>
+          </a:xfrm>
+          <a:prstGeom prst="roundRect">
+            <a:avLst/>
+          </a:prstGeom>
+          <a:solidFill>
+            <a:srgbClr val="F4F3EE"/>
+          </a:solidFill>
+          <a:ln>
+            <a:noFill/>
+          </a:ln>
+          <a:effectLst/>
+        </p:spPr>
+        <p:style>
+          <a:lnRef idx="1">
+            <a:schemeClr val="accent1"/>
+          </a:lnRef>
+          <a:fillRef idx="3">
+            <a:schemeClr val="accent1"/>
+          </a:fillRef>
+          <a:effectRef idx="2">
+            <a:schemeClr val="accent1"/>
+          </a:effectRef>
+          <a:fontRef idx="minor">
+            <a:schemeClr val="lt1"/>
+          </a:fontRef>
+        </p:style>
+        <p:txBody>
+          <a:bodyPr rtlCol="0" anchor="ctr"/>
+          <a:lstStyle/>
+          <a:p>
+            <a:pPr algn="ctr"/>
+          </a:p>
+        </p:txBody>
+      </p:sp>
+      <p:sp>
+        <p:nvSpPr>
+          <p:cNvPr id="6" name="TextBox 5"/>
           <p:cNvSpPr txBox="1"/>
           <p:nvPr/>
         </p:nvSpPr>
         <p:spPr>
           <a:xfrm>
-            <a:off x="548640" y="3703320"/>
-            <a:ext cx="11064240" cy="2377440"/>
+            <a:off x="7909560" y="1554480"/>
+            <a:ext cx="3474720" cy="4114800"/>
           </a:xfrm>
           <a:prstGeom prst="rect">
             <a:avLst/>
@@ -6225,13 +5873,13 @@
               </a:lnSpc>
             </a:pPr>
             <a:r>
-              <a:rPr sz="1300" b="1">
+              <a:rPr sz="1400" b="1">
                 <a:solidFill>
                   <a:srgbClr val="0B0B0B"/>
                 </a:solidFill>
                 <a:latin typeface="DejaVu Sans"/>
               </a:rPr>
-              <a:t>The first two rows are the ablation: same question, same model, same prompts — the gate is the only difference.</a:t>
+              <a:t>The gate-off arm did not fabricate.</a:t>
             </a:r>
           </a:p>
           <a:p>
@@ -6241,13 +5889,13 @@
               </a:lnSpc>
             </a:pPr>
             <a:r>
-              <a:rPr sz="1200" b="0">
+              <a:rPr sz="1050" b="0">
                 <a:solidFill>
                   <a:srgbClr val="52514E"/>
                 </a:solidFill>
                 <a:latin typeface="DejaVu Sans"/>
               </a:rPr>
-              <a:t>The third is the archived Agent Laboratory run on its own topic. One controlled pair shows what the gate changes; an independent instance shows the failure was not manufactured for the occasion.</a:t>
+              <a:t>Its Results section says so itself: “the decisive measurements … are not present in the evidence window. The captured log was truncated at the legacy 1,000-character boundary.” It then reports the loss curve it could see.</a:t>
             </a:r>
           </a:p>
           <a:p>
@@ -6257,7 +5905,7 @@
               </a:lnSpc>
             </a:pPr>
             <a:r>
-              <a:rPr sz="800" b="0">
+              <a:rPr sz="700" b="0">
                 <a:solidFill>
                   <a:srgbClr val="52514E"/>
                 </a:solidFill>
@@ -6273,13 +5921,13 @@
               </a:lnSpc>
             </a:pPr>
             <a:r>
-              <a:rPr sz="1200" b="0">
-                <a:solidFill>
-                  <a:srgbClr val="52514E"/>
+              <a:rPr sz="1100" b="1">
+                <a:solidFill>
+                  <a:srgbClr val="EB6834"/>
                 </a:solidFill>
                 <a:latin typeface="DejaVu Sans"/>
               </a:rPr>
-              <a:t>That archived paper states 65 numeric findings and sources none of them: 81.60% test accuracy, a 13.61x speedup, a 39.20% collapse. Its saved code calls record_result zero times and contains none of those numbers. The run behind it raised NameError on every attempt and scored 1.0.</a:t>
+              <a:t>An honest paper about a truncated log.</a:t>
             </a:r>
           </a:p>
           <a:p>
@@ -6289,13 +5937,100 @@
               </a:lnSpc>
             </a:pPr>
             <a:r>
-              <a:rPr sz="1300" b="1">
-                <a:solidFill>
-                  <a:srgbClr val="EB6834"/>
+              <a:rPr sz="700" b="0">
+                <a:solidFill>
+                  <a:srgbClr val="52514E"/>
                 </a:solidFill>
                 <a:latin typeface="DejaVu Sans"/>
               </a:rPr>
-              <a:t>Nothing in the pipeline could tell the difference between a measurement and a sentence.</a:t>
+              <a:t/>
+            </a:r>
+          </a:p>
+          <a:p>
+            <a:pPr algn="l">
+              <a:lnSpc>
+                <a:spcPct val="115000"/>
+              </a:lnSpc>
+            </a:pPr>
+            <a:r>
+              <a:rPr sz="1050" b="0">
+                <a:solidFill>
+                  <a:srgbClr val="52514E"/>
+                </a:solidFill>
+                <a:latin typeface="DejaVu Sans"/>
+              </a:rPr>
+              <a:t>So two things are doing work, and only one of them is the gate. The prompt — shared by both arms — forbids describing an unrecorded quantity, and that is what stops fabrication. Gate 1 is what gets the results to the writer, bound to the run.</a:t>
+            </a:r>
+          </a:p>
+          <a:p>
+            <a:pPr algn="l">
+              <a:lnSpc>
+                <a:spcPct val="115000"/>
+              </a:lnSpc>
+            </a:pPr>
+            <a:r>
+              <a:rPr sz="700" b="0">
+                <a:solidFill>
+                  <a:srgbClr val="52514E"/>
+                </a:solidFill>
+                <a:latin typeface="DejaVu Sans"/>
+              </a:rPr>
+              <a:t/>
+            </a:r>
+          </a:p>
+          <a:p>
+            <a:pPr algn="l">
+              <a:lnSpc>
+                <a:spcPct val="115000"/>
+              </a:lnSpc>
+            </a:pPr>
+            <a:r>
+              <a:rPr sz="1050" b="1">
+                <a:solidFill>
+                  <a:srgbClr val="2A78D6"/>
+                </a:solidFill>
+                <a:latin typeface="DejaVu Sans"/>
+              </a:rPr>
+              <a:t>Instruction without delivery: an honest paper with no findings. Delivery without instruction: the archived paper, 65 of 65 unsourced.</a:t>
+            </a:r>
+          </a:p>
+        </p:txBody>
+      </p:sp>
+      <p:sp>
+        <p:nvSpPr>
+          <p:cNvPr id="7" name="TextBox 6"/>
+          <p:cNvSpPr txBox="1"/>
+          <p:nvPr/>
+        </p:nvSpPr>
+        <p:spPr>
+          <a:xfrm>
+            <a:off x="548640" y="5486400"/>
+            <a:ext cx="6949440" cy="1097280"/>
+          </a:xfrm>
+          <a:prstGeom prst="rect">
+            <a:avLst/>
+          </a:prstGeom>
+          <a:noFill/>
+        </p:spPr>
+        <p:txBody>
+          <a:bodyPr wrap="square">
+            <a:spAutoFit/>
+          </a:bodyPr>
+          <a:lstStyle/>
+          <a:p>
+            <a:pPr algn="l">
+              <a:lnSpc>
+                <a:spcPct val="115000"/>
+              </a:lnSpc>
+            </a:pPr>
+            <a:r>
+              <a:rPr sz="1000" b="0">
+                <a:solidFill>
+                  <a:srgbClr val="8A8880"/>
+                </a:solidFill>
+                <a:latin typeface="DejaVu Sans"/>
+              </a:rPr>
+              <a:t>The gate-off arm is credited for every value its run recorded to disk — none of which reached the writer. The comparison is generous on purpose; the gap that survives is the claim.</a:t>
             </a:r>
           </a:p>
         </p:txBody>
@@ -6744,7 +6479,7 @@
         </p:nvGraphicFramePr>
         <p:xfrm>
           <a:off x="548640" y="1554480"/>
-          <a:ext cx="11064240" cy="2816352"/>
+          <a:ext cx="11064240" cy="6035040"/>
         </p:xfrm>
         <a:graphic>
           <a:graphicData uri="http://schemas.openxmlformats.org/drawingml/2006/table">
@@ -7444,6 +7179,790 @@
                   </a:tcPr>
                 </a:tc>
               </a:tr>
+              <a:tr h="402336">
+                <a:tc>
+                  <a:txBody>
+                    <a:bodyPr/>
+                    <a:lstStyle/>
+                    <a:p>
+                      <a:pPr>
+                        <a:defRPr sz="1200" b="0">
+                          <a:solidFill>
+                            <a:srgbClr val="52514E"/>
+                          </a:solidFill>
+                          <a:latin typeface="DejaVu Sans"/>
+                        </a:defRPr>
+                      </a:pPr>
+                      <a:r>
+                        <a:t>attempt 09</a:t>
+                      </a:r>
+                    </a:p>
+                  </a:txBody>
+                  <a:tcPr>
+                    <a:solidFill>
+                      <a:srgbClr val="FCFCFB"/>
+                    </a:solidFill>
+                  </a:tcPr>
+                </a:tc>
+                <a:tc>
+                  <a:txBody>
+                    <a:bodyPr/>
+                    <a:lstStyle/>
+                    <a:p>
+                      <a:pPr>
+                        <a:defRPr sz="1200" b="0">
+                          <a:solidFill>
+                            <a:srgbClr val="52514E"/>
+                          </a:solidFill>
+                          <a:latin typeface="DejaVu Sans"/>
+                        </a:defRPr>
+                      </a:pPr>
+                      <a:r>
+                        <a:t>PASS</a:t>
+                      </a:r>
+                    </a:p>
+                  </a:txBody>
+                  <a:tcPr>
+                    <a:solidFill>
+                      <a:srgbClr val="FCFCFB"/>
+                    </a:solidFill>
+                  </a:tcPr>
+                </a:tc>
+                <a:tc>
+                  <a:txBody>
+                    <a:bodyPr/>
+                    <a:lstStyle/>
+                    <a:p>
+                      <a:pPr>
+                        <a:defRPr sz="1200" b="0">
+                          <a:solidFill>
+                            <a:srgbClr val="52514E"/>
+                          </a:solidFill>
+                          <a:latin typeface="DejaVu Sans"/>
+                        </a:defRPr>
+                      </a:pPr>
+                      <a:r>
+                        <a:t>12</a:t>
+                      </a:r>
+                    </a:p>
+                  </a:txBody>
+                  <a:tcPr>
+                    <a:solidFill>
+                      <a:srgbClr val="FCFCFB"/>
+                    </a:solidFill>
+                  </a:tcPr>
+                </a:tc>
+                <a:tc>
+                  <a:txBody>
+                    <a:bodyPr/>
+                    <a:lstStyle/>
+                    <a:p>
+                      <a:pPr>
+                        <a:defRPr sz="1200" b="0">
+                          <a:solidFill>
+                            <a:srgbClr val="52514E"/>
+                          </a:solidFill>
+                          <a:latin typeface="DejaVu Sans"/>
+                        </a:defRPr>
+                      </a:pPr>
+                      <a:r>
+                        <a:t>—</a:t>
+                      </a:r>
+                    </a:p>
+                  </a:txBody>
+                  <a:tcPr>
+                    <a:solidFill>
+                      <a:srgbClr val="FCFCFB"/>
+                    </a:solidFill>
+                  </a:tcPr>
+                </a:tc>
+              </a:tr>
+              <a:tr h="402336">
+                <a:tc>
+                  <a:txBody>
+                    <a:bodyPr/>
+                    <a:lstStyle/>
+                    <a:p>
+                      <a:pPr>
+                        <a:defRPr sz="1200" b="0">
+                          <a:solidFill>
+                            <a:srgbClr val="52514E"/>
+                          </a:solidFill>
+                          <a:latin typeface="DejaVu Sans"/>
+                        </a:defRPr>
+                      </a:pPr>
+                      <a:r>
+                        <a:t>attempt 10</a:t>
+                      </a:r>
+                    </a:p>
+                  </a:txBody>
+                  <a:tcPr>
+                    <a:solidFill>
+                      <a:srgbClr val="FCFCFB"/>
+                    </a:solidFill>
+                  </a:tcPr>
+                </a:tc>
+                <a:tc>
+                  <a:txBody>
+                    <a:bodyPr/>
+                    <a:lstStyle/>
+                    <a:p>
+                      <a:pPr>
+                        <a:defRPr sz="1200" b="0">
+                          <a:solidFill>
+                            <a:srgbClr val="52514E"/>
+                          </a:solidFill>
+                          <a:latin typeface="DejaVu Sans"/>
+                        </a:defRPr>
+                      </a:pPr>
+                      <a:r>
+                        <a:t>FAIL</a:t>
+                      </a:r>
+                    </a:p>
+                  </a:txBody>
+                  <a:tcPr>
+                    <a:solidFill>
+                      <a:srgbClr val="FCFCFB"/>
+                    </a:solidFill>
+                  </a:tcPr>
+                </a:tc>
+                <a:tc>
+                  <a:txBody>
+                    <a:bodyPr/>
+                    <a:lstStyle/>
+                    <a:p>
+                      <a:pPr>
+                        <a:defRPr sz="1200" b="0">
+                          <a:solidFill>
+                            <a:srgbClr val="52514E"/>
+                          </a:solidFill>
+                          <a:latin typeface="DejaVu Sans"/>
+                        </a:defRPr>
+                      </a:pPr>
+                      <a:r>
+                        <a:t>4</a:t>
+                      </a:r>
+                    </a:p>
+                  </a:txBody>
+                  <a:tcPr>
+                    <a:solidFill>
+                      <a:srgbClr val="FCFCFB"/>
+                    </a:solidFill>
+                  </a:tcPr>
+                </a:tc>
+                <a:tc>
+                  <a:txBody>
+                    <a:bodyPr/>
+                    <a:lstStyle/>
+                    <a:p>
+                      <a:pPr>
+                        <a:defRPr sz="1200" b="0">
+                          <a:solidFill>
+                            <a:srgbClr val="52514E"/>
+                          </a:solidFill>
+                          <a:latin typeface="DejaVu Sans"/>
+                        </a:defRPr>
+                      </a:pPr>
+                      <a:r>
+                        <a:t>exec.exit_code_zero, exec.no_uncaught_exception</a:t>
+                      </a:r>
+                    </a:p>
+                  </a:txBody>
+                  <a:tcPr>
+                    <a:solidFill>
+                      <a:srgbClr val="FCFCFB"/>
+                    </a:solidFill>
+                  </a:tcPr>
+                </a:tc>
+              </a:tr>
+              <a:tr h="402336">
+                <a:tc>
+                  <a:txBody>
+                    <a:bodyPr/>
+                    <a:lstStyle/>
+                    <a:p>
+                      <a:pPr>
+                        <a:defRPr sz="1200" b="0">
+                          <a:solidFill>
+                            <a:srgbClr val="52514E"/>
+                          </a:solidFill>
+                          <a:latin typeface="DejaVu Sans"/>
+                        </a:defRPr>
+                      </a:pPr>
+                      <a:r>
+                        <a:t>attempt 11</a:t>
+                      </a:r>
+                    </a:p>
+                  </a:txBody>
+                  <a:tcPr>
+                    <a:solidFill>
+                      <a:srgbClr val="FCFCFB"/>
+                    </a:solidFill>
+                  </a:tcPr>
+                </a:tc>
+                <a:tc>
+                  <a:txBody>
+                    <a:bodyPr/>
+                    <a:lstStyle/>
+                    <a:p>
+                      <a:pPr>
+                        <a:defRPr sz="1200" b="0">
+                          <a:solidFill>
+                            <a:srgbClr val="52514E"/>
+                          </a:solidFill>
+                          <a:latin typeface="DejaVu Sans"/>
+                        </a:defRPr>
+                      </a:pPr>
+                      <a:r>
+                        <a:t>PASS</a:t>
+                      </a:r>
+                    </a:p>
+                  </a:txBody>
+                  <a:tcPr>
+                    <a:solidFill>
+                      <a:srgbClr val="FCFCFB"/>
+                    </a:solidFill>
+                  </a:tcPr>
+                </a:tc>
+                <a:tc>
+                  <a:txBody>
+                    <a:bodyPr/>
+                    <a:lstStyle/>
+                    <a:p>
+                      <a:pPr>
+                        <a:defRPr sz="1200" b="0">
+                          <a:solidFill>
+                            <a:srgbClr val="52514E"/>
+                          </a:solidFill>
+                          <a:latin typeface="DejaVu Sans"/>
+                        </a:defRPr>
+                      </a:pPr>
+                      <a:r>
+                        <a:t>12</a:t>
+                      </a:r>
+                    </a:p>
+                  </a:txBody>
+                  <a:tcPr>
+                    <a:solidFill>
+                      <a:srgbClr val="FCFCFB"/>
+                    </a:solidFill>
+                  </a:tcPr>
+                </a:tc>
+                <a:tc>
+                  <a:txBody>
+                    <a:bodyPr/>
+                    <a:lstStyle/>
+                    <a:p>
+                      <a:pPr>
+                        <a:defRPr sz="1200" b="0">
+                          <a:solidFill>
+                            <a:srgbClr val="52514E"/>
+                          </a:solidFill>
+                          <a:latin typeface="DejaVu Sans"/>
+                        </a:defRPr>
+                      </a:pPr>
+                      <a:r>
+                        <a:t>—</a:t>
+                      </a:r>
+                    </a:p>
+                  </a:txBody>
+                  <a:tcPr>
+                    <a:solidFill>
+                      <a:srgbClr val="FCFCFB"/>
+                    </a:solidFill>
+                  </a:tcPr>
+                </a:tc>
+              </a:tr>
+              <a:tr h="402336">
+                <a:tc>
+                  <a:txBody>
+                    <a:bodyPr/>
+                    <a:lstStyle/>
+                    <a:p>
+                      <a:pPr>
+                        <a:defRPr sz="1200" b="0">
+                          <a:solidFill>
+                            <a:srgbClr val="52514E"/>
+                          </a:solidFill>
+                          <a:latin typeface="DejaVu Sans"/>
+                        </a:defRPr>
+                      </a:pPr>
+                      <a:r>
+                        <a:t>attempt 12</a:t>
+                      </a:r>
+                    </a:p>
+                  </a:txBody>
+                  <a:tcPr>
+                    <a:solidFill>
+                      <a:srgbClr val="FCFCFB"/>
+                    </a:solidFill>
+                  </a:tcPr>
+                </a:tc>
+                <a:tc>
+                  <a:txBody>
+                    <a:bodyPr/>
+                    <a:lstStyle/>
+                    <a:p>
+                      <a:pPr>
+                        <a:defRPr sz="1200" b="0">
+                          <a:solidFill>
+                            <a:srgbClr val="52514E"/>
+                          </a:solidFill>
+                          <a:latin typeface="DejaVu Sans"/>
+                        </a:defRPr>
+                      </a:pPr>
+                      <a:r>
+                        <a:t>PASS</a:t>
+                      </a:r>
+                    </a:p>
+                  </a:txBody>
+                  <a:tcPr>
+                    <a:solidFill>
+                      <a:srgbClr val="FCFCFB"/>
+                    </a:solidFill>
+                  </a:tcPr>
+                </a:tc>
+                <a:tc>
+                  <a:txBody>
+                    <a:bodyPr/>
+                    <a:lstStyle/>
+                    <a:p>
+                      <a:pPr>
+                        <a:defRPr sz="1200" b="0">
+                          <a:solidFill>
+                            <a:srgbClr val="52514E"/>
+                          </a:solidFill>
+                          <a:latin typeface="DejaVu Sans"/>
+                        </a:defRPr>
+                      </a:pPr>
+                      <a:r>
+                        <a:t>12</a:t>
+                      </a:r>
+                    </a:p>
+                  </a:txBody>
+                  <a:tcPr>
+                    <a:solidFill>
+                      <a:srgbClr val="FCFCFB"/>
+                    </a:solidFill>
+                  </a:tcPr>
+                </a:tc>
+                <a:tc>
+                  <a:txBody>
+                    <a:bodyPr/>
+                    <a:lstStyle/>
+                    <a:p>
+                      <a:pPr>
+                        <a:defRPr sz="1200" b="0">
+                          <a:solidFill>
+                            <a:srgbClr val="52514E"/>
+                          </a:solidFill>
+                          <a:latin typeface="DejaVu Sans"/>
+                        </a:defRPr>
+                      </a:pPr>
+                      <a:r>
+                        <a:t>—</a:t>
+                      </a:r>
+                    </a:p>
+                  </a:txBody>
+                  <a:tcPr>
+                    <a:solidFill>
+                      <a:srgbClr val="FCFCFB"/>
+                    </a:solidFill>
+                  </a:tcPr>
+                </a:tc>
+              </a:tr>
+              <a:tr h="402336">
+                <a:tc>
+                  <a:txBody>
+                    <a:bodyPr/>
+                    <a:lstStyle/>
+                    <a:p>
+                      <a:pPr>
+                        <a:defRPr sz="1200" b="0">
+                          <a:solidFill>
+                            <a:srgbClr val="52514E"/>
+                          </a:solidFill>
+                          <a:latin typeface="DejaVu Sans"/>
+                        </a:defRPr>
+                      </a:pPr>
+                      <a:r>
+                        <a:t>attempt 13</a:t>
+                      </a:r>
+                    </a:p>
+                  </a:txBody>
+                  <a:tcPr>
+                    <a:solidFill>
+                      <a:srgbClr val="FCFCFB"/>
+                    </a:solidFill>
+                  </a:tcPr>
+                </a:tc>
+                <a:tc>
+                  <a:txBody>
+                    <a:bodyPr/>
+                    <a:lstStyle/>
+                    <a:p>
+                      <a:pPr>
+                        <a:defRPr sz="1200" b="0">
+                          <a:solidFill>
+                            <a:srgbClr val="52514E"/>
+                          </a:solidFill>
+                          <a:latin typeface="DejaVu Sans"/>
+                        </a:defRPr>
+                      </a:pPr>
+                      <a:r>
+                        <a:t>PASS</a:t>
+                      </a:r>
+                    </a:p>
+                  </a:txBody>
+                  <a:tcPr>
+                    <a:solidFill>
+                      <a:srgbClr val="FCFCFB"/>
+                    </a:solidFill>
+                  </a:tcPr>
+                </a:tc>
+                <a:tc>
+                  <a:txBody>
+                    <a:bodyPr/>
+                    <a:lstStyle/>
+                    <a:p>
+                      <a:pPr>
+                        <a:defRPr sz="1200" b="0">
+                          <a:solidFill>
+                            <a:srgbClr val="52514E"/>
+                          </a:solidFill>
+                          <a:latin typeface="DejaVu Sans"/>
+                        </a:defRPr>
+                      </a:pPr>
+                      <a:r>
+                        <a:t>12</a:t>
+                      </a:r>
+                    </a:p>
+                  </a:txBody>
+                  <a:tcPr>
+                    <a:solidFill>
+                      <a:srgbClr val="FCFCFB"/>
+                    </a:solidFill>
+                  </a:tcPr>
+                </a:tc>
+                <a:tc>
+                  <a:txBody>
+                    <a:bodyPr/>
+                    <a:lstStyle/>
+                    <a:p>
+                      <a:pPr>
+                        <a:defRPr sz="1200" b="0">
+                          <a:solidFill>
+                            <a:srgbClr val="52514E"/>
+                          </a:solidFill>
+                          <a:latin typeface="DejaVu Sans"/>
+                        </a:defRPr>
+                      </a:pPr>
+                      <a:r>
+                        <a:t>—</a:t>
+                      </a:r>
+                    </a:p>
+                  </a:txBody>
+                  <a:tcPr>
+                    <a:solidFill>
+                      <a:srgbClr val="FCFCFB"/>
+                    </a:solidFill>
+                  </a:tcPr>
+                </a:tc>
+              </a:tr>
+              <a:tr h="402336">
+                <a:tc>
+                  <a:txBody>
+                    <a:bodyPr/>
+                    <a:lstStyle/>
+                    <a:p>
+                      <a:pPr>
+                        <a:defRPr sz="1200" b="0">
+                          <a:solidFill>
+                            <a:srgbClr val="52514E"/>
+                          </a:solidFill>
+                          <a:latin typeface="DejaVu Sans"/>
+                        </a:defRPr>
+                      </a:pPr>
+                      <a:r>
+                        <a:t>attempt 14</a:t>
+                      </a:r>
+                    </a:p>
+                  </a:txBody>
+                  <a:tcPr>
+                    <a:solidFill>
+                      <a:srgbClr val="FCFCFB"/>
+                    </a:solidFill>
+                  </a:tcPr>
+                </a:tc>
+                <a:tc>
+                  <a:txBody>
+                    <a:bodyPr/>
+                    <a:lstStyle/>
+                    <a:p>
+                      <a:pPr>
+                        <a:defRPr sz="1200" b="0">
+                          <a:solidFill>
+                            <a:srgbClr val="52514E"/>
+                          </a:solidFill>
+                          <a:latin typeface="DejaVu Sans"/>
+                        </a:defRPr>
+                      </a:pPr>
+                      <a:r>
+                        <a:t>PASS</a:t>
+                      </a:r>
+                    </a:p>
+                  </a:txBody>
+                  <a:tcPr>
+                    <a:solidFill>
+                      <a:srgbClr val="FCFCFB"/>
+                    </a:solidFill>
+                  </a:tcPr>
+                </a:tc>
+                <a:tc>
+                  <a:txBody>
+                    <a:bodyPr/>
+                    <a:lstStyle/>
+                    <a:p>
+                      <a:pPr>
+                        <a:defRPr sz="1200" b="0">
+                          <a:solidFill>
+                            <a:srgbClr val="52514E"/>
+                          </a:solidFill>
+                          <a:latin typeface="DejaVu Sans"/>
+                        </a:defRPr>
+                      </a:pPr>
+                      <a:r>
+                        <a:t>12</a:t>
+                      </a:r>
+                    </a:p>
+                  </a:txBody>
+                  <a:tcPr>
+                    <a:solidFill>
+                      <a:srgbClr val="FCFCFB"/>
+                    </a:solidFill>
+                  </a:tcPr>
+                </a:tc>
+                <a:tc>
+                  <a:txBody>
+                    <a:bodyPr/>
+                    <a:lstStyle/>
+                    <a:p>
+                      <a:pPr>
+                        <a:defRPr sz="1200" b="0">
+                          <a:solidFill>
+                            <a:srgbClr val="52514E"/>
+                          </a:solidFill>
+                          <a:latin typeface="DejaVu Sans"/>
+                        </a:defRPr>
+                      </a:pPr>
+                      <a:r>
+                        <a:t>—</a:t>
+                      </a:r>
+                    </a:p>
+                  </a:txBody>
+                  <a:tcPr>
+                    <a:solidFill>
+                      <a:srgbClr val="FCFCFB"/>
+                    </a:solidFill>
+                  </a:tcPr>
+                </a:tc>
+              </a:tr>
+              <a:tr h="402336">
+                <a:tc>
+                  <a:txBody>
+                    <a:bodyPr/>
+                    <a:lstStyle/>
+                    <a:p>
+                      <a:pPr>
+                        <a:defRPr sz="1200" b="0">
+                          <a:solidFill>
+                            <a:srgbClr val="52514E"/>
+                          </a:solidFill>
+                          <a:latin typeface="DejaVu Sans"/>
+                        </a:defRPr>
+                      </a:pPr>
+                      <a:r>
+                        <a:t>attempt 15</a:t>
+                      </a:r>
+                    </a:p>
+                  </a:txBody>
+                  <a:tcPr>
+                    <a:solidFill>
+                      <a:srgbClr val="FCFCFB"/>
+                    </a:solidFill>
+                  </a:tcPr>
+                </a:tc>
+                <a:tc>
+                  <a:txBody>
+                    <a:bodyPr/>
+                    <a:lstStyle/>
+                    <a:p>
+                      <a:pPr>
+                        <a:defRPr sz="1200" b="0">
+                          <a:solidFill>
+                            <a:srgbClr val="52514E"/>
+                          </a:solidFill>
+                          <a:latin typeface="DejaVu Sans"/>
+                        </a:defRPr>
+                      </a:pPr>
+                      <a:r>
+                        <a:t>PASS</a:t>
+                      </a:r>
+                    </a:p>
+                  </a:txBody>
+                  <a:tcPr>
+                    <a:solidFill>
+                      <a:srgbClr val="FCFCFB"/>
+                    </a:solidFill>
+                  </a:tcPr>
+                </a:tc>
+                <a:tc>
+                  <a:txBody>
+                    <a:bodyPr/>
+                    <a:lstStyle/>
+                    <a:p>
+                      <a:pPr>
+                        <a:defRPr sz="1200" b="0">
+                          <a:solidFill>
+                            <a:srgbClr val="52514E"/>
+                          </a:solidFill>
+                          <a:latin typeface="DejaVu Sans"/>
+                        </a:defRPr>
+                      </a:pPr>
+                      <a:r>
+                        <a:t>12</a:t>
+                      </a:r>
+                    </a:p>
+                  </a:txBody>
+                  <a:tcPr>
+                    <a:solidFill>
+                      <a:srgbClr val="FCFCFB"/>
+                    </a:solidFill>
+                  </a:tcPr>
+                </a:tc>
+                <a:tc>
+                  <a:txBody>
+                    <a:bodyPr/>
+                    <a:lstStyle/>
+                    <a:p>
+                      <a:pPr>
+                        <a:defRPr sz="1200" b="0">
+                          <a:solidFill>
+                            <a:srgbClr val="52514E"/>
+                          </a:solidFill>
+                          <a:latin typeface="DejaVu Sans"/>
+                        </a:defRPr>
+                      </a:pPr>
+                      <a:r>
+                        <a:t>—</a:t>
+                      </a:r>
+                    </a:p>
+                  </a:txBody>
+                  <a:tcPr>
+                    <a:solidFill>
+                      <a:srgbClr val="FCFCFB"/>
+                    </a:solidFill>
+                  </a:tcPr>
+                </a:tc>
+              </a:tr>
+              <a:tr h="402336">
+                <a:tc>
+                  <a:txBody>
+                    <a:bodyPr/>
+                    <a:lstStyle/>
+                    <a:p>
+                      <a:pPr>
+                        <a:defRPr sz="1200" b="0">
+                          <a:solidFill>
+                            <a:srgbClr val="52514E"/>
+                          </a:solidFill>
+                          <a:latin typeface="DejaVu Sans"/>
+                        </a:defRPr>
+                      </a:pPr>
+                      <a:r>
+                        <a:t>attempt 16</a:t>
+                      </a:r>
+                    </a:p>
+                  </a:txBody>
+                  <a:tcPr>
+                    <a:solidFill>
+                      <a:srgbClr val="FCFCFB"/>
+                    </a:solidFill>
+                  </a:tcPr>
+                </a:tc>
+                <a:tc>
+                  <a:txBody>
+                    <a:bodyPr/>
+                    <a:lstStyle/>
+                    <a:p>
+                      <a:pPr>
+                        <a:defRPr sz="1200" b="0">
+                          <a:solidFill>
+                            <a:srgbClr val="52514E"/>
+                          </a:solidFill>
+                          <a:latin typeface="DejaVu Sans"/>
+                        </a:defRPr>
+                      </a:pPr>
+                      <a:r>
+                        <a:t>PASS</a:t>
+                      </a:r>
+                    </a:p>
+                  </a:txBody>
+                  <a:tcPr>
+                    <a:solidFill>
+                      <a:srgbClr val="FCFCFB"/>
+                    </a:solidFill>
+                  </a:tcPr>
+                </a:tc>
+                <a:tc>
+                  <a:txBody>
+                    <a:bodyPr/>
+                    <a:lstStyle/>
+                    <a:p>
+                      <a:pPr>
+                        <a:defRPr sz="1200" b="0">
+                          <a:solidFill>
+                            <a:srgbClr val="52514E"/>
+                          </a:solidFill>
+                          <a:latin typeface="DejaVu Sans"/>
+                        </a:defRPr>
+                      </a:pPr>
+                      <a:r>
+                        <a:t>12</a:t>
+                      </a:r>
+                    </a:p>
+                  </a:txBody>
+                  <a:tcPr>
+                    <a:solidFill>
+                      <a:srgbClr val="FCFCFB"/>
+                    </a:solidFill>
+                  </a:tcPr>
+                </a:tc>
+                <a:tc>
+                  <a:txBody>
+                    <a:bodyPr/>
+                    <a:lstStyle/>
+                    <a:p>
+                      <a:pPr>
+                        <a:defRPr sz="1200" b="0">
+                          <a:solidFill>
+                            <a:srgbClr val="52514E"/>
+                          </a:solidFill>
+                          <a:latin typeface="DejaVu Sans"/>
+                        </a:defRPr>
+                      </a:pPr>
+                      <a:r>
+                        <a:t>—</a:t>
+                      </a:r>
+                    </a:p>
+                  </a:txBody>
+                  <a:tcPr>
+                    <a:solidFill>
+                      <a:srgbClr val="FCFCFB"/>
+                    </a:solidFill>
+                  </a:tcPr>
+                </a:tc>
+              </a:tr>
             </a:tbl>
           </a:graphicData>
         </a:graphic>
@@ -7456,7 +7975,7 @@
         </p:nvSpPr>
         <p:spPr>
           <a:xfrm>
-            <a:off x="548640" y="4736592"/>
+            <a:off x="548640" y="7955280"/>
             <a:ext cx="11064240" cy="1828800"/>
           </a:xfrm>
           <a:prstGeom prst="rect">
@@ -7664,7 +8183,7 @@
                         </a:defRPr>
                       </a:pPr>
                       <a:r>
-                        <a:t>role (summed over 5 runs)</a:t>
+                        <a:t>role (summed over 6 runs)</a:t>
                       </a:r>
                     </a:p>
                   </a:txBody>
@@ -7834,7 +8353,7 @@
                         </a:defRPr>
                       </a:pPr>
                       <a:r>
-                        <a:t>16</a:t>
+                        <a:t>21</a:t>
                       </a:r>
                     </a:p>
                   </a:txBody>
@@ -7858,7 +8377,7 @@
                         </a:defRPr>
                       </a:pPr>
                       <a:r>
-                        <a:t>9,972</a:t>
+                        <a:t>13,626</a:t>
                       </a:r>
                     </a:p>
                   </a:txBody>
@@ -7882,7 +8401,7 @@
                         </a:defRPr>
                       </a:pPr>
                       <a:r>
-                        <a:t>45,130</a:t>
+                        <a:t>47,871</a:t>
                       </a:r>
                     </a:p>
                   </a:txBody>
@@ -7980,7 +8499,7 @@
                         </a:defRPr>
                       </a:pPr>
                       <a:r>
-                        <a:t>19</a:t>
+                        <a:t>26</a:t>
                       </a:r>
                     </a:p>
                   </a:txBody>
@@ -8004,7 +8523,7 @@
                         </a:defRPr>
                       </a:pPr>
                       <a:r>
-                        <a:t>11,323</a:t>
+                        <a:t>14,857</a:t>
                       </a:r>
                     </a:p>
                   </a:txBody>
@@ -8028,7 +8547,7 @@
                         </a:defRPr>
                       </a:pPr>
                       <a:r>
-                        <a:t>13,894</a:t>
+                        <a:t>17,855</a:t>
                       </a:r>
                     </a:p>
                   </a:txBody>
@@ -8169,7 +8688,7 @@
                 </a:solidFill>
                 <a:latin typeface="DejaVu Sans"/>
               </a:rPr>
-              <a:t>4x</a:t>
+              <a:t>3x</a:t>
             </a:r>
           </a:p>
         </p:txBody>
@@ -8291,7 +8810,7 @@
                 </a:solidFill>
                 <a:latin typeface="DejaVu Sans"/>
               </a:rPr>
-              <a:t>13,894</a:t>
+              <a:t>17,855</a:t>
             </a:r>
           </a:p>
         </p:txBody>
